--- a/docs/deck/Bidwire.pptx
+++ b/docs/deck/Bidwire.pptx
@@ -20300,7 +20300,7 @@
         </p:nvSpPr>
         <p:spPr>
           <a:xfrm>
-            <a:off x="685800" y="1517904"/>
+            <a:off x="685800" y="1572768"/>
             <a:ext cx="6035040" cy="219456"/>
           </a:xfrm>
           <a:prstGeom prst="rect">
@@ -20335,9 +20335,9 @@
         </p:nvGrpSpPr>
         <p:grpSpPr>
           <a:xfrm>
-            <a:off x="685800" y="1783080"/>
+            <a:off x="685800" y="1828800"/>
             <a:ext cx="6035040" cy="3667887"/>
-            <a:chOff x="685800" y="1783080"/>
+            <a:chOff x="685800" y="1828800"/>
             <a:chExt cx="6035040" cy="3667887"/>
           </a:xfrm>
         </p:grpSpPr>
@@ -20349,7 +20349,7 @@
           </p:nvSpPr>
           <p:spPr>
             <a:xfrm>
-              <a:off x="685800" y="1783080"/>
+              <a:off x="685800" y="1828800"/>
               <a:ext cx="6035040" cy="3667887"/>
             </a:xfrm>
             <a:prstGeom prst="roundRect">
@@ -20389,7 +20389,7 @@
           </p:nvSpPr>
           <p:spPr>
             <a:xfrm>
-              <a:off x="832104" y="1883664"/>
+              <a:off x="832104" y="1929384"/>
               <a:ext cx="73152" cy="73152"/>
             </a:xfrm>
             <a:prstGeom prst="ellipse">
@@ -20418,7 +20418,7 @@
           </p:nvSpPr>
           <p:spPr>
             <a:xfrm>
-              <a:off x="969264" y="1883664"/>
+              <a:off x="969264" y="1929384"/>
               <a:ext cx="73152" cy="73152"/>
             </a:xfrm>
             <a:prstGeom prst="ellipse">
@@ -20447,7 +20447,7 @@
           </p:nvSpPr>
           <p:spPr>
             <a:xfrm>
-              <a:off x="1106424" y="1883664"/>
+              <a:off x="1106424" y="1929384"/>
               <a:ext cx="73152" cy="73152"/>
             </a:xfrm>
             <a:prstGeom prst="ellipse">
@@ -20476,7 +20476,7 @@
           </p:nvSpPr>
           <p:spPr>
             <a:xfrm>
-              <a:off x="2496312" y="1842516"/>
+              <a:off x="2496312" y="1888236"/>
               <a:ext cx="2414016" cy="155448"/>
             </a:xfrm>
             <a:prstGeom prst="roundRect">
@@ -20507,7 +20507,7 @@
           </p:nvSpPr>
           <p:spPr>
             <a:xfrm>
-              <a:off x="2496312" y="1842516"/>
+              <a:off x="2496312" y="1888236"/>
               <a:ext cx="2414016" cy="155448"/>
             </a:xfrm>
             <a:prstGeom prst="rect">
@@ -20542,7 +20542,7 @@
           </p:nvSpPr>
           <p:spPr>
             <a:xfrm>
-              <a:off x="694944" y="2048256"/>
+              <a:off x="694944" y="2093976"/>
               <a:ext cx="6016752" cy="7315"/>
             </a:xfrm>
             <a:prstGeom prst="rect">
@@ -20571,7 +20571,7 @@
           </p:nvSpPr>
           <p:spPr>
             <a:xfrm>
-              <a:off x="694944" y="2057400"/>
+              <a:off x="694944" y="2103120"/>
               <a:ext cx="6016752" cy="3384423"/>
             </a:xfrm>
             <a:prstGeom prst="roundRect">
@@ -20602,7 +20602,7 @@
           </p:nvSpPr>
           <p:spPr>
             <a:xfrm>
-              <a:off x="694944" y="2057400"/>
+              <a:off x="694944" y="2103120"/>
               <a:ext cx="6016752" cy="292608"/>
             </a:xfrm>
             <a:prstGeom prst="rect">
@@ -20631,7 +20631,7 @@
           </p:nvSpPr>
           <p:spPr>
             <a:xfrm>
-              <a:off x="694944" y="2350008"/>
+              <a:off x="694944" y="2395728"/>
               <a:ext cx="6016752" cy="7315"/>
             </a:xfrm>
             <a:prstGeom prst="rect">
@@ -20660,7 +20660,7 @@
           </p:nvSpPr>
           <p:spPr>
             <a:xfrm>
-              <a:off x="859536" y="2057400"/>
+              <a:off x="859536" y="2103120"/>
               <a:ext cx="2743200" cy="292608"/>
             </a:xfrm>
             <a:prstGeom prst="rect">
@@ -20704,7 +20704,7 @@
           </p:nvSpPr>
           <p:spPr>
             <a:xfrm>
-              <a:off x="832104" y="2468880"/>
+              <a:off x="832104" y="2514600"/>
               <a:ext cx="3730386" cy="1421458"/>
             </a:xfrm>
             <a:prstGeom prst="roundRect">
@@ -20735,7 +20735,7 @@
           </p:nvSpPr>
           <p:spPr>
             <a:xfrm>
-              <a:off x="877824" y="2514600"/>
+              <a:off x="877824" y="2560320"/>
               <a:ext cx="3638946" cy="1330018"/>
             </a:xfrm>
             <a:prstGeom prst="roundRect">
@@ -20768,7 +20768,7 @@
           </p:nvSpPr>
           <p:spPr>
             <a:xfrm>
-              <a:off x="996696" y="2560320"/>
+              <a:off x="996696" y="2606040"/>
               <a:ext cx="3456066" cy="219456"/>
             </a:xfrm>
             <a:prstGeom prst="rect">
@@ -20803,7 +20803,7 @@
           </p:nvSpPr>
           <p:spPr>
             <a:xfrm>
-              <a:off x="996696" y="2770632"/>
+              <a:off x="996696" y="2816352"/>
               <a:ext cx="3456066" cy="182880"/>
             </a:xfrm>
             <a:prstGeom prst="rect">
@@ -20838,7 +20838,7 @@
           </p:nvSpPr>
           <p:spPr>
             <a:xfrm>
-              <a:off x="996696" y="2926080"/>
+              <a:off x="996696" y="2971800"/>
               <a:ext cx="3456066" cy="568583"/>
             </a:xfrm>
             <a:prstGeom prst="rect">
@@ -20873,7 +20873,7 @@
           </p:nvSpPr>
           <p:spPr>
             <a:xfrm>
-              <a:off x="996696" y="3561154"/>
+              <a:off x="996696" y="3606874"/>
               <a:ext cx="3456066" cy="201168"/>
             </a:xfrm>
             <a:prstGeom prst="rect">
@@ -20908,7 +20908,7 @@
           </p:nvSpPr>
           <p:spPr>
             <a:xfrm>
-              <a:off x="4699650" y="2468880"/>
+              <a:off x="4699650" y="2514600"/>
               <a:ext cx="1874886" cy="1421458"/>
             </a:xfrm>
             <a:prstGeom prst="roundRect">
@@ -20941,7 +20941,7 @@
           </p:nvSpPr>
           <p:spPr>
             <a:xfrm>
-              <a:off x="4809378" y="2542032"/>
+              <a:off x="4809378" y="2587752"/>
               <a:ext cx="1463040" cy="219456"/>
             </a:xfrm>
             <a:prstGeom prst="rect">
@@ -20976,7 +20976,7 @@
           </p:nvSpPr>
           <p:spPr>
             <a:xfrm>
-              <a:off x="4809378" y="2779776"/>
+              <a:off x="4809378" y="2825496"/>
               <a:ext cx="1645920" cy="182880"/>
             </a:xfrm>
             <a:prstGeom prst="rect">
@@ -21011,7 +21011,7 @@
           </p:nvSpPr>
           <p:spPr>
             <a:xfrm>
-              <a:off x="4809378" y="3008376"/>
+              <a:off x="4809378" y="3054096"/>
               <a:ext cx="1645920" cy="182880"/>
             </a:xfrm>
             <a:prstGeom prst="rect">
@@ -21046,7 +21046,7 @@
           </p:nvSpPr>
           <p:spPr>
             <a:xfrm>
-              <a:off x="4809378" y="3236976"/>
+              <a:off x="4809378" y="3282696"/>
               <a:ext cx="1645920" cy="182880"/>
             </a:xfrm>
             <a:prstGeom prst="rect">
@@ -21081,7 +21081,7 @@
           </p:nvSpPr>
           <p:spPr>
             <a:xfrm>
-              <a:off x="832104" y="4018354"/>
+              <a:off x="832104" y="4064074"/>
               <a:ext cx="5742432" cy="1313741"/>
             </a:xfrm>
             <a:prstGeom prst="roundRect">
@@ -21114,7 +21114,7 @@
           </p:nvSpPr>
           <p:spPr>
             <a:xfrm>
-              <a:off x="923544" y="4045786"/>
+              <a:off x="923544" y="4091506"/>
               <a:ext cx="365760" cy="251775"/>
             </a:xfrm>
             <a:prstGeom prst="rect">
@@ -21149,7 +21149,7 @@
           </p:nvSpPr>
           <p:spPr>
             <a:xfrm>
-              <a:off x="1243584" y="4045786"/>
+              <a:off x="1243584" y="4091506"/>
               <a:ext cx="3008376" cy="251775"/>
             </a:xfrm>
             <a:prstGeom prst="rect">
@@ -21184,7 +21184,7 @@
           </p:nvSpPr>
           <p:spPr>
             <a:xfrm>
-              <a:off x="6013704" y="4093949"/>
+              <a:off x="6013704" y="4139669"/>
               <a:ext cx="423672" cy="155448"/>
             </a:xfrm>
             <a:prstGeom prst="roundRect">
@@ -21215,7 +21215,7 @@
           </p:nvSpPr>
           <p:spPr>
             <a:xfrm>
-              <a:off x="6013704" y="4093949"/>
+              <a:off x="6013704" y="4139669"/>
               <a:ext cx="423672" cy="155448"/>
             </a:xfrm>
             <a:prstGeom prst="rect">
@@ -21250,7 +21250,7 @@
           </p:nvSpPr>
           <p:spPr>
             <a:xfrm>
-              <a:off x="877824" y="4297561"/>
+              <a:off x="877824" y="4343281"/>
               <a:ext cx="5650992" cy="5486"/>
             </a:xfrm>
             <a:prstGeom prst="rect">
@@ -21279,7 +21279,7 @@
           </p:nvSpPr>
           <p:spPr>
             <a:xfrm>
-              <a:off x="923544" y="4297561"/>
+              <a:off x="923544" y="4343281"/>
               <a:ext cx="365760" cy="251775"/>
             </a:xfrm>
             <a:prstGeom prst="rect">
@@ -21314,7 +21314,7 @@
           </p:nvSpPr>
           <p:spPr>
             <a:xfrm>
-              <a:off x="1243584" y="4297561"/>
+              <a:off x="1243584" y="4343281"/>
               <a:ext cx="3008376" cy="251775"/>
             </a:xfrm>
             <a:prstGeom prst="rect">
@@ -21349,7 +21349,7 @@
           </p:nvSpPr>
           <p:spPr>
             <a:xfrm>
-              <a:off x="5921248" y="4345725"/>
+              <a:off x="5921248" y="4391445"/>
               <a:ext cx="516128" cy="155448"/>
             </a:xfrm>
             <a:prstGeom prst="roundRect">
@@ -21380,7 +21380,7 @@
           </p:nvSpPr>
           <p:spPr>
             <a:xfrm>
-              <a:off x="5921248" y="4345725"/>
+              <a:off x="5921248" y="4391445"/>
               <a:ext cx="516128" cy="155448"/>
             </a:xfrm>
             <a:prstGeom prst="rect">
@@ -21415,7 +21415,7 @@
           </p:nvSpPr>
           <p:spPr>
             <a:xfrm>
-              <a:off x="877824" y="4549337"/>
+              <a:off x="877824" y="4595057"/>
               <a:ext cx="5650992" cy="5486"/>
             </a:xfrm>
             <a:prstGeom prst="rect">
@@ -21444,7 +21444,7 @@
           </p:nvSpPr>
           <p:spPr>
             <a:xfrm>
-              <a:off x="923544" y="4549337"/>
+              <a:off x="923544" y="4595057"/>
               <a:ext cx="365760" cy="251775"/>
             </a:xfrm>
             <a:prstGeom prst="rect">
@@ -21479,7 +21479,7 @@
           </p:nvSpPr>
           <p:spPr>
             <a:xfrm>
-              <a:off x="1243584" y="4549337"/>
+              <a:off x="1243584" y="4595057"/>
               <a:ext cx="3008376" cy="251775"/>
             </a:xfrm>
             <a:prstGeom prst="rect">
@@ -21514,7 +21514,7 @@
           </p:nvSpPr>
           <p:spPr>
             <a:xfrm>
-              <a:off x="5921248" y="4597500"/>
+              <a:off x="5921248" y="4643220"/>
               <a:ext cx="516128" cy="155448"/>
             </a:xfrm>
             <a:prstGeom prst="roundRect">
@@ -21545,7 +21545,7 @@
           </p:nvSpPr>
           <p:spPr>
             <a:xfrm>
-              <a:off x="5921248" y="4597500"/>
+              <a:off x="5921248" y="4643220"/>
               <a:ext cx="516128" cy="155448"/>
             </a:xfrm>
             <a:prstGeom prst="rect">
@@ -21580,7 +21580,7 @@
           </p:nvSpPr>
           <p:spPr>
             <a:xfrm>
-              <a:off x="877824" y="4801112"/>
+              <a:off x="877824" y="4846832"/>
               <a:ext cx="5650992" cy="5486"/>
             </a:xfrm>
             <a:prstGeom prst="rect">
@@ -21609,7 +21609,7 @@
           </p:nvSpPr>
           <p:spPr>
             <a:xfrm>
-              <a:off x="923544" y="4801112"/>
+              <a:off x="923544" y="4846832"/>
               <a:ext cx="365760" cy="251775"/>
             </a:xfrm>
             <a:prstGeom prst="rect">
@@ -21644,7 +21644,7 @@
           </p:nvSpPr>
           <p:spPr>
             <a:xfrm>
-              <a:off x="1243584" y="4801112"/>
+              <a:off x="1243584" y="4846832"/>
               <a:ext cx="3008376" cy="251775"/>
             </a:xfrm>
             <a:prstGeom prst="rect">
@@ -21679,7 +21679,7 @@
           </p:nvSpPr>
           <p:spPr>
             <a:xfrm>
-              <a:off x="5690108" y="4849276"/>
+              <a:off x="5690108" y="4894996"/>
               <a:ext cx="747268" cy="155448"/>
             </a:xfrm>
             <a:prstGeom prst="roundRect">
@@ -21710,7 +21710,7 @@
           </p:nvSpPr>
           <p:spPr>
             <a:xfrm>
-              <a:off x="5690108" y="4849276"/>
+              <a:off x="5690108" y="4894996"/>
               <a:ext cx="747268" cy="155448"/>
             </a:xfrm>
             <a:prstGeom prst="rect">
@@ -21745,7 +21745,7 @@
           </p:nvSpPr>
           <p:spPr>
             <a:xfrm>
-              <a:off x="877824" y="5052888"/>
+              <a:off x="877824" y="5098608"/>
               <a:ext cx="5650992" cy="5486"/>
             </a:xfrm>
             <a:prstGeom prst="rect">
@@ -21774,7 +21774,7 @@
           </p:nvSpPr>
           <p:spPr>
             <a:xfrm>
-              <a:off x="923544" y="5052888"/>
+              <a:off x="923544" y="5098608"/>
               <a:ext cx="365760" cy="251775"/>
             </a:xfrm>
             <a:prstGeom prst="rect">
@@ -21809,7 +21809,7 @@
           </p:nvSpPr>
           <p:spPr>
             <a:xfrm>
-              <a:off x="1243584" y="5052888"/>
+              <a:off x="1243584" y="5098608"/>
               <a:ext cx="3008376" cy="251775"/>
             </a:xfrm>
             <a:prstGeom prst="rect">
@@ -21844,7 +21844,7 @@
           </p:nvSpPr>
           <p:spPr>
             <a:xfrm>
-              <a:off x="5875020" y="5101051"/>
+              <a:off x="5875020" y="5146771"/>
               <a:ext cx="562356" cy="155448"/>
             </a:xfrm>
             <a:prstGeom prst="roundRect">
@@ -21875,7 +21875,7 @@
           </p:nvSpPr>
           <p:spPr>
             <a:xfrm>
-              <a:off x="5875020" y="5101051"/>
+              <a:off x="5875020" y="5146771"/>
               <a:ext cx="562356" cy="155448"/>
             </a:xfrm>
             <a:prstGeom prst="rect">
@@ -21910,7 +21910,7 @@
           </p:nvSpPr>
           <p:spPr>
             <a:xfrm>
-              <a:off x="777240" y="5222367"/>
+              <a:off x="777240" y="5268087"/>
               <a:ext cx="5852160" cy="182880"/>
             </a:xfrm>
             <a:prstGeom prst="rect">
@@ -22322,7 +22322,7 @@
         </p:nvSpPr>
         <p:spPr>
           <a:xfrm>
-            <a:off x="6967728" y="1517904"/>
+            <a:off x="6967728" y="1572768"/>
             <a:ext cx="2377440" cy="219456"/>
           </a:xfrm>
           <a:prstGeom prst="rect">
@@ -22357,10 +22357,10 @@
         </p:nvGrpSpPr>
         <p:grpSpPr>
           <a:xfrm>
-            <a:off x="6967728" y="1783080"/>
-            <a:ext cx="2178677" cy="4544568"/>
-            <a:chOff x="6967728" y="1783080"/>
-            <a:chExt cx="2178677" cy="4544568"/>
+            <a:off x="6967728" y="1828800"/>
+            <a:ext cx="2157551" cy="4498848"/>
+            <a:chOff x="6967728" y="1828800"/>
+            <a:chExt cx="2157551" cy="4498848"/>
           </a:xfrm>
         </p:grpSpPr>
         <p:sp>
@@ -22371,12 +22371,12 @@
           </p:nvSpPr>
           <p:spPr>
             <a:xfrm>
-              <a:off x="6967728" y="1783080"/>
-              <a:ext cx="2178677" cy="4544568"/>
+              <a:off x="6967728" y="1828800"/>
+              <a:ext cx="2157551" cy="4498848"/>
             </a:xfrm>
             <a:prstGeom prst="roundRect">
               <a:avLst>
-                <a:gd name="adj" fmla="val 15109"/>
+                <a:gd name="adj" fmla="val 15257"/>
               </a:avLst>
             </a:prstGeom>
             <a:solidFill>
@@ -22409,12 +22409,12 @@
           </p:nvSpPr>
           <p:spPr>
             <a:xfrm>
-              <a:off x="7040880" y="1856232"/>
-              <a:ext cx="2032373" cy="4398264"/>
+              <a:off x="7040880" y="1901952"/>
+              <a:ext cx="2011247" cy="4352544"/>
             </a:xfrm>
             <a:prstGeom prst="roundRect">
               <a:avLst>
-                <a:gd name="adj" fmla="val 11697"/>
+                <a:gd name="adj" fmla="val 11820"/>
               </a:avLst>
             </a:prstGeom>
             <a:solidFill>
@@ -22440,8 +22440,8 @@
           </p:nvSpPr>
           <p:spPr>
             <a:xfrm>
-              <a:off x="7040880" y="2130552"/>
-              <a:ext cx="2032373" cy="228600"/>
+              <a:off x="7040880" y="2176272"/>
+              <a:ext cx="2011247" cy="228600"/>
             </a:xfrm>
             <a:prstGeom prst="rect">
               <a:avLst/>
@@ -22475,12 +22475,12 @@
           </p:nvSpPr>
           <p:spPr>
             <a:xfrm>
-              <a:off x="7168896" y="2542032"/>
-              <a:ext cx="1575173" cy="1600200"/>
+              <a:off x="7168896" y="2587752"/>
+              <a:ext cx="1554047" cy="1600200"/>
             </a:xfrm>
             <a:prstGeom prst="roundRect">
               <a:avLst>
-                <a:gd name="adj" fmla="val 8127"/>
+                <a:gd name="adj" fmla="val 8237"/>
               </a:avLst>
             </a:prstGeom>
             <a:solidFill>
@@ -22506,8 +22506,8 @@
           </p:nvSpPr>
           <p:spPr>
             <a:xfrm>
-              <a:off x="7278624" y="2633472"/>
-              <a:ext cx="1355717" cy="1463040"/>
+              <a:off x="7278624" y="2679192"/>
+              <a:ext cx="1334591" cy="1463040"/>
             </a:xfrm>
             <a:prstGeom prst="rect">
               <a:avLst/>
@@ -22545,7 +22545,7 @@
           </p:nvSpPr>
           <p:spPr>
             <a:xfrm>
-              <a:off x="8204573" y="4288536"/>
+              <a:off x="8183447" y="4334256"/>
               <a:ext cx="731520" cy="292608"/>
             </a:xfrm>
             <a:prstGeom prst="roundRect">
@@ -22576,7 +22576,7 @@
           </p:nvSpPr>
           <p:spPr>
             <a:xfrm>
-              <a:off x="8204573" y="4288536"/>
+              <a:off x="8183447" y="4334256"/>
               <a:ext cx="731520" cy="292608"/>
             </a:xfrm>
             <a:prstGeom prst="rect">
@@ -22611,8 +22611,8 @@
           </p:nvSpPr>
           <p:spPr>
             <a:xfrm>
-              <a:off x="7178040" y="4782312"/>
-              <a:ext cx="1758053" cy="274320"/>
+              <a:off x="7178040" y="4828032"/>
+              <a:ext cx="1736927" cy="274320"/>
             </a:xfrm>
             <a:prstGeom prst="rect">
               <a:avLst/>
@@ -22647,7 +22647,7 @@
           <p:spPr>
             <a:xfrm>
               <a:off x="7077456" y="6016752"/>
-              <a:ext cx="1959221" cy="182880"/>
+              <a:ext cx="1938095" cy="182880"/>
             </a:xfrm>
             <a:prstGeom prst="rect">
               <a:avLst/>
@@ -22682,10 +22682,10 @@
         </p:nvGrpSpPr>
         <p:grpSpPr>
           <a:xfrm>
-            <a:off x="9402437" y="1783080"/>
-            <a:ext cx="2103458" cy="4544568"/>
-            <a:chOff x="9402437" y="1783080"/>
-            <a:chExt cx="2103458" cy="4544568"/>
+            <a:off x="9381311" y="1828800"/>
+            <a:ext cx="2124585" cy="4498848"/>
+            <a:chOff x="9381311" y="1828800"/>
+            <a:chExt cx="2124585" cy="4498848"/>
           </a:xfrm>
         </p:grpSpPr>
         <p:sp>
@@ -22696,12 +22696,12 @@
           </p:nvSpPr>
           <p:spPr>
             <a:xfrm>
-              <a:off x="9402437" y="1783080"/>
-              <a:ext cx="2103458" cy="4544568"/>
+              <a:off x="9381311" y="1828800"/>
+              <a:ext cx="2124585" cy="4498848"/>
             </a:xfrm>
             <a:prstGeom prst="roundRect">
               <a:avLst>
-                <a:gd name="adj" fmla="val 4347"/>
+                <a:gd name="adj" fmla="val 4303"/>
               </a:avLst>
             </a:prstGeom>
             <a:solidFill>
@@ -22734,12 +22734,12 @@
           </p:nvSpPr>
           <p:spPr>
             <a:xfrm>
-              <a:off x="9466445" y="1847088"/>
-              <a:ext cx="1975442" cy="4416552"/>
+              <a:off x="9445319" y="1892808"/>
+              <a:ext cx="1996569" cy="4370832"/>
             </a:xfrm>
             <a:prstGeom prst="roundRect">
               <a:avLst>
-                <a:gd name="adj" fmla="val 2777"/>
+                <a:gd name="adj" fmla="val 2747"/>
               </a:avLst>
             </a:prstGeom>
             <a:noFill/>
@@ -22768,10 +22768,10 @@
         </p:nvGrpSpPr>
         <p:grpSpPr>
           <a:xfrm>
-            <a:off x="9676757" y="1892808"/>
-            <a:ext cx="1646258" cy="971550"/>
-            <a:chOff x="9676757" y="1892808"/>
-            <a:chExt cx="1646258" cy="971550"/>
+            <a:off x="9655631" y="1938528"/>
+            <a:ext cx="1667385" cy="960120"/>
+            <a:chOff x="9655631" y="1938528"/>
+            <a:chExt cx="1667385" cy="960120"/>
           </a:xfrm>
         </p:grpSpPr>
         <p:sp>
@@ -22782,8 +22782,8 @@
           </p:nvSpPr>
           <p:spPr>
             <a:xfrm>
-              <a:off x="9676757" y="1892808"/>
-              <a:ext cx="1646258" cy="530352"/>
+              <a:off x="9655631" y="1938528"/>
+              <a:ext cx="1667385" cy="530352"/>
             </a:xfrm>
             <a:prstGeom prst="rect">
               <a:avLst/>
@@ -22817,8 +22817,8 @@
           </p:nvSpPr>
           <p:spPr>
             <a:xfrm>
-              <a:off x="9676757" y="2423160"/>
-              <a:ext cx="1600538" cy="441198"/>
+              <a:off x="9655631" y="2468880"/>
+              <a:ext cx="1621665" cy="429768"/>
             </a:xfrm>
             <a:prstGeom prst="rect">
               <a:avLst/>
@@ -22857,8 +22857,8 @@
         </p:nvSpPr>
         <p:spPr>
           <a:xfrm>
-            <a:off x="9631037" y="2919222"/>
-            <a:ext cx="1646258" cy="7315"/>
+            <a:off x="9609911" y="2953512"/>
+            <a:ext cx="1667385" cy="7315"/>
           </a:xfrm>
           <a:prstGeom prst="rect">
             <a:avLst/>
@@ -22886,10 +22886,10 @@
         </p:nvGrpSpPr>
         <p:grpSpPr>
           <a:xfrm>
-            <a:off x="9676757" y="3028950"/>
-            <a:ext cx="1646258" cy="971550"/>
-            <a:chOff x="9676757" y="3028950"/>
-            <a:chExt cx="1646258" cy="971550"/>
+            <a:off x="9655631" y="3063240"/>
+            <a:ext cx="1667385" cy="960120"/>
+            <a:chOff x="9655631" y="3063240"/>
+            <a:chExt cx="1667385" cy="960120"/>
           </a:xfrm>
         </p:grpSpPr>
         <p:sp>
@@ -22900,8 +22900,8 @@
           </p:nvSpPr>
           <p:spPr>
             <a:xfrm>
-              <a:off x="9676757" y="3028950"/>
-              <a:ext cx="1646258" cy="530352"/>
+              <a:off x="9655631" y="3063240"/>
+              <a:ext cx="1667385" cy="530352"/>
             </a:xfrm>
             <a:prstGeom prst="rect">
               <a:avLst/>
@@ -22935,8 +22935,8 @@
           </p:nvSpPr>
           <p:spPr>
             <a:xfrm>
-              <a:off x="9676757" y="3559302"/>
-              <a:ext cx="1600538" cy="441198"/>
+              <a:off x="9655631" y="3593592"/>
+              <a:ext cx="1621665" cy="429768"/>
             </a:xfrm>
             <a:prstGeom prst="rect">
               <a:avLst/>
@@ -22975,8 +22975,8 @@
         </p:nvSpPr>
         <p:spPr>
           <a:xfrm>
-            <a:off x="9631037" y="4055364"/>
-            <a:ext cx="1646258" cy="7315"/>
+            <a:off x="9609911" y="4078224"/>
+            <a:ext cx="1667385" cy="7315"/>
           </a:xfrm>
           <a:prstGeom prst="rect">
             <a:avLst/>
@@ -23004,10 +23004,10 @@
         </p:nvGrpSpPr>
         <p:grpSpPr>
           <a:xfrm>
-            <a:off x="9676757" y="4165092"/>
-            <a:ext cx="1646258" cy="971550"/>
-            <a:chOff x="9676757" y="4165092"/>
-            <a:chExt cx="1646258" cy="971550"/>
+            <a:off x="9655631" y="4187952"/>
+            <a:ext cx="1667385" cy="960120"/>
+            <a:chOff x="9655631" y="4187952"/>
+            <a:chExt cx="1667385" cy="960120"/>
           </a:xfrm>
         </p:grpSpPr>
         <p:sp>
@@ -23018,8 +23018,8 @@
           </p:nvSpPr>
           <p:spPr>
             <a:xfrm>
-              <a:off x="9676757" y="4165092"/>
-              <a:ext cx="1646258" cy="530352"/>
+              <a:off x="9655631" y="4187952"/>
+              <a:ext cx="1667385" cy="530352"/>
             </a:xfrm>
             <a:prstGeom prst="rect">
               <a:avLst/>
@@ -23053,8 +23053,8 @@
           </p:nvSpPr>
           <p:spPr>
             <a:xfrm>
-              <a:off x="9676757" y="4695444"/>
-              <a:ext cx="1600538" cy="441198"/>
+              <a:off x="9655631" y="4718304"/>
+              <a:ext cx="1621665" cy="429768"/>
             </a:xfrm>
             <a:prstGeom prst="rect">
               <a:avLst/>
@@ -23093,8 +23093,8 @@
         </p:nvSpPr>
         <p:spPr>
           <a:xfrm>
-            <a:off x="9631037" y="5191506"/>
-            <a:ext cx="1646258" cy="7315"/>
+            <a:off x="9609911" y="5202936"/>
+            <a:ext cx="1667385" cy="7315"/>
           </a:xfrm>
           <a:prstGeom prst="rect">
             <a:avLst/>
@@ -23122,10 +23122,10 @@
         </p:nvGrpSpPr>
         <p:grpSpPr>
           <a:xfrm>
-            <a:off x="9676757" y="5301234"/>
-            <a:ext cx="1646258" cy="971550"/>
-            <a:chOff x="9676757" y="5301234"/>
-            <a:chExt cx="1646258" cy="971550"/>
+            <a:off x="9655631" y="5312664"/>
+            <a:ext cx="1667385" cy="960120"/>
+            <a:chOff x="9655631" y="5312664"/>
+            <a:chExt cx="1667385" cy="960120"/>
           </a:xfrm>
         </p:grpSpPr>
         <p:sp>
@@ -23136,8 +23136,8 @@
           </p:nvSpPr>
           <p:spPr>
             <a:xfrm>
-              <a:off x="9676757" y="5301234"/>
-              <a:ext cx="1646258" cy="530352"/>
+              <a:off x="9655631" y="5312664"/>
+              <a:ext cx="1667385" cy="530352"/>
             </a:xfrm>
             <a:prstGeom prst="rect">
               <a:avLst/>
@@ -23171,8 +23171,8 @@
           </p:nvSpPr>
           <p:spPr>
             <a:xfrm>
-              <a:off x="9676757" y="5831586"/>
-              <a:ext cx="1600538" cy="441198"/>
+              <a:off x="9655631" y="5843016"/>
+              <a:ext cx="1621665" cy="429768"/>
             </a:xfrm>
             <a:prstGeom prst="rect">
               <a:avLst/>
@@ -41171,7 +41171,7 @@
                   </a:solidFill>
                   <a:latin typeface="Georgia" panose="02040502050405020303" pitchFamily="18" charset="0"/>
                 </a:rPr>
-                <a:t>8,861</a:t>
+                <a:t>9,248</a:t>
               </a:r>
             </a:p>
           </p:txBody>

--- a/docs/deck/Bidwire.pptx
+++ b/docs/deck/Bidwire.pptx
@@ -651,7 +651,7 @@
           <a:lstStyle/>
           <a:p>
             <a:r>
-              <a:t>Agents can already shop for us. But the commerce stack they land on was built to manipulate humans: sponsored slots, SEO games, drip pricing where $34.99 on the page becomes $63.99 at checkout, and specs nobody checks. Agents read those pages and get gamed. Merchants have the opposite problem: there is no ad slot inside a tool call, so they can't reach agents at all.</a:t>
+              <a:t>Agents can already shop for us. But the commerce stack they land on was built to manipulate humans: sponsored slots and SEO, drip pricing where $34.99 on the page becomes $63.99 at checkout, specs nobody checks, and now prompt injection: a pitch that says 'ignore your previous instructions'. Agents read those pages and get gamed. Merchants have the opposite problem: there is no ad slot inside a tool call, so they can't reach agents at all.</a:t>
             </a:r>
           </a:p>
         </p:txBody>
@@ -861,7 +861,7 @@
           <a:lstStyle/>
           <a:p>
             <a:r>
-              <a:t>This ran live today. One lot: seven paddles, five verified, two withdrawn for misrepresentation. One hid a service fee at checkout, one claimed noise cancelling on headphones that don't have it. A merchant offered thirty-five dollars commission and stayed at number five. A nine-day shipper got ranked down for missing a five-day deadline, and the $319.99 hammer price went to the human's phone for a YES. If a merchant sells out mid-purchase, the agent gets the next best offer and recovers on its own.</a:t>
+              <a:t>This ran live today. One lot: 7 paddles, 5 verified, 2 withdrawn: a hidden fee and a fake ANC claim. A merchant offered $35 commission and stayed at number 5. A nine-day shipper got ranked down for missing a five-day deadline, and the $319.99 hammer price was over the $300 limit, so it went to the human's phone for a YES. If a merchant sells out mid-purchase, the agent gets the next best offer and recovers on its own.</a:t>
             </a:r>
           </a:p>
         </p:txBody>
@@ -1001,7 +1001,7 @@
           <a:lstStyle/>
           <a:p>
             <a:r>
-              <a:t>Trust is the product, so it's enforced in code. Every paddle gets five checks against the merchant's own page and checkout; a liar is withdrawn and loses trust for every agent. The ranking weights are public: price forty, must-haves twenty-five, delivery fifteen, trust fifteen, returns five, commission zero. Spending limits come from the human, every transaction in the settlement ledger sums to zero, and every tool call is logged.</a:t>
+              <a:t>Trust is the product, so it's enforced in code. Every paddle gets six checks against the merchant's own page and checkout, including pitch safety: a pitch is data, never instructions, so 'ignore your previous instructions' gets the bid withdrawn. A liar loses trust for every agent. The ranking weights are public: price forty, must-haves twenty-five, delivery fifteen, trust fifteen, returns five, commission zero. Spending limits come from the human, every transaction in the settlement ledger sums to zero, and every tool call is logged.</a:t>
             </a:r>
           </a:p>
         </p:txBody>
@@ -10151,7 +10151,7 @@
                   </a:solidFill>
                   <a:latin typeface="Georgia" panose="02040502050405020303" pitchFamily="18" charset="0"/>
                 </a:rPr>
-                <a:t>Sponsored slots</a:t>
+                <a:t>Sponsored slots &amp; SEO</a:t>
               </a:r>
             </a:p>
           </p:txBody>
@@ -10190,7 +10190,7 @@
                   </a:solidFill>
                   <a:latin typeface="Inter" panose="020B0502030000000004" pitchFamily="34" charset="0"/>
                 </a:rPr>
-                <a:t>Placement goes to whoever pays the most.</a:t>
+                <a:t>Placement goes to whoever pays, or games, the most.</a:t>
               </a:r>
             </a:p>
           </p:txBody>
@@ -10252,7 +10252,7 @@
           <p:spPr>
             <a:xfrm>
               <a:off x="4315968" y="2670048"/>
-              <a:ext cx="530352" cy="365760"/>
+              <a:ext cx="658368" cy="365760"/>
             </a:xfrm>
             <a:prstGeom prst="roundRect">
               <a:avLst>
@@ -10283,7 +10283,7 @@
           <p:spPr>
             <a:xfrm>
               <a:off x="4315968" y="2670048"/>
-              <a:ext cx="530352" cy="365760"/>
+              <a:ext cx="658368" cy="365760"/>
             </a:xfrm>
             <a:prstGeom prst="rect">
               <a:avLst/>
@@ -10304,7 +10304,7 @@
                   </a:solidFill>
                   <a:latin typeface="Inter" panose="020B0502030000000004" pitchFamily="34" charset="0"/>
                 </a:rPr>
-                <a:t>SEO</a:t>
+                <a:t>+$29</a:t>
               </a:r>
             </a:p>
           </p:txBody>
@@ -10339,7 +10339,7 @@
                   </a:solidFill>
                   <a:latin typeface="Georgia" panose="02040502050405020303" pitchFamily="18" charset="0"/>
                 </a:rPr>
-                <a:t>Ranking games</a:t>
+                <a:t>Drip pricing</a:t>
               </a:r>
             </a:p>
           </p:txBody>
@@ -10378,7 +10378,7 @@
                   </a:solidFill>
                   <a:latin typeface="Inter" panose="020B0502030000000004" pitchFamily="34" charset="0"/>
                 </a:rPr>
-                <a:t>Rank goes to whoever games the algorithm best.</a:t>
+                <a:t>$34.99 on the page. $63.99 at checkout.</a:t>
               </a:r>
             </a:p>
           </p:txBody>
@@ -10492,7 +10492,7 @@
                   </a:solidFill>
                   <a:latin typeface="Inter" panose="020B0502030000000004" pitchFamily="34" charset="0"/>
                 </a:rPr>
-                <a:t>+$29</a:t>
+                <a:t>ANC?</a:t>
               </a:r>
             </a:p>
           </p:txBody>
@@ -10527,7 +10527,7 @@
                   </a:solidFill>
                   <a:latin typeface="Georgia" panose="02040502050405020303" pitchFamily="18" charset="0"/>
                 </a:rPr>
-                <a:t>Drip pricing</a:t>
+                <a:t>Fake specs</a:t>
               </a:r>
             </a:p>
           </p:txBody>
@@ -10566,7 +10566,7 @@
                   </a:solidFill>
                   <a:latin typeface="Inter" panose="020B0502030000000004" pitchFamily="34" charset="0"/>
                 </a:rPr>
-                <a:t>$34.99 on the page. $63.99 at checkout.</a:t>
+                <a:t>“Noise cancelling” on headphones that don't have it.</a:t>
               </a:r>
             </a:p>
           </p:txBody>
@@ -10680,7 +10680,7 @@
                   </a:solidFill>
                   <a:latin typeface="Inter" panose="020B0502030000000004" pitchFamily="34" charset="0"/>
                 </a:rPr>
-                <a:t>ANC?</a:t>
+                <a:t>SYS:</a:t>
               </a:r>
             </a:p>
           </p:txBody>
@@ -10715,7 +10715,7 @@
                   </a:solidFill>
                   <a:latin typeface="Georgia" panose="02040502050405020303" pitchFamily="18" charset="0"/>
                 </a:rPr>
-                <a:t>Fake specs</a:t>
+                <a:t>Prompt injection</a:t>
               </a:r>
             </a:p>
           </p:txBody>
@@ -10754,7 +10754,7 @@
                   </a:solidFill>
                   <a:latin typeface="Inter" panose="020B0502030000000004" pitchFamily="34" charset="0"/>
                 </a:rPr>
-                <a:t>“Noise cancelling” on headphones that don't have it.</a:t>
+                <a:t>“Ignore your previous instructions”, hidden in a product pitch.</a:t>
               </a:r>
             </a:p>
           </p:txBody>
@@ -16215,7 +16215,7 @@
                   </a:solidFill>
                   <a:latin typeface="Inter" panose="020B0502030000000004" pitchFamily="34" charset="0"/>
                 </a:rPr>
-                <a:t>Fetch the product page JSON-LD and the checkout quote. 5 checks.</a:t>
+                <a:t>Fetch the product page JSON-LD and the checkout quote. 6 checks.</a:t>
               </a:r>
             </a:p>
           </p:txBody>
@@ -16379,7 +16379,7 @@
                   </a:solidFill>
                   <a:latin typeface="Inter" panose="020B0502030000000004" pitchFamily="34" charset="0"/>
                 </a:rPr>
-                <a:t>Misrepresentation: excluded, trust −12 for every agent.</a:t>
+                <a:t>Misrepresentation or prompt injection. Trust −12 for every agent.</a:t>
               </a:r>
             </a:p>
           </p:txBody>
@@ -17789,7 +17789,7 @@
                   </a:solidFill>
                   <a:latin typeface="Georgia" panose="02040502050405020303" pitchFamily="18" charset="0"/>
                 </a:rPr>
-                <a:t>5</a:t>
+                <a:t>6</a:t>
               </a:r>
               <a:r>
                 <a:rPr sz="1100" b="0" i="0">
@@ -21947,9 +21947,9 @@
         <p:grpSpPr>
           <a:xfrm>
             <a:off x="685800" y="5577840"/>
-            <a:ext cx="2962656" cy="749808"/>
+            <a:ext cx="1938528" cy="749808"/>
             <a:chOff x="685800" y="5577840"/>
-            <a:chExt cx="2962656" cy="749808"/>
+            <a:chExt cx="1938528" cy="749808"/>
           </a:xfrm>
         </p:grpSpPr>
         <p:sp>
@@ -21961,7 +21961,7 @@
           <p:spPr>
             <a:xfrm>
               <a:off x="685800" y="5577840"/>
-              <a:ext cx="2962656" cy="749808"/>
+              <a:ext cx="1938528" cy="749808"/>
             </a:xfrm>
             <a:prstGeom prst="roundRect">
               <a:avLst>
@@ -21993,8 +21993,8 @@
           </p:nvSpPr>
           <p:spPr>
             <a:xfrm>
-              <a:off x="822960" y="5669280"/>
-              <a:ext cx="1005332" cy="219456"/>
+              <a:off x="795528" y="5660136"/>
+              <a:ext cx="922528" cy="210312"/>
             </a:xfrm>
             <a:prstGeom prst="roundRect">
               <a:avLst>
@@ -22024,8 +22024,8 @@
           </p:nvSpPr>
           <p:spPr>
             <a:xfrm>
-              <a:off x="822960" y="5669280"/>
-              <a:ext cx="1005332" cy="219456"/>
+              <a:off x="795528" y="5660136"/>
+              <a:ext cx="922528" cy="210312"/>
             </a:xfrm>
             <a:prstGeom prst="rect">
               <a:avLst/>
@@ -22040,7 +22040,7 @@
             <a:p>
               <a:pPr algn="ctr"/>
               <a:r>
-                <a:rPr sz="850" b="1" i="0">
+                <a:rPr sz="800" b="1" i="0">
                   <a:solidFill>
                     <a:srgbClr val="94641F"/>
                   </a:solidFill>
@@ -22059,43 +22059,8 @@
           </p:nvSpPr>
           <p:spPr>
             <a:xfrm>
-              <a:off x="1919732" y="5669280"/>
-              <a:ext cx="1637284" cy="219456"/>
-            </a:xfrm>
-            <a:prstGeom prst="rect">
-              <a:avLst/>
-            </a:prstGeom>
-            <a:noFill/>
-          </p:spPr>
-          <p:txBody>
-            <a:bodyPr wrap="square" lIns="0" rIns="0" tIns="0" bIns="0" anchor="ctr">
-              <a:noAutofit/>
-            </a:bodyPr>
-            <a:lstStyle/>
-            <a:p>
-              <a:pPr algn="l"/>
-              <a:r>
-                <a:rPr sz="850" b="1" i="0">
-                  <a:solidFill>
-                    <a:srgbClr val="6E6658"/>
-                  </a:solidFill>
-                  <a:latin typeface="Inter" panose="020B0502030000000004" pitchFamily="34" charset="0"/>
-                </a:rPr>
-                <a:t>MegaMart Ads Co.</a:t>
-              </a:r>
-            </a:p>
-          </p:txBody>
-        </p:sp>
-        <p:sp>
-          <p:nvSpPr>
-            <p:cNvPr id="72" name="TextBox 71"/>
-            <p:cNvSpPr txBox="1"/>
-            <p:nvPr/>
-          </p:nvSpPr>
-          <p:spPr>
-            <a:xfrm>
-              <a:off x="822960" y="5925312"/>
-              <a:ext cx="2724912" cy="384048"/>
+              <a:off x="795528" y="5907024"/>
+              <a:ext cx="1737360" cy="402336"/>
             </a:xfrm>
             <a:prstGeom prst="rect">
               <a:avLst/>
@@ -22114,13 +22079,22 @@
                 </a:lnSpc>
               </a:pPr>
               <a:r>
-                <a:rPr sz="900" b="0" i="0">
+                <a:rPr sz="850" b="1" i="0">
                   <a:solidFill>
                     <a:srgbClr val="16130E"/>
                   </a:solidFill>
                   <a:latin typeface="Inter" panose="020B0502030000000004" pitchFamily="34" charset="0"/>
                 </a:rPr>
-                <a:t>Offered $35 commission · still No. 5. Fees never buy rank.</a:t>
+                <a:t>MegaMart Ads Co.:</a:t>
+              </a:r>
+              <a:r>
+                <a:rPr sz="850" b="0" i="0">
+                  <a:solidFill>
+                    <a:srgbClr val="16130E"/>
+                  </a:solidFill>
+                  <a:latin typeface="Inter" panose="020B0502030000000004" pitchFamily="34" charset="0"/>
+                </a:rPr>
+                <a:t> Offered $35 commission · still No. 5.</a:t>
               </a:r>
             </a:p>
           </p:txBody>
@@ -22128,28 +22102,28 @@
       </p:grpSp>
       <p:grpSp>
         <p:nvGrpSpPr>
-          <p:cNvPr id="73" name="Group 72"/>
+          <p:cNvPr id="72" name="Group 71"/>
           <p:cNvGrpSpPr/>
           <p:nvPr/>
         </p:nvGrpSpPr>
         <p:grpSpPr>
           <a:xfrm>
-            <a:off x="3758184" y="5577840"/>
-            <a:ext cx="2962656" cy="749808"/>
-            <a:chOff x="3758184" y="5577840"/>
-            <a:chExt cx="2962656" cy="749808"/>
+            <a:off x="2734056" y="5577840"/>
+            <a:ext cx="1938528" cy="749808"/>
+            <a:chOff x="2734056" y="5577840"/>
+            <a:chExt cx="1938528" cy="749808"/>
           </a:xfrm>
         </p:grpSpPr>
         <p:sp>
           <p:nvSpPr>
-            <p:cNvPr id="74" name="Rounded Rectangle 73"/>
+            <p:cNvPr id="73" name="Rounded Rectangle 72"/>
             <p:cNvSpPr/>
             <p:nvPr/>
           </p:nvSpPr>
           <p:spPr>
             <a:xfrm>
-              <a:off x="3758184" y="5577840"/>
-              <a:ext cx="2962656" cy="749808"/>
+              <a:off x="2734056" y="5577840"/>
+              <a:ext cx="1938528" cy="749808"/>
             </a:xfrm>
             <a:prstGeom prst="roundRect">
               <a:avLst>
@@ -22175,14 +22149,176 @@
         </p:sp>
         <p:sp>
           <p:nvSpPr>
-            <p:cNvPr id="75" name="Rounded Rectangle 74"/>
+            <p:cNvPr id="74" name="Rounded Rectangle 73"/>
             <p:cNvSpPr/>
             <p:nvPr/>
           </p:nvSpPr>
           <p:spPr>
             <a:xfrm>
-              <a:off x="3895344" y="5669280"/>
-              <a:ext cx="1368044" cy="219456"/>
+              <a:off x="2843784" y="5660136"/>
+              <a:ext cx="1263904" cy="210312"/>
+            </a:xfrm>
+            <a:prstGeom prst="roundRect">
+              <a:avLst>
+                <a:gd name="adj" fmla="val 50000"/>
+              </a:avLst>
+            </a:prstGeom>
+            <a:solidFill>
+              <a:srgbClr val="F6E3DF"/>
+            </a:solidFill>
+            <a:ln>
+              <a:noFill/>
+            </a:ln>
+          </p:spPr>
+          <p:txBody>
+            <a:bodyPr rtlCol="0" anchor="ctr"/>
+            <a:lstStyle/>
+            <a:p>
+              <a:pPr algn="ctr"/>
+            </a:p>
+          </p:txBody>
+        </p:sp>
+        <p:sp>
+          <p:nvSpPr>
+            <p:cNvPr id="75" name="TextBox 74"/>
+            <p:cNvSpPr txBox="1"/>
+            <p:nvPr/>
+          </p:nvSpPr>
+          <p:spPr>
+            <a:xfrm>
+              <a:off x="2843784" y="5660136"/>
+              <a:ext cx="1263904" cy="210312"/>
+            </a:xfrm>
+            <a:prstGeom prst="rect">
+              <a:avLst/>
+            </a:prstGeom>
+            <a:noFill/>
+          </p:spPr>
+          <p:txBody>
+            <a:bodyPr wrap="square" lIns="0" rIns="0" tIns="0" bIns="0" anchor="ctr">
+              <a:noAutofit/>
+            </a:bodyPr>
+            <a:lstStyle/>
+            <a:p>
+              <a:pPr algn="ctr"/>
+              <a:r>
+                <a:rPr sz="800" b="1" i="0">
+                  <a:solidFill>
+                    <a:srgbClr val="8E2A22"/>
+                  </a:solidFill>
+                  <a:latin typeface="Inter" panose="020B0502030000000004" pitchFamily="34" charset="0"/>
+                </a:rPr>
+                <a:t>Injection withdrawn</a:t>
+              </a:r>
+            </a:p>
+          </p:txBody>
+        </p:sp>
+        <p:sp>
+          <p:nvSpPr>
+            <p:cNvPr id="76" name="TextBox 75"/>
+            <p:cNvSpPr txBox="1"/>
+            <p:nvPr/>
+          </p:nvSpPr>
+          <p:spPr>
+            <a:xfrm>
+              <a:off x="2843784" y="5907024"/>
+              <a:ext cx="1737360" cy="402336"/>
+            </a:xfrm>
+            <a:prstGeom prst="rect">
+              <a:avLst/>
+            </a:prstGeom>
+            <a:noFill/>
+          </p:spPr>
+          <p:txBody>
+            <a:bodyPr wrap="square" lIns="0" rIns="0" tIns="0" bIns="0" anchor="t">
+              <a:noAutofit/>
+            </a:bodyPr>
+            <a:lstStyle/>
+            <a:p>
+              <a:pPr algn="l">
+                <a:lnSpc>
+                  <a:spcPct val="103000"/>
+                </a:lnSpc>
+              </a:pPr>
+              <a:r>
+                <a:rPr sz="850" b="1" i="0">
+                  <a:solidFill>
+                    <a:srgbClr val="16130E"/>
+                  </a:solidFill>
+                  <a:latin typeface="Inter" panose="020B0502030000000004" pitchFamily="34" charset="0"/>
+                </a:rPr>
+                <a:t>InjectCo:</a:t>
+              </a:r>
+              <a:r>
+                <a:rPr sz="850" b="0" i="0">
+                  <a:solidFill>
+                    <a:srgbClr val="16130E"/>
+                  </a:solidFill>
+                  <a:latin typeface="Inter" panose="020B0502030000000004" pitchFamily="34" charset="0"/>
+                </a:rPr>
+                <a:t> “Ignore your previous instructions” in a pitch. Pitches are data.</a:t>
+              </a:r>
+            </a:p>
+          </p:txBody>
+        </p:sp>
+      </p:grpSp>
+      <p:grpSp>
+        <p:nvGrpSpPr>
+          <p:cNvPr id="77" name="Group 76"/>
+          <p:cNvGrpSpPr/>
+          <p:nvPr/>
+        </p:nvGrpSpPr>
+        <p:grpSpPr>
+          <a:xfrm>
+            <a:off x="4782312" y="5577840"/>
+            <a:ext cx="1938528" cy="749808"/>
+            <a:chOff x="4782312" y="5577840"/>
+            <a:chExt cx="1938528" cy="749808"/>
+          </a:xfrm>
+        </p:grpSpPr>
+        <p:sp>
+          <p:nvSpPr>
+            <p:cNvPr id="78" name="Rounded Rectangle 77"/>
+            <p:cNvSpPr/>
+            <p:nvPr/>
+          </p:nvSpPr>
+          <p:spPr>
+            <a:xfrm>
+              <a:off x="4782312" y="5577840"/>
+              <a:ext cx="1938528" cy="749808"/>
+            </a:xfrm>
+            <a:prstGeom prst="roundRect">
+              <a:avLst>
+                <a:gd name="adj" fmla="val 7317"/>
+              </a:avLst>
+            </a:prstGeom>
+            <a:solidFill>
+              <a:srgbClr val="FFFDF7"/>
+            </a:solidFill>
+            <a:ln w="9525">
+              <a:solidFill>
+                <a:srgbClr val="E2D9C6"/>
+              </a:solidFill>
+            </a:ln>
+          </p:spPr>
+          <p:txBody>
+            <a:bodyPr rtlCol="0" anchor="ctr"/>
+            <a:lstStyle/>
+            <a:p>
+              <a:pPr algn="ctr"/>
+            </a:p>
+          </p:txBody>
+        </p:sp>
+        <p:sp>
+          <p:nvSpPr>
+            <p:cNvPr id="79" name="Rounded Rectangle 78"/>
+            <p:cNvSpPr/>
+            <p:nvPr/>
+          </p:nvSpPr>
+          <p:spPr>
+            <a:xfrm>
+              <a:off x="4892040" y="5660136"/>
+              <a:ext cx="638048" cy="210312"/>
             </a:xfrm>
             <a:prstGeom prst="roundRect">
               <a:avLst>
@@ -22206,14 +22342,14 @@
         </p:sp>
         <p:sp>
           <p:nvSpPr>
-            <p:cNvPr id="76" name="TextBox 75"/>
+            <p:cNvPr id="80" name="TextBox 79"/>
             <p:cNvSpPr txBox="1"/>
             <p:nvPr/>
           </p:nvSpPr>
           <p:spPr>
             <a:xfrm>
-              <a:off x="3895344" y="5669280"/>
-              <a:ext cx="1368044" cy="219456"/>
+              <a:off x="4892040" y="5660136"/>
+              <a:ext cx="638048" cy="210312"/>
             </a:xfrm>
             <a:prstGeom prst="rect">
               <a:avLst/>
@@ -22228,62 +22364,27 @@
             <a:p>
               <a:pPr algn="ctr"/>
               <a:r>
-                <a:rPr sz="850" b="1" i="0">
+                <a:rPr sz="800" b="1" i="0">
                   <a:solidFill>
                     <a:srgbClr val="233F6E"/>
                   </a:solidFill>
                   <a:latin typeface="Inter" panose="020B0502030000000004" pitchFamily="34" charset="0"/>
                 </a:rPr>
-                <a:t>Sold out, recovered</a:t>
+                <a:t>Sold out</a:t>
               </a:r>
             </a:p>
           </p:txBody>
         </p:sp>
         <p:sp>
           <p:nvSpPr>
-            <p:cNvPr id="77" name="TextBox 76"/>
+            <p:cNvPr id="81" name="TextBox 80"/>
             <p:cNvSpPr txBox="1"/>
             <p:nvPr/>
           </p:nvSpPr>
           <p:spPr>
             <a:xfrm>
-              <a:off x="5354828" y="5669280"/>
-              <a:ext cx="1274572" cy="219456"/>
-            </a:xfrm>
-            <a:prstGeom prst="rect">
-              <a:avLst/>
-            </a:prstGeom>
-            <a:noFill/>
-          </p:spPr>
-          <p:txBody>
-            <a:bodyPr wrap="square" lIns="0" rIns="0" tIns="0" bIns="0" anchor="ctr">
-              <a:noAutofit/>
-            </a:bodyPr>
-            <a:lstStyle/>
-            <a:p>
-              <a:pPr algn="l"/>
-              <a:r>
-                <a:rPr sz="850" b="1" i="0">
-                  <a:solidFill>
-                    <a:srgbClr val="6E6658"/>
-                  </a:solidFill>
-                  <a:latin typeface="JetBrains Mono" panose="02000009000000000000" pitchFamily="49" charset="0"/>
-                </a:rPr>
-                <a:t>buy_offer</a:t>
-              </a:r>
-            </a:p>
-          </p:txBody>
-        </p:sp>
-        <p:sp>
-          <p:nvSpPr>
-            <p:cNvPr id="78" name="TextBox 77"/>
-            <p:cNvSpPr txBox="1"/>
-            <p:nvPr/>
-          </p:nvSpPr>
-          <p:spPr>
-            <a:xfrm>
-              <a:off x="3895344" y="5925312"/>
-              <a:ext cx="2724912" cy="384048"/>
+              <a:off x="4892040" y="5907024"/>
+              <a:ext cx="1737360" cy="402336"/>
             </a:xfrm>
             <a:prstGeom prst="rect">
               <a:avLst/>
@@ -22302,13 +22403,22 @@
                 </a:lnSpc>
               </a:pPr>
               <a:r>
-                <a:rPr sz="900" b="0" i="0">
+                <a:rPr sz="850" b="1" i="0">
+                  <a:solidFill>
+                    <a:srgbClr val="16130E"/>
+                  </a:solidFill>
+                  <a:latin typeface="JetBrains Mono" panose="02000009000000000000" pitchFamily="49" charset="0"/>
+                </a:rPr>
+                <a:t>buy_offer:</a:t>
+              </a:r>
+              <a:r>
+                <a:rPr sz="850" b="0" i="0">
                   <a:solidFill>
                     <a:srgbClr val="16130E"/>
                   </a:solidFill>
                   <a:latin typeface="Inter" panose="020B0502030000000004" pitchFamily="34" charset="0"/>
                 </a:rPr>
-                <a:t>out_of_stock + next_offer: the agent buys the next best verified offer on its own.</a:t>
+                <a:t> out_of_stock + next_offer: the agent recovers on its own.</a:t>
               </a:r>
             </a:p>
           </p:txBody>
@@ -22316,7 +22426,7 @@
       </p:grpSp>
       <p:sp>
         <p:nvSpPr>
-          <p:cNvPr id="79" name="TextBox 78"/>
+          <p:cNvPr id="82" name="TextBox 81"/>
           <p:cNvSpPr txBox="1"/>
           <p:nvPr/>
         </p:nvSpPr>
@@ -22351,7 +22461,7 @@
       </p:sp>
       <p:grpSp>
         <p:nvGrpSpPr>
-          <p:cNvPr id="80" name="Group 79"/>
+          <p:cNvPr id="83" name="Group 82"/>
           <p:cNvGrpSpPr/>
           <p:nvPr/>
         </p:nvGrpSpPr>
@@ -22365,7 +22475,7 @@
         </p:grpSpPr>
         <p:sp>
           <p:nvSpPr>
-            <p:cNvPr id="81" name="Rounded Rectangle 80"/>
+            <p:cNvPr id="84" name="Rounded Rectangle 83"/>
             <p:cNvSpPr/>
             <p:nvPr/>
           </p:nvSpPr>
@@ -22403,7 +22513,7 @@
         </p:sp>
         <p:sp>
           <p:nvSpPr>
-            <p:cNvPr id="82" name="Rounded Rectangle 81"/>
+            <p:cNvPr id="85" name="Rounded Rectangle 84"/>
             <p:cNvSpPr/>
             <p:nvPr/>
           </p:nvSpPr>
@@ -22434,7 +22544,7 @@
         </p:sp>
         <p:sp>
           <p:nvSpPr>
-            <p:cNvPr id="83" name="TextBox 82"/>
+            <p:cNvPr id="86" name="TextBox 85"/>
             <p:cNvSpPr txBox="1"/>
             <p:nvPr/>
           </p:nvSpPr>
@@ -22469,7 +22579,7 @@
         </p:sp>
         <p:sp>
           <p:nvSpPr>
-            <p:cNvPr id="84" name="Rounded Rectangle 83"/>
+            <p:cNvPr id="87" name="Rounded Rectangle 86"/>
             <p:cNvSpPr/>
             <p:nvPr/>
           </p:nvSpPr>
@@ -22500,7 +22610,7 @@
         </p:sp>
         <p:sp>
           <p:nvSpPr>
-            <p:cNvPr id="85" name="TextBox 84"/>
+            <p:cNvPr id="88" name="TextBox 87"/>
             <p:cNvSpPr txBox="1"/>
             <p:nvPr/>
           </p:nvSpPr>
@@ -22539,7 +22649,7 @@
         </p:sp>
         <p:sp>
           <p:nvSpPr>
-            <p:cNvPr id="86" name="Rounded Rectangle 85"/>
+            <p:cNvPr id="89" name="Rounded Rectangle 88"/>
             <p:cNvSpPr/>
             <p:nvPr/>
           </p:nvSpPr>
@@ -22570,7 +22680,7 @@
         </p:sp>
         <p:sp>
           <p:nvSpPr>
-            <p:cNvPr id="87" name="TextBox 86"/>
+            <p:cNvPr id="90" name="TextBox 89"/>
             <p:cNvSpPr txBox="1"/>
             <p:nvPr/>
           </p:nvSpPr>
@@ -22605,7 +22715,7 @@
         </p:sp>
         <p:sp>
           <p:nvSpPr>
-            <p:cNvPr id="88" name="TextBox 87"/>
+            <p:cNvPr id="91" name="TextBox 90"/>
             <p:cNvSpPr txBox="1"/>
             <p:nvPr/>
           </p:nvSpPr>
@@ -22640,7 +22750,7 @@
         </p:sp>
         <p:sp>
           <p:nvSpPr>
-            <p:cNvPr id="89" name="TextBox 88"/>
+            <p:cNvPr id="92" name="TextBox 91"/>
             <p:cNvSpPr txBox="1"/>
             <p:nvPr/>
           </p:nvSpPr>
@@ -22676,7 +22786,7 @@
       </p:grpSp>
       <p:grpSp>
         <p:nvGrpSpPr>
-          <p:cNvPr id="90" name="Group 89"/>
+          <p:cNvPr id="93" name="Group 92"/>
           <p:cNvGrpSpPr/>
           <p:nvPr/>
         </p:nvGrpSpPr>
@@ -22690,7 +22800,7 @@
         </p:grpSpPr>
         <p:sp>
           <p:nvSpPr>
-            <p:cNvPr id="91" name="Rounded Rectangle 90"/>
+            <p:cNvPr id="94" name="Rounded Rectangle 93"/>
             <p:cNvSpPr/>
             <p:nvPr/>
           </p:nvSpPr>
@@ -22728,7 +22838,7 @@
         </p:sp>
         <p:sp>
           <p:nvSpPr>
-            <p:cNvPr id="92" name="Rounded Rectangle 91"/>
+            <p:cNvPr id="95" name="Rounded Rectangle 94"/>
             <p:cNvSpPr/>
             <p:nvPr/>
           </p:nvSpPr>
@@ -22762,7 +22872,7 @@
       </p:grpSp>
       <p:grpSp>
         <p:nvGrpSpPr>
-          <p:cNvPr id="93" name="Group 92"/>
+          <p:cNvPr id="96" name="Group 95"/>
           <p:cNvGrpSpPr/>
           <p:nvPr/>
         </p:nvGrpSpPr>
@@ -22776,7 +22886,7 @@
         </p:grpSpPr>
         <p:sp>
           <p:nvSpPr>
-            <p:cNvPr id="94" name="TextBox 93"/>
+            <p:cNvPr id="97" name="TextBox 96"/>
             <p:cNvSpPr txBox="1"/>
             <p:nvPr/>
           </p:nvSpPr>
@@ -22811,7 +22921,7 @@
         </p:sp>
         <p:sp>
           <p:nvSpPr>
-            <p:cNvPr id="95" name="TextBox 94"/>
+            <p:cNvPr id="98" name="TextBox 97"/>
             <p:cNvSpPr txBox="1"/>
             <p:nvPr/>
           </p:nvSpPr>
@@ -22851,7 +22961,7 @@
       </p:grpSp>
       <p:sp>
         <p:nvSpPr>
-          <p:cNvPr id="96" name="Rectangle 95"/>
+          <p:cNvPr id="99" name="Rectangle 98"/>
           <p:cNvSpPr/>
           <p:nvPr/>
         </p:nvSpPr>
@@ -22880,7 +22990,7 @@
       </p:sp>
       <p:grpSp>
         <p:nvGrpSpPr>
-          <p:cNvPr id="97" name="Group 96"/>
+          <p:cNvPr id="100" name="Group 99"/>
           <p:cNvGrpSpPr/>
           <p:nvPr/>
         </p:nvGrpSpPr>
@@ -22894,7 +23004,7 @@
         </p:grpSpPr>
         <p:sp>
           <p:nvSpPr>
-            <p:cNvPr id="98" name="TextBox 97"/>
+            <p:cNvPr id="101" name="TextBox 100"/>
             <p:cNvSpPr txBox="1"/>
             <p:nvPr/>
           </p:nvSpPr>
@@ -22929,7 +23039,7 @@
         </p:sp>
         <p:sp>
           <p:nvSpPr>
-            <p:cNvPr id="99" name="TextBox 98"/>
+            <p:cNvPr id="102" name="TextBox 101"/>
             <p:cNvSpPr txBox="1"/>
             <p:nvPr/>
           </p:nvSpPr>
@@ -22969,7 +23079,7 @@
       </p:grpSp>
       <p:sp>
         <p:nvSpPr>
-          <p:cNvPr id="100" name="Rectangle 99"/>
+          <p:cNvPr id="103" name="Rectangle 102"/>
           <p:cNvSpPr/>
           <p:nvPr/>
         </p:nvSpPr>
@@ -22998,7 +23108,7 @@
       </p:sp>
       <p:grpSp>
         <p:nvGrpSpPr>
-          <p:cNvPr id="101" name="Group 100"/>
+          <p:cNvPr id="104" name="Group 103"/>
           <p:cNvGrpSpPr/>
           <p:nvPr/>
         </p:nvGrpSpPr>
@@ -23012,7 +23122,7 @@
         </p:grpSpPr>
         <p:sp>
           <p:nvSpPr>
-            <p:cNvPr id="102" name="TextBox 101"/>
+            <p:cNvPr id="105" name="TextBox 104"/>
             <p:cNvSpPr txBox="1"/>
             <p:nvPr/>
           </p:nvSpPr>
@@ -23047,7 +23157,7 @@
         </p:sp>
         <p:sp>
           <p:nvSpPr>
-            <p:cNvPr id="103" name="TextBox 102"/>
+            <p:cNvPr id="106" name="TextBox 105"/>
             <p:cNvSpPr txBox="1"/>
             <p:nvPr/>
           </p:nvSpPr>
@@ -23087,7 +23197,7 @@
       </p:grpSp>
       <p:sp>
         <p:nvSpPr>
-          <p:cNvPr id="104" name="Rectangle 103"/>
+          <p:cNvPr id="107" name="Rectangle 106"/>
           <p:cNvSpPr/>
           <p:nvPr/>
         </p:nvSpPr>
@@ -23116,7 +23226,7 @@
       </p:sp>
       <p:grpSp>
         <p:nvGrpSpPr>
-          <p:cNvPr id="105" name="Group 104"/>
+          <p:cNvPr id="108" name="Group 107"/>
           <p:cNvGrpSpPr/>
           <p:nvPr/>
         </p:nvGrpSpPr>
@@ -23130,7 +23240,7 @@
         </p:grpSpPr>
         <p:sp>
           <p:nvSpPr>
-            <p:cNvPr id="106" name="TextBox 105"/>
+            <p:cNvPr id="109" name="TextBox 108"/>
             <p:cNvSpPr txBox="1"/>
             <p:nvPr/>
           </p:nvSpPr>
@@ -23165,7 +23275,7 @@
         </p:sp>
         <p:sp>
           <p:nvSpPr>
-            <p:cNvPr id="107" name="TextBox 106"/>
+            <p:cNvPr id="110" name="TextBox 109"/>
             <p:cNvSpPr txBox="1"/>
             <p:nvPr/>
           </p:nvSpPr>
@@ -23561,7 +23671,7 @@
                                           </p:stCondLst>
                                         </p:cTn>
                                         <p:tgtEl>
-                                          <p:spTgt spid="73"/>
+                                          <p:spTgt spid="72"/>
                                         </p:tgtEl>
                                         <p:attrNameLst>
                                           <p:attrName>style.visibility</p:attrName>
@@ -23575,7 +23685,7 @@
                                       <p:cBhvr>
                                         <p:cTn id="28" dur="450"/>
                                         <p:tgtEl>
-                                          <p:spTgt spid="73"/>
+                                          <p:spTgt spid="72"/>
                                         </p:tgtEl>
                                       </p:cBhvr>
                                     </p:animEffect>
@@ -23583,7 +23693,7 @@
                                       <p:cBhvr additive="base">
                                         <p:cTn id="29" dur="450" fill="hold" decel="100000"/>
                                         <p:tgtEl>
-                                          <p:spTgt spid="73"/>
+                                          <p:spTgt spid="72"/>
                                         </p:tgtEl>
                                         <p:attrNameLst>
                                           <p:attrName>ppt_x</p:attrName>
@@ -23606,7 +23716,7 @@
                                       <p:cBhvr additive="base">
                                         <p:cTn id="30" dur="450" fill="hold" decel="100000"/>
                                         <p:tgtEl>
-                                          <p:spTgt spid="73"/>
+                                          <p:spTgt spid="72"/>
                                         </p:tgtEl>
                                         <p:attrNameLst>
                                           <p:attrName>ppt_y</p:attrName>
@@ -23629,9 +23739,9 @@
                                 </p:cTn>
                               </p:par>
                               <p:par>
-                                <p:cTn id="31" presetID="10" presetClass="entr" presetSubtype="0" fill="hold" grpId="0" nodeType="withEffect">
+                                <p:cTn id="31" presetID="42" presetClass="entr" presetSubtype="0" fill="hold" grpId="0" nodeType="withEffect">
                                   <p:stCondLst>
-                                    <p:cond delay="300"/>
+                                    <p:cond delay="1210"/>
                                   </p:stCondLst>
                                   <p:childTnLst>
                                     <p:set>
@@ -23642,7 +23752,7 @@
                                           </p:stCondLst>
                                         </p:cTn>
                                         <p:tgtEl>
-                                          <p:spTgt spid="79"/>
+                                          <p:spTgt spid="77"/>
                                         </p:tgtEl>
                                         <p:attrNameLst>
                                           <p:attrName>style.visibility</p:attrName>
@@ -23654,30 +23764,76 @@
                                     </p:set>
                                     <p:animEffect transition="in" filter="fade">
                                       <p:cBhvr>
-                                        <p:cTn id="33" dur="400"/>
-                                        <p:tgtEl>
-                                          <p:spTgt spid="79"/>
+                                        <p:cTn id="33" dur="450"/>
+                                        <p:tgtEl>
+                                          <p:spTgt spid="77"/>
                                         </p:tgtEl>
                                       </p:cBhvr>
                                     </p:animEffect>
+                                    <p:anim calcmode="lin" valueType="num">
+                                      <p:cBhvr additive="base">
+                                        <p:cTn id="34" dur="450" fill="hold" decel="100000"/>
+                                        <p:tgtEl>
+                                          <p:spTgt spid="77"/>
+                                        </p:tgtEl>
+                                        <p:attrNameLst>
+                                          <p:attrName>ppt_x</p:attrName>
+                                        </p:attrNameLst>
+                                      </p:cBhvr>
+                                      <p:tavLst>
+                                        <p:tav tm="0">
+                                          <p:val>
+                                            <p:strVal val="#ppt_x"/>
+                                          </p:val>
+                                        </p:tav>
+                                        <p:tav tm="100000">
+                                          <p:val>
+                                            <p:strVal val="#ppt_x"/>
+                                          </p:val>
+                                        </p:tav>
+                                      </p:tavLst>
+                                    </p:anim>
+                                    <p:anim calcmode="lin" valueType="num">
+                                      <p:cBhvr additive="base">
+                                        <p:cTn id="35" dur="450" fill="hold" decel="100000"/>
+                                        <p:tgtEl>
+                                          <p:spTgt spid="77"/>
+                                        </p:tgtEl>
+                                        <p:attrNameLst>
+                                          <p:attrName>ppt_y</p:attrName>
+                                        </p:attrNameLst>
+                                      </p:cBhvr>
+                                      <p:tavLst>
+                                        <p:tav tm="0">
+                                          <p:val>
+                                            <p:strVal val="#ppt_y+0.025"/>
+                                          </p:val>
+                                        </p:tav>
+                                        <p:tav tm="100000">
+                                          <p:val>
+                                            <p:strVal val="#ppt_y"/>
+                                          </p:val>
+                                        </p:tav>
+                                      </p:tavLst>
+                                    </p:anim>
                                   </p:childTnLst>
                                 </p:cTn>
                               </p:par>
                               <p:par>
-                                <p:cTn id="34" presetID="42" presetClass="entr" presetSubtype="0" fill="hold" grpId="0" nodeType="withEffect">
+                                <p:cTn id="36" presetID="10" presetClass="entr" presetSubtype="0" fill="hold" grpId="0" nodeType="withEffect">
                                   <p:stCondLst>
-                                    <p:cond delay="350"/>
+                                    <p:cond delay="300"/>
                                   </p:stCondLst>
                                   <p:childTnLst>
                                     <p:set>
                                       <p:cBhvr>
-                                        <p:cTn id="35" dur="1" fill="hold">
+                                        <p:cTn id="37" dur="1" fill="hold">
                                           <p:stCondLst>
                                             <p:cond delay="0"/>
                                           </p:stCondLst>
                                         </p:cTn>
                                         <p:tgtEl>
-                                          <p:spTgt spid="80"/>
+                                          <p:spTgt spid="82"/>
                                         </p:tgtEl>
                                         <p:attrNameLst>
                                           <p:attrName>style.visibility</p:attrName>
@@ -23689,65 +23845,19 @@
                                     </p:set>
                                     <p:animEffect transition="in" filter="fade">
                                       <p:cBhvr>
-                                        <p:cTn id="36" dur="700"/>
-                                        <p:tgtEl>
-                                          <p:spTgt spid="80"/>
+                                        <p:cTn id="38" dur="400"/>
+                                        <p:tgtEl>
+                                          <p:spTgt spid="82"/>
                                         </p:tgtEl>
                                       </p:cBhvr>
                                     </p:animEffect>
-                                    <p:anim calcmode="lin" valueType="num">
-                                      <p:cBhvr additive="base">
-                                        <p:cTn id="37" dur="700" fill="hold" decel="100000"/>
-                                        <p:tgtEl>
-                                          <p:spTgt spid="80"/>
-                                        </p:tgtEl>
-                                        <p:attrNameLst>
-                                          <p:attrName>ppt_x</p:attrName>
-                                        </p:attrNameLst>
-                                      </p:cBhvr>
-                                      <p:tavLst>
-                                        <p:tav tm="0">
-                                          <p:val>
-                                            <p:strVal val="#ppt_x"/>
-                                          </p:val>
-                                        </p:tav>
-                                        <p:tav tm="100000">
-                                          <p:val>
-                                            <p:strVal val="#ppt_x"/>
-                                          </p:val>
-                                        </p:tav>
-                                      </p:tavLst>
-                                    </p:anim>
-                                    <p:anim calcmode="lin" valueType="num">
-                                      <p:cBhvr additive="base">
-                                        <p:cTn id="38" dur="700" fill="hold" decel="100000"/>
-                                        <p:tgtEl>
-                                          <p:spTgt spid="80"/>
-                                        </p:tgtEl>
-                                        <p:attrNameLst>
-                                          <p:attrName>ppt_y</p:attrName>
-                                        </p:attrNameLst>
-                                      </p:cBhvr>
-                                      <p:tavLst>
-                                        <p:tav tm="0">
-                                          <p:val>
-                                            <p:strVal val="#ppt_y+0.025"/>
-                                          </p:val>
-                                        </p:tav>
-                                        <p:tav tm="100000">
-                                          <p:val>
-                                            <p:strVal val="#ppt_y"/>
-                                          </p:val>
-                                        </p:tav>
-                                      </p:tavLst>
-                                    </p:anim>
                                   </p:childTnLst>
                                 </p:cTn>
                               </p:par>
                               <p:par>
                                 <p:cTn id="39" presetID="42" presetClass="entr" presetSubtype="0" fill="hold" grpId="0" nodeType="withEffect">
                                   <p:stCondLst>
-                                    <p:cond delay="1100"/>
+                                    <p:cond delay="350"/>
                                   </p:stCondLst>
                                   <p:childTnLst>
                                     <p:set>
@@ -23758,7 +23868,7 @@
                                           </p:stCondLst>
                                         </p:cTn>
                                         <p:tgtEl>
-                                          <p:spTgt spid="90"/>
+                                          <p:spTgt spid="83"/>
                                         </p:tgtEl>
                                         <p:attrNameLst>
                                           <p:attrName>style.visibility</p:attrName>
@@ -23770,17 +23880,17 @@
                                     </p:set>
                                     <p:animEffect transition="in" filter="fade">
                                       <p:cBhvr>
-                                        <p:cTn id="41" dur="500"/>
-                                        <p:tgtEl>
-                                          <p:spTgt spid="90"/>
+                                        <p:cTn id="41" dur="700"/>
+                                        <p:tgtEl>
+                                          <p:spTgt spid="83"/>
                                         </p:tgtEl>
                                       </p:cBhvr>
                                     </p:animEffect>
                                     <p:anim calcmode="lin" valueType="num">
                                       <p:cBhvr additive="base">
-                                        <p:cTn id="42" dur="500" fill="hold" decel="100000"/>
-                                        <p:tgtEl>
-                                          <p:spTgt spid="90"/>
+                                        <p:cTn id="42" dur="700" fill="hold" decel="100000"/>
+                                        <p:tgtEl>
+                                          <p:spTgt spid="83"/>
                                         </p:tgtEl>
                                         <p:attrNameLst>
                                           <p:attrName>ppt_x</p:attrName>
@@ -23801,9 +23911,9 @@
                                     </p:anim>
                                     <p:anim calcmode="lin" valueType="num">
                                       <p:cBhvr additive="base">
-                                        <p:cTn id="43" dur="500" fill="hold" decel="100000"/>
-                                        <p:tgtEl>
-                                          <p:spTgt spid="90"/>
+                                        <p:cTn id="43" dur="700" fill="hold" decel="100000"/>
+                                        <p:tgtEl>
+                                          <p:spTgt spid="83"/>
                                         </p:tgtEl>
                                         <p:attrNameLst>
                                           <p:attrName>ppt_y</p:attrName>
@@ -23828,7 +23938,7 @@
                               <p:par>
                                 <p:cTn id="44" presetID="42" presetClass="entr" presetSubtype="0" fill="hold" grpId="0" nodeType="withEffect">
                                   <p:stCondLst>
-                                    <p:cond delay="1250"/>
+                                    <p:cond delay="1100"/>
                                   </p:stCondLst>
                                   <p:childTnLst>
                                     <p:set>
@@ -23851,7 +23961,7 @@
                                     </p:set>
                                     <p:animEffect transition="in" filter="fade">
                                       <p:cBhvr>
-                                        <p:cTn id="46" dur="450"/>
+                                        <p:cTn id="46" dur="500"/>
                                         <p:tgtEl>
                                           <p:spTgt spid="93"/>
                                         </p:tgtEl>
@@ -23859,7 +23969,7 @@
                                     </p:animEffect>
                                     <p:anim calcmode="lin" valueType="num">
                                       <p:cBhvr additive="base">
-                                        <p:cTn id="47" dur="450" fill="hold" decel="100000"/>
+                                        <p:cTn id="47" dur="500" fill="hold" decel="100000"/>
                                         <p:tgtEl>
                                           <p:spTgt spid="93"/>
                                         </p:tgtEl>
@@ -23882,7 +23992,7 @@
                                     </p:anim>
                                     <p:anim calcmode="lin" valueType="num">
                                       <p:cBhvr additive="base">
-                                        <p:cTn id="48" dur="450" fill="hold" decel="100000"/>
+                                        <p:cTn id="48" dur="500" fill="hold" decel="100000"/>
                                         <p:tgtEl>
                                           <p:spTgt spid="93"/>
                                         </p:tgtEl>
@@ -23909,7 +24019,7 @@
                               <p:par>
                                 <p:cTn id="49" presetID="42" presetClass="entr" presetSubtype="0" fill="hold" grpId="0" nodeType="withEffect">
                                   <p:stCondLst>
-                                    <p:cond delay="1360"/>
+                                    <p:cond delay="1250"/>
                                   </p:stCondLst>
                                   <p:childTnLst>
                                     <p:set>
@@ -23920,7 +24030,7 @@
                                           </p:stCondLst>
                                         </p:cTn>
                                         <p:tgtEl>
-                                          <p:spTgt spid="97"/>
+                                          <p:spTgt spid="96"/>
                                         </p:tgtEl>
                                         <p:attrNameLst>
                                           <p:attrName>style.visibility</p:attrName>
@@ -23934,7 +24044,7 @@
                                       <p:cBhvr>
                                         <p:cTn id="51" dur="450"/>
                                         <p:tgtEl>
-                                          <p:spTgt spid="97"/>
+                                          <p:spTgt spid="96"/>
                                         </p:tgtEl>
                                       </p:cBhvr>
                                     </p:animEffect>
@@ -23942,7 +24052,7 @@
                                       <p:cBhvr additive="base">
                                         <p:cTn id="52" dur="450" fill="hold" decel="100000"/>
                                         <p:tgtEl>
-                                          <p:spTgt spid="97"/>
+                                          <p:spTgt spid="96"/>
                                         </p:tgtEl>
                                         <p:attrNameLst>
                                           <p:attrName>ppt_x</p:attrName>
@@ -23965,7 +24075,7 @@
                                       <p:cBhvr additive="base">
                                         <p:cTn id="53" dur="450" fill="hold" decel="100000"/>
                                         <p:tgtEl>
-                                          <p:spTgt spid="97"/>
+                                          <p:spTgt spid="96"/>
                                         </p:tgtEl>
                                         <p:attrNameLst>
                                           <p:attrName>ppt_y</p:attrName>
@@ -23990,7 +24100,7 @@
                               <p:par>
                                 <p:cTn id="54" presetID="42" presetClass="entr" presetSubtype="0" fill="hold" grpId="0" nodeType="withEffect">
                                   <p:stCondLst>
-                                    <p:cond delay="1470"/>
+                                    <p:cond delay="1360"/>
                                   </p:stCondLst>
                                   <p:childTnLst>
                                     <p:set>
@@ -24001,7 +24111,7 @@
                                           </p:stCondLst>
                                         </p:cTn>
                                         <p:tgtEl>
-                                          <p:spTgt spid="101"/>
+                                          <p:spTgt spid="100"/>
                                         </p:tgtEl>
                                         <p:attrNameLst>
                                           <p:attrName>style.visibility</p:attrName>
@@ -24015,7 +24125,7 @@
                                       <p:cBhvr>
                                         <p:cTn id="56" dur="450"/>
                                         <p:tgtEl>
-                                          <p:spTgt spid="101"/>
+                                          <p:spTgt spid="100"/>
                                         </p:tgtEl>
                                       </p:cBhvr>
                                     </p:animEffect>
@@ -24023,7 +24133,7 @@
                                       <p:cBhvr additive="base">
                                         <p:cTn id="57" dur="450" fill="hold" decel="100000"/>
                                         <p:tgtEl>
-                                          <p:spTgt spid="101"/>
+                                          <p:spTgt spid="100"/>
                                         </p:tgtEl>
                                         <p:attrNameLst>
                                           <p:attrName>ppt_x</p:attrName>
@@ -24046,7 +24156,7 @@
                                       <p:cBhvr additive="base">
                                         <p:cTn id="58" dur="450" fill="hold" decel="100000"/>
                                         <p:tgtEl>
-                                          <p:spTgt spid="101"/>
+                                          <p:spTgt spid="100"/>
                                         </p:tgtEl>
                                         <p:attrNameLst>
                                           <p:attrName>ppt_y</p:attrName>
@@ -24071,7 +24181,7 @@
                               <p:par>
                                 <p:cTn id="59" presetID="42" presetClass="entr" presetSubtype="0" fill="hold" grpId="0" nodeType="withEffect">
                                   <p:stCondLst>
-                                    <p:cond delay="1580"/>
+                                    <p:cond delay="1470"/>
                                   </p:stCondLst>
                                   <p:childTnLst>
                                     <p:set>
@@ -24082,7 +24192,7 @@
                                           </p:stCondLst>
                                         </p:cTn>
                                         <p:tgtEl>
-                                          <p:spTgt spid="105"/>
+                                          <p:spTgt spid="104"/>
                                         </p:tgtEl>
                                         <p:attrNameLst>
                                           <p:attrName>style.visibility</p:attrName>
@@ -24096,7 +24206,7 @@
                                       <p:cBhvr>
                                         <p:cTn id="61" dur="450"/>
                                         <p:tgtEl>
-                                          <p:spTgt spid="105"/>
+                                          <p:spTgt spid="104"/>
                                         </p:tgtEl>
                                       </p:cBhvr>
                                     </p:animEffect>
@@ -24104,7 +24214,7 @@
                                       <p:cBhvr additive="base">
                                         <p:cTn id="62" dur="450" fill="hold" decel="100000"/>
                                         <p:tgtEl>
-                                          <p:spTgt spid="105"/>
+                                          <p:spTgt spid="104"/>
                                         </p:tgtEl>
                                         <p:attrNameLst>
                                           <p:attrName>ppt_x</p:attrName>
@@ -24127,7 +24237,88 @@
                                       <p:cBhvr additive="base">
                                         <p:cTn id="63" dur="450" fill="hold" decel="100000"/>
                                         <p:tgtEl>
-                                          <p:spTgt spid="105"/>
+                                          <p:spTgt spid="104"/>
+                                        </p:tgtEl>
+                                        <p:attrNameLst>
+                                          <p:attrName>ppt_y</p:attrName>
+                                        </p:attrNameLst>
+                                      </p:cBhvr>
+                                      <p:tavLst>
+                                        <p:tav tm="0">
+                                          <p:val>
+                                            <p:strVal val="#ppt_y+0.025"/>
+                                          </p:val>
+                                        </p:tav>
+                                        <p:tav tm="100000">
+                                          <p:val>
+                                            <p:strVal val="#ppt_y"/>
+                                          </p:val>
+                                        </p:tav>
+                                      </p:tavLst>
+                                    </p:anim>
+                                  </p:childTnLst>
+                                </p:cTn>
+                              </p:par>
+                              <p:par>
+                                <p:cTn id="64" presetID="42" presetClass="entr" presetSubtype="0" fill="hold" grpId="0" nodeType="withEffect">
+                                  <p:stCondLst>
+                                    <p:cond delay="1580"/>
+                                  </p:stCondLst>
+                                  <p:childTnLst>
+                                    <p:set>
+                                      <p:cBhvr>
+                                        <p:cTn id="65" dur="1" fill="hold">
+                                          <p:stCondLst>
+                                            <p:cond delay="0"/>
+                                          </p:stCondLst>
+                                        </p:cTn>
+                                        <p:tgtEl>
+                                          <p:spTgt spid="108"/>
+                                        </p:tgtEl>
+                                        <p:attrNameLst>
+                                          <p:attrName>style.visibility</p:attrName>
+                                        </p:attrNameLst>
+                                      </p:cBhvr>
+                                      <p:to>
+                                        <p:strVal val="visible"/>
+                                      </p:to>
+                                    </p:set>
+                                    <p:animEffect transition="in" filter="fade">
+                                      <p:cBhvr>
+                                        <p:cTn id="66" dur="450"/>
+                                        <p:tgtEl>
+                                          <p:spTgt spid="108"/>
+                                        </p:tgtEl>
+                                      </p:cBhvr>
+                                    </p:animEffect>
+                                    <p:anim calcmode="lin" valueType="num">
+                                      <p:cBhvr additive="base">
+                                        <p:cTn id="67" dur="450" fill="hold" decel="100000"/>
+                                        <p:tgtEl>
+                                          <p:spTgt spid="108"/>
+                                        </p:tgtEl>
+                                        <p:attrNameLst>
+                                          <p:attrName>ppt_x</p:attrName>
+                                        </p:attrNameLst>
+                                      </p:cBhvr>
+                                      <p:tavLst>
+                                        <p:tav tm="0">
+                                          <p:val>
+                                            <p:strVal val="#ppt_x"/>
+                                          </p:val>
+                                        </p:tav>
+                                        <p:tav tm="100000">
+                                          <p:val>
+                                            <p:strVal val="#ppt_x"/>
+                                          </p:val>
+                                        </p:tav>
+                                      </p:tavLst>
+                                    </p:anim>
+                                    <p:anim calcmode="lin" valueType="num">
+                                      <p:cBhvr additive="base">
+                                        <p:cTn id="68" dur="450" fill="hold" decel="100000"/>
+                                        <p:tgtEl>
+                                          <p:spTgt spid="108"/>
                                         </p:tgtEl>
                                         <p:attrNameLst>
                                           <p:attrName>ppt_y</p:attrName>
@@ -24180,7 +24371,7 @@
       <p:bldP spid="15" grpId="0" animBg="1"/>
       <p:bldP spid="16" grpId="0" animBg="1"/>
       <p:bldP spid="17" grpId="0" animBg="1"/>
-      <p:bldP spid="79" grpId="0" animBg="1"/>
+      <p:bldP spid="82" grpId="0" animBg="1"/>
     </p:bldLst>
   </p:timing>
 </p:sld>
@@ -27441,7 +27632,7 @@
                   </a:solidFill>
                   <a:latin typeface="Georgia" panose="02040502050405020303" pitchFamily="18" charset="0"/>
                 </a:rPr>
-                <a:t>Per-caller keys</a:t>
+                <a:t>Pitches are data</a:t>
               </a:r>
             </a:p>
           </p:txBody>
@@ -27480,7 +27671,7 @@
                   </a:solidFill>
                   <a:latin typeface="Inter" panose="020B0502030000000004" pitchFamily="34" charset="0"/>
                 </a:rPr>
-                <a:t>Bearer bw_buy_… for shoppers, bw_mer_… for merchant agents.</a:t>
+                <a:t>Merchant pitches never reach the agent as instructions. Injections are withdrawn.</a:t>
               </a:r>
             </a:p>
           </p:txBody>
@@ -30154,7 +30345,7 @@
                   </a:solidFill>
                   <a:latin typeface="Inter" panose="020B0502030000000004" pitchFamily="34" charset="0"/>
                 </a:rPr>
-                <a:t>5 CHECKS ON EVERY PADDLE</a:t>
+                <a:t>6 CHECKS ON EVERY PADDLE</a:t>
               </a:r>
             </a:p>
           </p:txBody>
@@ -30168,9 +30359,9 @@
         </p:nvGrpSpPr>
         <p:grpSpPr>
           <a:xfrm>
-            <a:off x="914400" y="2587752"/>
+            <a:off x="914400" y="2551176"/>
             <a:ext cx="4736592" cy="493776"/>
-            <a:chOff x="914400" y="2587752"/>
+            <a:chOff x="914400" y="2551176"/>
             <a:chExt cx="4736592" cy="493776"/>
           </a:xfrm>
         </p:grpSpPr>
@@ -30182,7 +30373,7 @@
           </p:nvSpPr>
           <p:spPr>
             <a:xfrm>
-              <a:off x="914400" y="2633472"/>
+              <a:off x="914400" y="2596896"/>
               <a:ext cx="365760" cy="365760"/>
             </a:xfrm>
             <a:prstGeom prst="ellipse">
@@ -30211,7 +30402,7 @@
           </p:nvSpPr>
           <p:spPr>
             <a:xfrm>
-              <a:off x="914400" y="2633472"/>
+              <a:off x="914400" y="2596896"/>
               <a:ext cx="365760" cy="365760"/>
             </a:xfrm>
             <a:prstGeom prst="rect">
@@ -30246,7 +30437,7 @@
           </p:nvSpPr>
           <p:spPr>
             <a:xfrm>
-              <a:off x="1444752" y="2587752"/>
+              <a:off x="1444752" y="2551176"/>
               <a:ext cx="4114800" cy="274320"/>
             </a:xfrm>
             <a:prstGeom prst="rect">
@@ -30281,7 +30472,7 @@
           </p:nvSpPr>
           <p:spPr>
             <a:xfrm>
-              <a:off x="1444752" y="2843784"/>
+              <a:off x="1444752" y="2807208"/>
               <a:ext cx="4206240" cy="237744"/>
             </a:xfrm>
             <a:prstGeom prst="rect">
@@ -30317,9 +30508,9 @@
         </p:nvGrpSpPr>
         <p:grpSpPr>
           <a:xfrm>
-            <a:off x="914400" y="3154680"/>
+            <a:off x="914400" y="3044952"/>
             <a:ext cx="4736592" cy="493776"/>
-            <a:chOff x="914400" y="3154680"/>
+            <a:chOff x="914400" y="3044952"/>
             <a:chExt cx="4736592" cy="493776"/>
           </a:xfrm>
         </p:grpSpPr>
@@ -30331,7 +30522,7 @@
           </p:nvSpPr>
           <p:spPr>
             <a:xfrm>
-              <a:off x="914400" y="3200400"/>
+              <a:off x="914400" y="3090672"/>
               <a:ext cx="365760" cy="365760"/>
             </a:xfrm>
             <a:prstGeom prst="ellipse">
@@ -30360,7 +30551,7 @@
           </p:nvSpPr>
           <p:spPr>
             <a:xfrm>
-              <a:off x="914400" y="3200400"/>
+              <a:off x="914400" y="3090672"/>
               <a:ext cx="365760" cy="365760"/>
             </a:xfrm>
             <a:prstGeom prst="rect">
@@ -30395,7 +30586,7 @@
           </p:nvSpPr>
           <p:spPr>
             <a:xfrm>
-              <a:off x="1444752" y="3154680"/>
+              <a:off x="1444752" y="3044952"/>
               <a:ext cx="4114800" cy="274320"/>
             </a:xfrm>
             <a:prstGeom prst="rect">
@@ -30430,7 +30621,7 @@
           </p:nvSpPr>
           <p:spPr>
             <a:xfrm>
-              <a:off x="1444752" y="3410712"/>
+              <a:off x="1444752" y="3300984"/>
               <a:ext cx="4206240" cy="237744"/>
             </a:xfrm>
             <a:prstGeom prst="rect">
@@ -30466,9 +30657,9 @@
         </p:nvGrpSpPr>
         <p:grpSpPr>
           <a:xfrm>
-            <a:off x="914400" y="3721608"/>
+            <a:off x="914400" y="3538728"/>
             <a:ext cx="4736592" cy="493776"/>
-            <a:chOff x="914400" y="3721608"/>
+            <a:chOff x="914400" y="3538728"/>
             <a:chExt cx="4736592" cy="493776"/>
           </a:xfrm>
         </p:grpSpPr>
@@ -30480,7 +30671,7 @@
           </p:nvSpPr>
           <p:spPr>
             <a:xfrm>
-              <a:off x="914400" y="3767328"/>
+              <a:off x="914400" y="3584448"/>
               <a:ext cx="365760" cy="365760"/>
             </a:xfrm>
             <a:prstGeom prst="ellipse">
@@ -30509,7 +30700,7 @@
           </p:nvSpPr>
           <p:spPr>
             <a:xfrm>
-              <a:off x="914400" y="3767328"/>
+              <a:off x="914400" y="3584448"/>
               <a:ext cx="365760" cy="365760"/>
             </a:xfrm>
             <a:prstGeom prst="rect">
@@ -30544,7 +30735,7 @@
           </p:nvSpPr>
           <p:spPr>
             <a:xfrm>
-              <a:off x="1444752" y="3721608"/>
+              <a:off x="1444752" y="3538728"/>
               <a:ext cx="4114800" cy="274320"/>
             </a:xfrm>
             <a:prstGeom prst="rect">
@@ -30579,7 +30770,7 @@
           </p:nvSpPr>
           <p:spPr>
             <a:xfrm>
-              <a:off x="1444752" y="3977640"/>
+              <a:off x="1444752" y="3794760"/>
               <a:ext cx="4206240" cy="237744"/>
             </a:xfrm>
             <a:prstGeom prst="rect">
@@ -30615,9 +30806,9 @@
         </p:nvGrpSpPr>
         <p:grpSpPr>
           <a:xfrm>
-            <a:off x="914400" y="4288536"/>
+            <a:off x="914400" y="4032504"/>
             <a:ext cx="4736592" cy="493776"/>
-            <a:chOff x="914400" y="4288536"/>
+            <a:chOff x="914400" y="4032504"/>
             <a:chExt cx="4736592" cy="493776"/>
           </a:xfrm>
         </p:grpSpPr>
@@ -30629,7 +30820,7 @@
           </p:nvSpPr>
           <p:spPr>
             <a:xfrm>
-              <a:off x="914400" y="4334256"/>
+              <a:off x="914400" y="4078224"/>
               <a:ext cx="365760" cy="365760"/>
             </a:xfrm>
             <a:prstGeom prst="ellipse">
@@ -30658,7 +30849,7 @@
           </p:nvSpPr>
           <p:spPr>
             <a:xfrm>
-              <a:off x="914400" y="4334256"/>
+              <a:off x="914400" y="4078224"/>
               <a:ext cx="365760" cy="365760"/>
             </a:xfrm>
             <a:prstGeom prst="rect">
@@ -30693,7 +30884,7 @@
           </p:nvSpPr>
           <p:spPr>
             <a:xfrm>
-              <a:off x="1444752" y="4288536"/>
+              <a:off x="1444752" y="4032504"/>
               <a:ext cx="4114800" cy="274320"/>
             </a:xfrm>
             <a:prstGeom prst="rect">
@@ -30728,7 +30919,7 @@
           </p:nvSpPr>
           <p:spPr>
             <a:xfrm>
-              <a:off x="1444752" y="4544568"/>
+              <a:off x="1444752" y="4288536"/>
               <a:ext cx="4206240" cy="237744"/>
             </a:xfrm>
             <a:prstGeom prst="rect">
@@ -30764,9 +30955,9 @@
         </p:nvGrpSpPr>
         <p:grpSpPr>
           <a:xfrm>
-            <a:off x="914400" y="4855464"/>
+            <a:off x="914400" y="4526280"/>
             <a:ext cx="4736592" cy="493776"/>
-            <a:chOff x="914400" y="4855464"/>
+            <a:chOff x="914400" y="4526280"/>
             <a:chExt cx="4736592" cy="493776"/>
           </a:xfrm>
         </p:grpSpPr>
@@ -30778,7 +30969,7 @@
           </p:nvSpPr>
           <p:spPr>
             <a:xfrm>
-              <a:off x="914400" y="4901184"/>
+              <a:off x="914400" y="4572000"/>
               <a:ext cx="365760" cy="365760"/>
             </a:xfrm>
             <a:prstGeom prst="ellipse">
@@ -30807,7 +30998,7 @@
           </p:nvSpPr>
           <p:spPr>
             <a:xfrm>
-              <a:off x="914400" y="4901184"/>
+              <a:off x="914400" y="4572000"/>
               <a:ext cx="365760" cy="365760"/>
             </a:xfrm>
             <a:prstGeom prst="rect">
@@ -30842,7 +31033,7 @@
           </p:nvSpPr>
           <p:spPr>
             <a:xfrm>
-              <a:off x="1444752" y="4855464"/>
+              <a:off x="1444752" y="4526280"/>
               <a:ext cx="4114800" cy="274320"/>
             </a:xfrm>
             <a:prstGeom prst="rect">
@@ -30877,7 +31068,7 @@
           </p:nvSpPr>
           <p:spPr>
             <a:xfrm>
-              <a:off x="1444752" y="5111496"/>
+              <a:off x="1444752" y="4782312"/>
               <a:ext cx="4206240" cy="237744"/>
             </a:xfrm>
             <a:prstGeom prst="rect">
@@ -30913,26 +31104,175 @@
         </p:nvGrpSpPr>
         <p:grpSpPr>
           <a:xfrm>
-            <a:off x="914400" y="5559552"/>
-            <a:ext cx="4663440" cy="530352"/>
-            <a:chOff x="914400" y="5559552"/>
-            <a:chExt cx="4663440" cy="530352"/>
+            <a:off x="914400" y="5020056"/>
+            <a:ext cx="4736592" cy="493776"/>
+            <a:chOff x="914400" y="5020056"/>
+            <a:chExt cx="4736592" cy="493776"/>
           </a:xfrm>
         </p:grpSpPr>
         <p:sp>
           <p:nvSpPr>
-            <p:cNvPr id="47" name="Rounded Rectangle 46"/>
+            <p:cNvPr id="47" name="Oval 46"/>
             <p:cNvSpPr/>
             <p:nvPr/>
           </p:nvSpPr>
           <p:spPr>
             <a:xfrm>
-              <a:off x="914400" y="5559552"/>
-              <a:ext cx="4663440" cy="530352"/>
+              <a:off x="914400" y="5065776"/>
+              <a:ext cx="365760" cy="365760"/>
+            </a:xfrm>
+            <a:prstGeom prst="ellipse">
+              <a:avLst/>
+            </a:prstGeom>
+            <a:solidFill>
+              <a:srgbClr val="E5F0E8"/>
+            </a:solidFill>
+            <a:ln>
+              <a:noFill/>
+            </a:ln>
+          </p:spPr>
+          <p:txBody>
+            <a:bodyPr rtlCol="0" anchor="ctr"/>
+            <a:lstStyle/>
+            <a:p>
+              <a:pPr algn="ctr"/>
+            </a:p>
+          </p:txBody>
+        </p:sp>
+        <p:sp>
+          <p:nvSpPr>
+            <p:cNvPr id="48" name="TextBox 47"/>
+            <p:cNvSpPr txBox="1"/>
+            <p:nvPr/>
+          </p:nvSpPr>
+          <p:spPr>
+            <a:xfrm>
+              <a:off x="914400" y="5065776"/>
+              <a:ext cx="365760" cy="365760"/>
+            </a:xfrm>
+            <a:prstGeom prst="rect">
+              <a:avLst/>
+            </a:prstGeom>
+            <a:noFill/>
+          </p:spPr>
+          <p:txBody>
+            <a:bodyPr wrap="square" lIns="0" rIns="0" tIns="0" bIns="0" anchor="ctr">
+              <a:noAutofit/>
+            </a:bodyPr>
+            <a:lstStyle/>
+            <a:p>
+              <a:pPr algn="ctr"/>
+              <a:r>
+                <a:rPr sz="1200" b="1" i="0">
+                  <a:solidFill>
+                    <a:srgbClr val="2D6A48"/>
+                  </a:solidFill>
+                  <a:latin typeface="Inter" panose="020B0502030000000004" pitchFamily="34" charset="0"/>
+                </a:rPr>
+                <a:t>✓</a:t>
+              </a:r>
+            </a:p>
+          </p:txBody>
+        </p:sp>
+        <p:sp>
+          <p:nvSpPr>
+            <p:cNvPr id="49" name="TextBox 48"/>
+            <p:cNvSpPr txBox="1"/>
+            <p:nvPr/>
+          </p:nvSpPr>
+          <p:spPr>
+            <a:xfrm>
+              <a:off x="1444752" y="5020056"/>
+              <a:ext cx="4114800" cy="274320"/>
+            </a:xfrm>
+            <a:prstGeom prst="rect">
+              <a:avLst/>
+            </a:prstGeom>
+            <a:noFill/>
+          </p:spPr>
+          <p:txBody>
+            <a:bodyPr wrap="square" lIns="0" rIns="0" tIns="0" bIns="0" anchor="ctr">
+              <a:noAutofit/>
+            </a:bodyPr>
+            <a:lstStyle/>
+            <a:p>
+              <a:pPr algn="l"/>
+              <a:r>
+                <a:rPr sz="1400" b="0" i="0">
+                  <a:solidFill>
+                    <a:srgbClr val="16130E"/>
+                  </a:solidFill>
+                  <a:latin typeface="Georgia" panose="02040502050405020303" pitchFamily="18" charset="0"/>
+                </a:rPr>
+                <a:t>6. Pitch safety</a:t>
+              </a:r>
+            </a:p>
+          </p:txBody>
+        </p:sp>
+        <p:sp>
+          <p:nvSpPr>
+            <p:cNvPr id="50" name="TextBox 49"/>
+            <p:cNvSpPr txBox="1"/>
+            <p:nvPr/>
+          </p:nvSpPr>
+          <p:spPr>
+            <a:xfrm>
+              <a:off x="1444752" y="5276088"/>
+              <a:ext cx="4206240" cy="237744"/>
+            </a:xfrm>
+            <a:prstGeom prst="rect">
+              <a:avLst/>
+            </a:prstGeom>
+            <a:noFill/>
+          </p:spPr>
+          <p:txBody>
+            <a:bodyPr wrap="square" lIns="0" rIns="0" tIns="0" bIns="0" anchor="ctr">
+              <a:noAutofit/>
+            </a:bodyPr>
+            <a:lstStyle/>
+            <a:p>
+              <a:pPr algn="l"/>
+              <a:r>
+                <a:rPr sz="1050" b="0" i="0">
+                  <a:solidFill>
+                    <a:srgbClr val="6E6658"/>
+                  </a:solidFill>
+                  <a:latin typeface="Inter" panose="020B0502030000000004" pitchFamily="34" charset="0"/>
+                </a:rPr>
+                <a:t>the pitch is data: instructions aimed at the agent are withdrawn</a:t>
+              </a:r>
+            </a:p>
+          </p:txBody>
+        </p:sp>
+      </p:grpSp>
+      <p:grpSp>
+        <p:nvGrpSpPr>
+          <p:cNvPr id="51" name="Group 50"/>
+          <p:cNvGrpSpPr/>
+          <p:nvPr/>
+        </p:nvGrpSpPr>
+        <p:grpSpPr>
+          <a:xfrm>
+            <a:off x="914400" y="5614416"/>
+            <a:ext cx="4663440" cy="493776"/>
+            <a:chOff x="914400" y="5614416"/>
+            <a:chExt cx="4663440" cy="493776"/>
+          </a:xfrm>
+        </p:grpSpPr>
+        <p:sp>
+          <p:nvSpPr>
+            <p:cNvPr id="52" name="Rounded Rectangle 51"/>
+            <p:cNvSpPr/>
+            <p:nvPr/>
+          </p:nvSpPr>
+          <p:spPr>
+            <a:xfrm>
+              <a:off x="914400" y="5614416"/>
+              <a:ext cx="4663440" cy="493776"/>
             </a:xfrm>
             <a:prstGeom prst="roundRect">
               <a:avLst>
-                <a:gd name="adj" fmla="val 10344"/>
+                <a:gd name="adj" fmla="val 11111"/>
               </a:avLst>
             </a:prstGeom>
             <a:solidFill>
@@ -30952,14 +31292,14 @@
         </p:sp>
         <p:sp>
           <p:nvSpPr>
-            <p:cNvPr id="48" name="Rectangle 47"/>
+            <p:cNvPr id="53" name="Rectangle 52"/>
             <p:cNvSpPr/>
             <p:nvPr/>
           </p:nvSpPr>
           <p:spPr>
             <a:xfrm>
-              <a:off x="914400" y="5559552"/>
-              <a:ext cx="45720" cy="530352"/>
+              <a:off x="914400" y="5614416"/>
+              <a:ext cx="45720" cy="493776"/>
             </a:xfrm>
             <a:prstGeom prst="rect">
               <a:avLst/>
@@ -30981,14 +31321,14 @@
         </p:sp>
         <p:sp>
           <p:nvSpPr>
-            <p:cNvPr id="49" name="TextBox 48"/>
+            <p:cNvPr id="54" name="TextBox 53"/>
             <p:cNvSpPr txBox="1"/>
             <p:nvPr/>
           </p:nvSpPr>
           <p:spPr>
             <a:xfrm>
-              <a:off x="1097280" y="5559552"/>
-              <a:ext cx="4434840" cy="530352"/>
+              <a:off x="1097280" y="5614416"/>
+              <a:ext cx="4434840" cy="493776"/>
             </a:xfrm>
             <a:prstGeom prst="rect">
               <a:avLst/>
@@ -31009,7 +31349,7 @@
                   </a:solidFill>
                   <a:latin typeface="Inter" panose="020B0502030000000004" pitchFamily="34" charset="0"/>
                 </a:rPr>
-                <a:t>Fail checks 1–4: withdrawn, misrepresentation.</a:t>
+                <a:t>Fail any check but stock: withdrawn.</a:t>
               </a:r>
               <a:r>
                 <a:rPr sz="1050" b="0" i="0">
@@ -31026,7 +31366,7 @@
       </p:grpSp>
       <p:grpSp>
         <p:nvGrpSpPr>
-          <p:cNvPr id="50" name="Group 49"/>
+          <p:cNvPr id="55" name="Group 54"/>
           <p:cNvGrpSpPr/>
           <p:nvPr/>
         </p:nvGrpSpPr>
@@ -31040,7 +31380,7 @@
         </p:grpSpPr>
         <p:sp>
           <p:nvSpPr>
-            <p:cNvPr id="51" name="Rounded Rectangle 50"/>
+            <p:cNvPr id="56" name="Rounded Rectangle 55"/>
             <p:cNvSpPr/>
             <p:nvPr/>
           </p:nvSpPr>
@@ -31073,7 +31413,7 @@
         </p:sp>
         <p:sp>
           <p:nvSpPr>
-            <p:cNvPr id="52" name="TextBox 51"/>
+            <p:cNvPr id="57" name="TextBox 56"/>
             <p:cNvSpPr txBox="1"/>
             <p:nvPr/>
           </p:nvSpPr>
@@ -31109,7 +31449,7 @@
       </p:grpSp>
       <p:grpSp>
         <p:nvGrpSpPr>
-          <p:cNvPr id="53" name="Group 52"/>
+          <p:cNvPr id="58" name="Group 57"/>
           <p:cNvGrpSpPr/>
           <p:nvPr/>
         </p:nvGrpSpPr>
@@ -31123,7 +31463,7 @@
         </p:grpSpPr>
         <p:sp>
           <p:nvSpPr>
-            <p:cNvPr id="54" name="Rounded Rectangle 53"/>
+            <p:cNvPr id="59" name="Rounded Rectangle 58"/>
             <p:cNvSpPr/>
             <p:nvPr/>
           </p:nvSpPr>
@@ -31154,7 +31494,7 @@
         </p:sp>
         <p:sp>
           <p:nvSpPr>
-            <p:cNvPr id="55" name="TextBox 54"/>
+            <p:cNvPr id="60" name="TextBox 59"/>
             <p:cNvSpPr txBox="1"/>
             <p:nvPr/>
           </p:nvSpPr>
@@ -31190,7 +31530,7 @@
       </p:grpSp>
       <p:grpSp>
         <p:nvGrpSpPr>
-          <p:cNvPr id="56" name="Group 55"/>
+          <p:cNvPr id="61" name="Group 60"/>
           <p:cNvGrpSpPr/>
           <p:nvPr/>
         </p:nvGrpSpPr>
@@ -31204,7 +31544,7 @@
         </p:grpSpPr>
         <p:sp>
           <p:nvSpPr>
-            <p:cNvPr id="57" name="Rounded Rectangle 56"/>
+            <p:cNvPr id="62" name="Rounded Rectangle 61"/>
             <p:cNvSpPr/>
             <p:nvPr/>
           </p:nvSpPr>
@@ -31235,7 +31575,7 @@
         </p:sp>
         <p:sp>
           <p:nvSpPr>
-            <p:cNvPr id="58" name="TextBox 57"/>
+            <p:cNvPr id="63" name="TextBox 62"/>
             <p:cNvSpPr txBox="1"/>
             <p:nvPr/>
           </p:nvSpPr>
@@ -31271,7 +31611,7 @@
       </p:grpSp>
       <p:grpSp>
         <p:nvGrpSpPr>
-          <p:cNvPr id="59" name="Group 58"/>
+          <p:cNvPr id="64" name="Group 63"/>
           <p:cNvGrpSpPr/>
           <p:nvPr/>
         </p:nvGrpSpPr>
@@ -31285,7 +31625,7 @@
         </p:grpSpPr>
         <p:sp>
           <p:nvSpPr>
-            <p:cNvPr id="60" name="Rounded Rectangle 59"/>
+            <p:cNvPr id="65" name="Rounded Rectangle 64"/>
             <p:cNvSpPr/>
             <p:nvPr/>
           </p:nvSpPr>
@@ -31316,7 +31656,7 @@
         </p:sp>
         <p:sp>
           <p:nvSpPr>
-            <p:cNvPr id="61" name="TextBox 60"/>
+            <p:cNvPr id="66" name="TextBox 65"/>
             <p:cNvSpPr txBox="1"/>
             <p:nvPr/>
           </p:nvSpPr>
@@ -31352,7 +31692,7 @@
       </p:grpSp>
       <p:grpSp>
         <p:nvGrpSpPr>
-          <p:cNvPr id="62" name="Group 61"/>
+          <p:cNvPr id="67" name="Group 66"/>
           <p:cNvGrpSpPr/>
           <p:nvPr/>
         </p:nvGrpSpPr>
@@ -31366,7 +31706,7 @@
         </p:grpSpPr>
         <p:sp>
           <p:nvSpPr>
-            <p:cNvPr id="63" name="Rounded Rectangle 62"/>
+            <p:cNvPr id="68" name="Rounded Rectangle 67"/>
             <p:cNvSpPr/>
             <p:nvPr/>
           </p:nvSpPr>
@@ -31397,7 +31737,7 @@
         </p:sp>
         <p:sp>
           <p:nvSpPr>
-            <p:cNvPr id="64" name="TextBox 63"/>
+            <p:cNvPr id="69" name="TextBox 68"/>
             <p:cNvSpPr txBox="1"/>
             <p:nvPr/>
           </p:nvSpPr>
@@ -31433,7 +31773,7 @@
       </p:grpSp>
       <p:grpSp>
         <p:nvGrpSpPr>
-          <p:cNvPr id="65" name="Group 64"/>
+          <p:cNvPr id="70" name="Group 69"/>
           <p:cNvGrpSpPr/>
           <p:nvPr/>
         </p:nvGrpSpPr>
@@ -31447,7 +31787,7 @@
         </p:grpSpPr>
         <p:sp>
           <p:nvSpPr>
-            <p:cNvPr id="66" name="Rounded Rectangle 65"/>
+            <p:cNvPr id="71" name="Rounded Rectangle 70"/>
             <p:cNvSpPr/>
             <p:nvPr/>
           </p:nvSpPr>
@@ -31478,7 +31818,7 @@
         </p:sp>
         <p:sp>
           <p:nvSpPr>
-            <p:cNvPr id="67" name="TextBox 66"/>
+            <p:cNvPr id="72" name="TextBox 71"/>
             <p:cNvSpPr txBox="1"/>
             <p:nvPr/>
           </p:nvSpPr>
@@ -31514,7 +31854,7 @@
       </p:grpSp>
       <p:grpSp>
         <p:nvGrpSpPr>
-          <p:cNvPr id="68" name="Group 67"/>
+          <p:cNvPr id="73" name="Group 72"/>
           <p:cNvGrpSpPr/>
           <p:nvPr/>
         </p:nvGrpSpPr>
@@ -31528,7 +31868,7 @@
         </p:grpSpPr>
         <p:sp>
           <p:nvSpPr>
-            <p:cNvPr id="69" name="Rounded Rectangle 68"/>
+            <p:cNvPr id="74" name="Rounded Rectangle 73"/>
             <p:cNvSpPr/>
             <p:nvPr/>
           </p:nvSpPr>
@@ -31562,7 +31902,7 @@
         </p:sp>
         <p:sp>
           <p:nvSpPr>
-            <p:cNvPr id="70" name="TextBox 69"/>
+            <p:cNvPr id="75" name="TextBox 74"/>
             <p:cNvSpPr txBox="1"/>
             <p:nvPr/>
           </p:nvSpPr>
@@ -31607,7 +31947,7 @@
       </p:grpSp>
       <p:grpSp>
         <p:nvGrpSpPr>
-          <p:cNvPr id="71" name="Group 70"/>
+          <p:cNvPr id="76" name="Group 75"/>
           <p:cNvGrpSpPr/>
           <p:nvPr/>
         </p:nvGrpSpPr>
@@ -31621,7 +31961,7 @@
         </p:grpSpPr>
         <p:sp>
           <p:nvSpPr>
-            <p:cNvPr id="72" name="Rounded Rectangle 71"/>
+            <p:cNvPr id="77" name="Rounded Rectangle 76"/>
             <p:cNvSpPr/>
             <p:nvPr/>
           </p:nvSpPr>
@@ -31661,7 +32001,7 @@
         </p:sp>
         <p:sp>
           <p:nvSpPr>
-            <p:cNvPr id="73" name="Oval 72"/>
+            <p:cNvPr id="78" name="Oval 77"/>
             <p:cNvSpPr/>
             <p:nvPr/>
           </p:nvSpPr>
@@ -31690,7 +32030,7 @@
         </p:sp>
         <p:sp>
           <p:nvSpPr>
-            <p:cNvPr id="74" name="Oval 73"/>
+            <p:cNvPr id="79" name="Oval 78"/>
             <p:cNvSpPr/>
             <p:nvPr/>
           </p:nvSpPr>
@@ -31719,7 +32059,7 @@
         </p:sp>
         <p:sp>
           <p:nvSpPr>
-            <p:cNvPr id="75" name="Oval 74"/>
+            <p:cNvPr id="80" name="Oval 79"/>
             <p:cNvSpPr/>
             <p:nvPr/>
           </p:nvSpPr>
@@ -31748,7 +32088,7 @@
         </p:sp>
         <p:sp>
           <p:nvSpPr>
-            <p:cNvPr id="76" name="Rounded Rectangle 75"/>
+            <p:cNvPr id="81" name="Rounded Rectangle 80"/>
             <p:cNvSpPr/>
             <p:nvPr/>
           </p:nvSpPr>
@@ -31779,7 +32119,7 @@
         </p:sp>
         <p:sp>
           <p:nvSpPr>
-            <p:cNvPr id="77" name="TextBox 76"/>
+            <p:cNvPr id="82" name="TextBox 81"/>
             <p:cNvSpPr txBox="1"/>
             <p:nvPr/>
           </p:nvSpPr>
@@ -31814,7 +32154,7 @@
         </p:sp>
         <p:sp>
           <p:nvSpPr>
-            <p:cNvPr id="78" name="Rectangle 77"/>
+            <p:cNvPr id="83" name="Rectangle 82"/>
             <p:cNvSpPr/>
             <p:nvPr/>
           </p:nvSpPr>
@@ -31843,7 +32183,7 @@
         </p:sp>
         <p:sp>
           <p:nvSpPr>
-            <p:cNvPr id="79" name="Rounded Rectangle 78"/>
+            <p:cNvPr id="84" name="Rounded Rectangle 83"/>
             <p:cNvSpPr/>
             <p:nvPr/>
           </p:nvSpPr>
@@ -31874,7 +32214,7 @@
         </p:sp>
         <p:sp>
           <p:nvSpPr>
-            <p:cNvPr id="80" name="Rectangle 79"/>
+            <p:cNvPr id="85" name="Rectangle 84"/>
             <p:cNvSpPr/>
             <p:nvPr/>
           </p:nvSpPr>
@@ -31903,7 +32243,7 @@
         </p:sp>
         <p:sp>
           <p:nvSpPr>
-            <p:cNvPr id="81" name="TextBox 80"/>
+            <p:cNvPr id="86" name="TextBox 85"/>
             <p:cNvSpPr txBox="1"/>
             <p:nvPr/>
           </p:nvSpPr>
@@ -31938,7 +32278,7 @@
         </p:sp>
         <p:sp>
           <p:nvSpPr>
-            <p:cNvPr id="82" name="TextBox 81"/>
+            <p:cNvPr id="87" name="TextBox 86"/>
             <p:cNvSpPr txBox="1"/>
             <p:nvPr/>
           </p:nvSpPr>
@@ -31973,7 +32313,7 @@
         </p:sp>
         <p:sp>
           <p:nvSpPr>
-            <p:cNvPr id="83" name="TextBox 82"/>
+            <p:cNvPr id="88" name="TextBox 87"/>
             <p:cNvSpPr txBox="1"/>
             <p:nvPr/>
           </p:nvSpPr>
@@ -32008,7 +32348,7 @@
         </p:sp>
         <p:sp>
           <p:nvSpPr>
-            <p:cNvPr id="84" name="Rectangle 83"/>
+            <p:cNvPr id="89" name="Rectangle 88"/>
             <p:cNvSpPr/>
             <p:nvPr/>
           </p:nvSpPr>
@@ -32037,7 +32377,7 @@
         </p:sp>
         <p:sp>
           <p:nvSpPr>
-            <p:cNvPr id="85" name="TextBox 84"/>
+            <p:cNvPr id="90" name="TextBox 89"/>
             <p:cNvSpPr txBox="1"/>
             <p:nvPr/>
           </p:nvSpPr>
@@ -32072,7 +32412,7 @@
         </p:sp>
         <p:sp>
           <p:nvSpPr>
-            <p:cNvPr id="86" name="TextBox 85"/>
+            <p:cNvPr id="91" name="TextBox 90"/>
             <p:cNvSpPr txBox="1"/>
             <p:nvPr/>
           </p:nvSpPr>
@@ -32107,7 +32447,7 @@
         </p:sp>
         <p:sp>
           <p:nvSpPr>
-            <p:cNvPr id="87" name="Rectangle 86"/>
+            <p:cNvPr id="92" name="Rectangle 91"/>
             <p:cNvSpPr/>
             <p:nvPr/>
           </p:nvSpPr>
@@ -32136,7 +32476,7 @@
         </p:sp>
         <p:sp>
           <p:nvSpPr>
-            <p:cNvPr id="88" name="TextBox 87"/>
+            <p:cNvPr id="93" name="TextBox 92"/>
             <p:cNvSpPr txBox="1"/>
             <p:nvPr/>
           </p:nvSpPr>
@@ -32171,7 +32511,7 @@
         </p:sp>
         <p:sp>
           <p:nvSpPr>
-            <p:cNvPr id="89" name="TextBox 88"/>
+            <p:cNvPr id="94" name="TextBox 93"/>
             <p:cNvSpPr txBox="1"/>
             <p:nvPr/>
           </p:nvSpPr>
@@ -32206,7 +32546,7 @@
         </p:sp>
         <p:sp>
           <p:nvSpPr>
-            <p:cNvPr id="90" name="Rectangle 89"/>
+            <p:cNvPr id="95" name="Rectangle 94"/>
             <p:cNvSpPr/>
             <p:nvPr/>
           </p:nvSpPr>
@@ -32235,7 +32575,7 @@
         </p:sp>
         <p:sp>
           <p:nvSpPr>
-            <p:cNvPr id="91" name="TextBox 90"/>
+            <p:cNvPr id="96" name="TextBox 95"/>
             <p:cNvSpPr txBox="1"/>
             <p:nvPr/>
           </p:nvSpPr>
@@ -32270,7 +32610,7 @@
         </p:sp>
         <p:sp>
           <p:nvSpPr>
-            <p:cNvPr id="92" name="TextBox 91"/>
+            <p:cNvPr id="97" name="TextBox 96"/>
             <p:cNvSpPr txBox="1"/>
             <p:nvPr/>
           </p:nvSpPr>
@@ -32305,7 +32645,7 @@
         </p:sp>
         <p:sp>
           <p:nvSpPr>
-            <p:cNvPr id="93" name="TextBox 92"/>
+            <p:cNvPr id="98" name="TextBox 97"/>
             <p:cNvSpPr txBox="1"/>
             <p:nvPr/>
           </p:nvSpPr>
@@ -32341,7 +32681,7 @@
       </p:grpSp>
       <p:sp>
         <p:nvSpPr>
-          <p:cNvPr id="94" name="TextBox 93"/>
+          <p:cNvPr id="99" name="TextBox 98"/>
           <p:cNvSpPr txBox="1"/>
           <p:nvPr/>
         </p:nvSpPr>
@@ -32385,7 +32725,7 @@
       </p:sp>
       <p:grpSp>
         <p:nvGrpSpPr>
-          <p:cNvPr id="95" name="Group 94"/>
+          <p:cNvPr id="100" name="Group 99"/>
           <p:cNvGrpSpPr/>
           <p:nvPr/>
         </p:nvGrpSpPr>
@@ -32399,7 +32739,7 @@
         </p:grpSpPr>
         <p:sp>
           <p:nvSpPr>
-            <p:cNvPr id="96" name="Rounded Rectangle 95"/>
+            <p:cNvPr id="101" name="Rounded Rectangle 100"/>
             <p:cNvSpPr/>
             <p:nvPr/>
           </p:nvSpPr>
@@ -32432,7 +32772,7 @@
         </p:sp>
         <p:sp>
           <p:nvSpPr>
-            <p:cNvPr id="97" name="Rectangle 96"/>
+            <p:cNvPr id="102" name="Rectangle 101"/>
             <p:cNvSpPr/>
             <p:nvPr/>
           </p:nvSpPr>
@@ -32461,7 +32801,7 @@
         </p:sp>
         <p:sp>
           <p:nvSpPr>
-            <p:cNvPr id="98" name="TextBox 97"/>
+            <p:cNvPr id="103" name="TextBox 102"/>
             <p:cNvSpPr txBox="1"/>
             <p:nvPr/>
           </p:nvSpPr>
@@ -32496,7 +32836,7 @@
         </p:sp>
         <p:sp>
           <p:nvSpPr>
-            <p:cNvPr id="99" name="TextBox 98"/>
+            <p:cNvPr id="104" name="TextBox 103"/>
             <p:cNvSpPr txBox="1"/>
             <p:nvPr/>
           </p:nvSpPr>
@@ -32536,7 +32876,7 @@
       </p:grpSp>
       <p:grpSp>
         <p:nvGrpSpPr>
-          <p:cNvPr id="100" name="Group 99"/>
+          <p:cNvPr id="105" name="Group 104"/>
           <p:cNvGrpSpPr/>
           <p:nvPr/>
         </p:nvGrpSpPr>
@@ -32550,7 +32890,7 @@
         </p:grpSpPr>
         <p:sp>
           <p:nvSpPr>
-            <p:cNvPr id="101" name="Rounded Rectangle 100"/>
+            <p:cNvPr id="106" name="Rounded Rectangle 105"/>
             <p:cNvSpPr/>
             <p:nvPr/>
           </p:nvSpPr>
@@ -32583,7 +32923,7 @@
         </p:sp>
         <p:sp>
           <p:nvSpPr>
-            <p:cNvPr id="102" name="Rectangle 101"/>
+            <p:cNvPr id="107" name="Rectangle 106"/>
             <p:cNvSpPr/>
             <p:nvPr/>
           </p:nvSpPr>
@@ -32612,7 +32952,7 @@
         </p:sp>
         <p:sp>
           <p:nvSpPr>
-            <p:cNvPr id="103" name="TextBox 102"/>
+            <p:cNvPr id="108" name="TextBox 107"/>
             <p:cNvSpPr txBox="1"/>
             <p:nvPr/>
           </p:nvSpPr>
@@ -32647,7 +32987,7 @@
         </p:sp>
         <p:sp>
           <p:nvSpPr>
-            <p:cNvPr id="104" name="TextBox 103"/>
+            <p:cNvPr id="109" name="TextBox 108"/>
             <p:cNvSpPr txBox="1"/>
             <p:nvPr/>
           </p:nvSpPr>
@@ -33356,7 +33696,7 @@
                               <p:par>
                                 <p:cTn id="46" presetID="42" presetClass="entr" presetSubtype="0" fill="hold" grpId="0" nodeType="withEffect">
                                   <p:stCondLst>
-                                    <p:cond delay="1150"/>
+                                    <p:cond delay="1050"/>
                                   </p:stCondLst>
                                   <p:childTnLst>
                                     <p:set>
@@ -33398,7 +33738,7 @@
                                       <p:tavLst>
                                         <p:tav tm="0">
                                           <p:val>
-                                            <p:strVal val="#ppt_x"/>
+                                            <p:strVal val="#ppt_x-0.02"/>
                                           </p:val>
                                         </p:tav>
                                         <p:tav tm="100000">
@@ -33421,7 +33761,7 @@
                                       <p:tavLst>
                                         <p:tav tm="0">
                                           <p:val>
-                                            <p:strVal val="#ppt_y+0.025"/>
+                                            <p:strVal val="#ppt_y"/>
                                           </p:val>
                                         </p:tav>
                                         <p:tav tm="100000">
@@ -33437,7 +33777,7 @@
                               <p:par>
                                 <p:cTn id="51" presetID="42" presetClass="entr" presetSubtype="0" fill="hold" grpId="0" nodeType="withEffect">
                                   <p:stCondLst>
-                                    <p:cond delay="400"/>
+                                    <p:cond delay="1150"/>
                                   </p:stCondLst>
                                   <p:childTnLst>
                                     <p:set>
@@ -33448,7 +33788,7 @@
                                           </p:stCondLst>
                                         </p:cTn>
                                         <p:tgtEl>
-                                          <p:spTgt spid="50"/>
+                                          <p:spTgt spid="51"/>
                                         </p:tgtEl>
                                         <p:attrNameLst>
                                           <p:attrName>style.visibility</p:attrName>
@@ -33460,17 +33800,17 @@
                                     </p:set>
                                     <p:animEffect transition="in" filter="fade">
                                       <p:cBhvr>
-                                        <p:cTn id="53" dur="500"/>
-                                        <p:tgtEl>
-                                          <p:spTgt spid="50"/>
+                                        <p:cTn id="53" dur="400"/>
+                                        <p:tgtEl>
+                                          <p:spTgt spid="51"/>
                                         </p:tgtEl>
                                       </p:cBhvr>
                                     </p:animEffect>
                                     <p:anim calcmode="lin" valueType="num">
                                       <p:cBhvr additive="base">
-                                        <p:cTn id="54" dur="500" fill="hold" decel="100000"/>
-                                        <p:tgtEl>
-                                          <p:spTgt spid="50"/>
+                                        <p:cTn id="54" dur="400" fill="hold" decel="100000"/>
+                                        <p:tgtEl>
+                                          <p:spTgt spid="51"/>
                                         </p:tgtEl>
                                         <p:attrNameLst>
                                           <p:attrName>ppt_x</p:attrName>
@@ -33491,9 +33831,9 @@
                                     </p:anim>
                                     <p:anim calcmode="lin" valueType="num">
                                       <p:cBhvr additive="base">
-                                        <p:cTn id="55" dur="500" fill="hold" decel="100000"/>
-                                        <p:tgtEl>
-                                          <p:spTgt spid="50"/>
+                                        <p:cTn id="55" dur="400" fill="hold" decel="100000"/>
+                                        <p:tgtEl>
+                                          <p:spTgt spid="51"/>
                                         </p:tgtEl>
                                         <p:attrNameLst>
                                           <p:attrName>ppt_y</p:attrName>
@@ -33516,9 +33856,9 @@
                                 </p:cTn>
                               </p:par>
                               <p:par>
-                                <p:cTn id="56" presetID="22" presetClass="entr" presetSubtype="8" fill="hold" grpId="0" nodeType="withEffect">
+                                <p:cTn id="56" presetID="42" presetClass="entr" presetSubtype="0" fill="hold" grpId="0" nodeType="withEffect">
                                   <p:stCondLst>
-                                    <p:cond delay="800"/>
+                                    <p:cond delay="400"/>
                                   </p:stCondLst>
                                   <p:childTnLst>
                                     <p:set>
@@ -33529,7 +33869,88 @@
                                           </p:stCondLst>
                                         </p:cTn>
                                         <p:tgtEl>
-                                          <p:spTgt spid="53"/>
+                                          <p:spTgt spid="55"/>
+                                        </p:tgtEl>
+                                        <p:attrNameLst>
+                                          <p:attrName>style.visibility</p:attrName>
+                                        </p:attrNameLst>
+                                      </p:cBhvr>
+                                      <p:to>
+                                        <p:strVal val="visible"/>
+                                      </p:to>
+                                    </p:set>
+                                    <p:animEffect transition="in" filter="fade">
+                                      <p:cBhvr>
+                                        <p:cTn id="58" dur="500"/>
+                                        <p:tgtEl>
+                                          <p:spTgt spid="55"/>
+                                        </p:tgtEl>
+                                      </p:cBhvr>
+                                    </p:animEffect>
+                                    <p:anim calcmode="lin" valueType="num">
+                                      <p:cBhvr additive="base">
+                                        <p:cTn id="59" dur="500" fill="hold" decel="100000"/>
+                                        <p:tgtEl>
+                                          <p:spTgt spid="55"/>
+                                        </p:tgtEl>
+                                        <p:attrNameLst>
+                                          <p:attrName>ppt_x</p:attrName>
+                                        </p:attrNameLst>
+                                      </p:cBhvr>
+                                      <p:tavLst>
+                                        <p:tav tm="0">
+                                          <p:val>
+                                            <p:strVal val="#ppt_x"/>
+                                          </p:val>
+                                        </p:tav>
+                                        <p:tav tm="100000">
+                                          <p:val>
+                                            <p:strVal val="#ppt_x"/>
+                                          </p:val>
+                                        </p:tav>
+                                      </p:tavLst>
+                                    </p:anim>
+                                    <p:anim calcmode="lin" valueType="num">
+                                      <p:cBhvr additive="base">
+                                        <p:cTn id="60" dur="500" fill="hold" decel="100000"/>
+                                        <p:tgtEl>
+                                          <p:spTgt spid="55"/>
+                                        </p:tgtEl>
+                                        <p:attrNameLst>
+                                          <p:attrName>ppt_y</p:attrName>
+                                        </p:attrNameLst>
+                                      </p:cBhvr>
+                                      <p:tavLst>
+                                        <p:tav tm="0">
+                                          <p:val>
+                                            <p:strVal val="#ppt_y+0.025"/>
+                                          </p:val>
+                                        </p:tav>
+                                        <p:tav tm="100000">
+                                          <p:val>
+                                            <p:strVal val="#ppt_y"/>
+                                          </p:val>
+                                        </p:tav>
+                                      </p:tavLst>
+                                    </p:anim>
+                                  </p:childTnLst>
+                                </p:cTn>
+                              </p:par>
+                              <p:par>
+                                <p:cTn id="61" presetID="22" presetClass="entr" presetSubtype="8" fill="hold" grpId="0" nodeType="withEffect">
+                                  <p:stCondLst>
+                                    <p:cond delay="800"/>
+                                  </p:stCondLst>
+                                  <p:childTnLst>
+                                    <p:set>
+                                      <p:cBhvr>
+                                        <p:cTn id="62" dur="1" fill="hold">
+                                          <p:stCondLst>
+                                            <p:cond delay="0"/>
+                                          </p:stCondLst>
+                                        </p:cTn>
+                                        <p:tgtEl>
+                                          <p:spTgt spid="58"/>
                                         </p:tgtEl>
                                         <p:attrNameLst>
                                           <p:attrName>style.visibility</p:attrName>
@@ -33541,9 +33962,9 @@
                                     </p:set>
                                     <p:animEffect transition="in" filter="wipe(left)">
                                       <p:cBhvr>
-                                        <p:cTn id="58" dur="400"/>
-                                        <p:tgtEl>
-                                          <p:spTgt spid="53"/>
+                                        <p:cTn id="63" dur="400"/>
+                                        <p:tgtEl>
+                                          <p:spTgt spid="58"/>
                                         </p:tgtEl>
                                       </p:cBhvr>
                                     </p:animEffect>
@@ -33551,20 +33972,20 @@
                                 </p:cTn>
                               </p:par>
                               <p:par>
-                                <p:cTn id="59" presetID="22" presetClass="entr" presetSubtype="8" fill="hold" grpId="0" nodeType="withEffect">
+                                <p:cTn id="64" presetID="22" presetClass="entr" presetSubtype="8" fill="hold" grpId="0" nodeType="withEffect">
                                   <p:stCondLst>
                                     <p:cond delay="920"/>
                                   </p:stCondLst>
                                   <p:childTnLst>
                                     <p:set>
                                       <p:cBhvr>
-                                        <p:cTn id="60" dur="1" fill="hold">
+                                        <p:cTn id="65" dur="1" fill="hold">
                                           <p:stCondLst>
                                             <p:cond delay="0"/>
                                           </p:stCondLst>
                                         </p:cTn>
                                         <p:tgtEl>
-                                          <p:spTgt spid="56"/>
+                                          <p:spTgt spid="61"/>
                                         </p:tgtEl>
                                         <p:attrNameLst>
                                           <p:attrName>style.visibility</p:attrName>
@@ -33576,9 +33997,9 @@
                                     </p:set>
                                     <p:animEffect transition="in" filter="wipe(left)">
                                       <p:cBhvr>
-                                        <p:cTn id="61" dur="400"/>
-                                        <p:tgtEl>
-                                          <p:spTgt spid="56"/>
+                                        <p:cTn id="66" dur="400"/>
+                                        <p:tgtEl>
+                                          <p:spTgt spid="61"/>
                                         </p:tgtEl>
                                       </p:cBhvr>
                                     </p:animEffect>
@@ -33586,20 +34007,20 @@
                                 </p:cTn>
                               </p:par>
                               <p:par>
-                                <p:cTn id="62" presetID="22" presetClass="entr" presetSubtype="8" fill="hold" grpId="0" nodeType="withEffect">
+                                <p:cTn id="67" presetID="22" presetClass="entr" presetSubtype="8" fill="hold" grpId="0" nodeType="withEffect">
                                   <p:stCondLst>
                                     <p:cond delay="1040"/>
                                   </p:stCondLst>
                                   <p:childTnLst>
                                     <p:set>
                                       <p:cBhvr>
-                                        <p:cTn id="63" dur="1" fill="hold">
+                                        <p:cTn id="68" dur="1" fill="hold">
                                           <p:stCondLst>
                                             <p:cond delay="0"/>
                                           </p:stCondLst>
                                         </p:cTn>
                                         <p:tgtEl>
-                                          <p:spTgt spid="59"/>
+                                          <p:spTgt spid="64"/>
                                         </p:tgtEl>
                                         <p:attrNameLst>
                                           <p:attrName>style.visibility</p:attrName>
@@ -33611,9 +34032,9 @@
                                     </p:set>
                                     <p:animEffect transition="in" filter="wipe(left)">
                                       <p:cBhvr>
-                                        <p:cTn id="64" dur="400"/>
-                                        <p:tgtEl>
-                                          <p:spTgt spid="59"/>
+                                        <p:cTn id="69" dur="400"/>
+                                        <p:tgtEl>
+                                          <p:spTgt spid="64"/>
                                         </p:tgtEl>
                                       </p:cBhvr>
                                     </p:animEffect>
@@ -33621,20 +34042,20 @@
                                 </p:cTn>
                               </p:par>
                               <p:par>
-                                <p:cTn id="65" presetID="22" presetClass="entr" presetSubtype="8" fill="hold" grpId="0" nodeType="withEffect">
+                                <p:cTn id="70" presetID="22" presetClass="entr" presetSubtype="8" fill="hold" grpId="0" nodeType="withEffect">
                                   <p:stCondLst>
                                     <p:cond delay="1160"/>
                                   </p:stCondLst>
                                   <p:childTnLst>
                                     <p:set>
                                       <p:cBhvr>
-                                        <p:cTn id="66" dur="1" fill="hold">
+                                        <p:cTn id="71" dur="1" fill="hold">
                                           <p:stCondLst>
                                             <p:cond delay="0"/>
                                           </p:stCondLst>
                                         </p:cTn>
                                         <p:tgtEl>
-                                          <p:spTgt spid="62"/>
+                                          <p:spTgt spid="67"/>
                                         </p:tgtEl>
                                         <p:attrNameLst>
                                           <p:attrName>style.visibility</p:attrName>
@@ -33646,9 +34067,9 @@
                                     </p:set>
                                     <p:animEffect transition="in" filter="wipe(left)">
                                       <p:cBhvr>
-                                        <p:cTn id="67" dur="400"/>
-                                        <p:tgtEl>
-                                          <p:spTgt spid="62"/>
+                                        <p:cTn id="72" dur="400"/>
+                                        <p:tgtEl>
+                                          <p:spTgt spid="67"/>
                                         </p:tgtEl>
                                       </p:cBhvr>
                                     </p:animEffect>
@@ -33656,20 +34077,20 @@
                                 </p:cTn>
                               </p:par>
                               <p:par>
-                                <p:cTn id="68" presetID="22" presetClass="entr" presetSubtype="8" fill="hold" grpId="0" nodeType="withEffect">
+                                <p:cTn id="73" presetID="22" presetClass="entr" presetSubtype="8" fill="hold" grpId="0" nodeType="withEffect">
                                   <p:stCondLst>
                                     <p:cond delay="1280"/>
                                   </p:stCondLst>
                                   <p:childTnLst>
                                     <p:set>
                                       <p:cBhvr>
-                                        <p:cTn id="69" dur="1" fill="hold">
+                                        <p:cTn id="74" dur="1" fill="hold">
                                           <p:stCondLst>
                                             <p:cond delay="0"/>
                                           </p:stCondLst>
                                         </p:cTn>
                                         <p:tgtEl>
-                                          <p:spTgt spid="65"/>
+                                          <p:spTgt spid="70"/>
                                         </p:tgtEl>
                                         <p:attrNameLst>
                                           <p:attrName>style.visibility</p:attrName>
@@ -33681,9 +34102,9 @@
                                     </p:set>
                                     <p:animEffect transition="in" filter="wipe(left)">
                                       <p:cBhvr>
-                                        <p:cTn id="70" dur="400"/>
-                                        <p:tgtEl>
-                                          <p:spTgt spid="65"/>
+                                        <p:cTn id="75" dur="400"/>
+                                        <p:tgtEl>
+                                          <p:spTgt spid="70"/>
                                         </p:tgtEl>
                                       </p:cBhvr>
                                     </p:animEffect>
@@ -33691,20 +34112,20 @@
                                 </p:cTn>
                               </p:par>
                               <p:par>
-                                <p:cTn id="71" presetID="10" presetClass="entr" presetSubtype="0" fill="hold" grpId="0" nodeType="withEffect">
+                                <p:cTn id="76" presetID="10" presetClass="entr" presetSubtype="0" fill="hold" grpId="0" nodeType="withEffect">
                                   <p:stCondLst>
                                     <p:cond delay="1450"/>
                                   </p:stCondLst>
                                   <p:childTnLst>
                                     <p:set>
                                       <p:cBhvr>
-                                        <p:cTn id="72" dur="1" fill="hold">
+                                        <p:cTn id="77" dur="1" fill="hold">
                                           <p:stCondLst>
                                             <p:cond delay="0"/>
                                           </p:stCondLst>
                                         </p:cTn>
                                         <p:tgtEl>
-                                          <p:spTgt spid="68"/>
+                                          <p:spTgt spid="73"/>
                                         </p:tgtEl>
                                         <p:attrNameLst>
                                           <p:attrName>style.visibility</p:attrName>
@@ -33716,9 +34137,9 @@
                                     </p:set>
                                     <p:animEffect transition="in" filter="fade">
                                       <p:cBhvr>
-                                        <p:cTn id="73" dur="400"/>
-                                        <p:tgtEl>
-                                          <p:spTgt spid="68"/>
+                                        <p:cTn id="78" dur="400"/>
+                                        <p:tgtEl>
+                                          <p:spTgt spid="73"/>
                                         </p:tgtEl>
                                       </p:cBhvr>
                                     </p:animEffect>
@@ -33726,90 +34147,9 @@
                                 </p:cTn>
                               </p:par>
                               <p:par>
-                                <p:cTn id="74" presetID="42" presetClass="entr" presetSubtype="0" fill="hold" grpId="0" nodeType="withEffect">
+                                <p:cTn id="79" presetID="42" presetClass="entr" presetSubtype="0" fill="hold" grpId="0" nodeType="withEffect">
                                   <p:stCondLst>
                                     <p:cond delay="900"/>
-                                  </p:stCondLst>
-                                  <p:childTnLst>
-                                    <p:set>
-                                      <p:cBhvr>
-                                        <p:cTn id="75" dur="1" fill="hold">
-                                          <p:stCondLst>
-                                            <p:cond delay="0"/>
-                                          </p:stCondLst>
-                                        </p:cTn>
-                                        <p:tgtEl>
-                                          <p:spTgt spid="71"/>
-                                        </p:tgtEl>
-                                        <p:attrNameLst>
-                                          <p:attrName>style.visibility</p:attrName>
-                                        </p:attrNameLst>
-                                      </p:cBhvr>
-                                      <p:to>
-                                        <p:strVal val="visible"/>
-                                      </p:to>
-                                    </p:set>
-                                    <p:animEffect transition="in" filter="fade">
-                                      <p:cBhvr>
-                                        <p:cTn id="76" dur="550"/>
-                                        <p:tgtEl>
-                                          <p:spTgt spid="71"/>
-                                        </p:tgtEl>
-                                      </p:cBhvr>
-                                    </p:animEffect>
-                                    <p:anim calcmode="lin" valueType="num">
-                                      <p:cBhvr additive="base">
-                                        <p:cTn id="77" dur="550" fill="hold" decel="100000"/>
-                                        <p:tgtEl>
-                                          <p:spTgt spid="71"/>
-                                        </p:tgtEl>
-                                        <p:attrNameLst>
-                                          <p:attrName>ppt_x</p:attrName>
-                                        </p:attrNameLst>
-                                      </p:cBhvr>
-                                      <p:tavLst>
-                                        <p:tav tm="0">
-                                          <p:val>
-                                            <p:strVal val="#ppt_x"/>
-                                          </p:val>
-                                        </p:tav>
-                                        <p:tav tm="100000">
-                                          <p:val>
-                                            <p:strVal val="#ppt_x"/>
-                                          </p:val>
-                                        </p:tav>
-                                      </p:tavLst>
-                                    </p:anim>
-                                    <p:anim calcmode="lin" valueType="num">
-                                      <p:cBhvr additive="base">
-                                        <p:cTn id="78" dur="550" fill="hold" decel="100000"/>
-                                        <p:tgtEl>
-                                          <p:spTgt spid="71"/>
-                                        </p:tgtEl>
-                                        <p:attrNameLst>
-                                          <p:attrName>ppt_y</p:attrName>
-                                        </p:attrNameLst>
-                                      </p:cBhvr>
-                                      <p:tavLst>
-                                        <p:tav tm="0">
-                                          <p:val>
-                                            <p:strVal val="#ppt_y+0.025"/>
-                                          </p:val>
-                                        </p:tav>
-                                        <p:tav tm="100000">
-                                          <p:val>
-                                            <p:strVal val="#ppt_y"/>
-                                          </p:val>
-                                        </p:tav>
-                                      </p:tavLst>
-                                    </p:anim>
-                                  </p:childTnLst>
-                                </p:cTn>
-                              </p:par>
-                              <p:par>
-                                <p:cTn id="79" presetID="10" presetClass="entr" presetSubtype="0" fill="hold" grpId="0" nodeType="withEffect">
-                                  <p:stCondLst>
-                                    <p:cond delay="1350"/>
                                   </p:stCondLst>
                                   <p:childTnLst>
                                     <p:set>
@@ -33820,7 +34160,7 @@
                                           </p:stCondLst>
                                         </p:cTn>
                                         <p:tgtEl>
-                                          <p:spTgt spid="94"/>
+                                          <p:spTgt spid="76"/>
                                         </p:tgtEl>
                                         <p:attrNameLst>
                                           <p:attrName>style.visibility</p:attrName>
@@ -33832,30 +34172,76 @@
                                     </p:set>
                                     <p:animEffect transition="in" filter="fade">
                                       <p:cBhvr>
-                                        <p:cTn id="81" dur="400"/>
-                                        <p:tgtEl>
-                                          <p:spTgt spid="94"/>
+                                        <p:cTn id="81" dur="550"/>
+                                        <p:tgtEl>
+                                          <p:spTgt spid="76"/>
                                         </p:tgtEl>
                                       </p:cBhvr>
                                     </p:animEffect>
+                                    <p:anim calcmode="lin" valueType="num">
+                                      <p:cBhvr additive="base">
+                                        <p:cTn id="82" dur="550" fill="hold" decel="100000"/>
+                                        <p:tgtEl>
+                                          <p:spTgt spid="76"/>
+                                        </p:tgtEl>
+                                        <p:attrNameLst>
+                                          <p:attrName>ppt_x</p:attrName>
+                                        </p:attrNameLst>
+                                      </p:cBhvr>
+                                      <p:tavLst>
+                                        <p:tav tm="0">
+                                          <p:val>
+                                            <p:strVal val="#ppt_x"/>
+                                          </p:val>
+                                        </p:tav>
+                                        <p:tav tm="100000">
+                                          <p:val>
+                                            <p:strVal val="#ppt_x"/>
+                                          </p:val>
+                                        </p:tav>
+                                      </p:tavLst>
+                                    </p:anim>
+                                    <p:anim calcmode="lin" valueType="num">
+                                      <p:cBhvr additive="base">
+                                        <p:cTn id="83" dur="550" fill="hold" decel="100000"/>
+                                        <p:tgtEl>
+                                          <p:spTgt spid="76"/>
+                                        </p:tgtEl>
+                                        <p:attrNameLst>
+                                          <p:attrName>ppt_y</p:attrName>
+                                        </p:attrNameLst>
+                                      </p:cBhvr>
+                                      <p:tavLst>
+                                        <p:tav tm="0">
+                                          <p:val>
+                                            <p:strVal val="#ppt_y+0.025"/>
+                                          </p:val>
+                                        </p:tav>
+                                        <p:tav tm="100000">
+                                          <p:val>
+                                            <p:strVal val="#ppt_y"/>
+                                          </p:val>
+                                        </p:tav>
+                                      </p:tavLst>
+                                    </p:anim>
                                   </p:childTnLst>
                                 </p:cTn>
                               </p:par>
                               <p:par>
-                                <p:cTn id="82" presetID="42" presetClass="entr" presetSubtype="0" fill="hold" grpId="0" nodeType="withEffect">
+                                <p:cTn id="84" presetID="10" presetClass="entr" presetSubtype="0" fill="hold" grpId="0" nodeType="withEffect">
                                   <p:stCondLst>
-                                    <p:cond delay="1100"/>
+                                    <p:cond delay="1350"/>
                                   </p:stCondLst>
                                   <p:childTnLst>
                                     <p:set>
                                       <p:cBhvr>
-                                        <p:cTn id="83" dur="1" fill="hold">
+                                        <p:cTn id="85" dur="1" fill="hold">
                                           <p:stCondLst>
                                             <p:cond delay="0"/>
                                           </p:stCondLst>
                                         </p:cTn>
                                         <p:tgtEl>
-                                          <p:spTgt spid="95"/>
+                                          <p:spTgt spid="99"/>
                                         </p:tgtEl>
                                         <p:attrNameLst>
                                           <p:attrName>style.visibility</p:attrName>
@@ -33867,65 +34253,19 @@
                                     </p:set>
                                     <p:animEffect transition="in" filter="fade">
                                       <p:cBhvr>
-                                        <p:cTn id="84" dur="400"/>
-                                        <p:tgtEl>
-                                          <p:spTgt spid="95"/>
+                                        <p:cTn id="86" dur="400"/>
+                                        <p:tgtEl>
+                                          <p:spTgt spid="99"/>
                                         </p:tgtEl>
                                       </p:cBhvr>
                                     </p:animEffect>
-                                    <p:anim calcmode="lin" valueType="num">
-                                      <p:cBhvr additive="base">
-                                        <p:cTn id="85" dur="400" fill="hold" decel="100000"/>
-                                        <p:tgtEl>
-                                          <p:spTgt spid="95"/>
-                                        </p:tgtEl>
-                                        <p:attrNameLst>
-                                          <p:attrName>ppt_x</p:attrName>
-                                        </p:attrNameLst>
-                                      </p:cBhvr>
-                                      <p:tavLst>
-                                        <p:tav tm="0">
-                                          <p:val>
-                                            <p:strVal val="#ppt_x"/>
-                                          </p:val>
-                                        </p:tav>
-                                        <p:tav tm="100000">
-                                          <p:val>
-                                            <p:strVal val="#ppt_x"/>
-                                          </p:val>
-                                        </p:tav>
-                                      </p:tavLst>
-                                    </p:anim>
-                                    <p:anim calcmode="lin" valueType="num">
-                                      <p:cBhvr additive="base">
-                                        <p:cTn id="86" dur="400" fill="hold" decel="100000"/>
-                                        <p:tgtEl>
-                                          <p:spTgt spid="95"/>
-                                        </p:tgtEl>
-                                        <p:attrNameLst>
-                                          <p:attrName>ppt_y</p:attrName>
-                                        </p:attrNameLst>
-                                      </p:cBhvr>
-                                      <p:tavLst>
-                                        <p:tav tm="0">
-                                          <p:val>
-                                            <p:strVal val="#ppt_y+0.025"/>
-                                          </p:val>
-                                        </p:tav>
-                                        <p:tav tm="100000">
-                                          <p:val>
-                                            <p:strVal val="#ppt_y"/>
-                                          </p:val>
-                                        </p:tav>
-                                      </p:tavLst>
-                                    </p:anim>
                                   </p:childTnLst>
                                 </p:cTn>
                               </p:par>
                               <p:par>
                                 <p:cTn id="87" presetID="42" presetClass="entr" presetSubtype="0" fill="hold" grpId="0" nodeType="withEffect">
                                   <p:stCondLst>
-                                    <p:cond delay="1230"/>
+                                    <p:cond delay="1100"/>
                                   </p:stCondLst>
                                   <p:childTnLst>
                                     <p:set>
@@ -33982,6 +34322,87 @@
                                         <p:cTn id="91" dur="400" fill="hold" decel="100000"/>
                                         <p:tgtEl>
                                           <p:spTgt spid="100"/>
+                                        </p:tgtEl>
+                                        <p:attrNameLst>
+                                          <p:attrName>ppt_y</p:attrName>
+                                        </p:attrNameLst>
+                                      </p:cBhvr>
+                                      <p:tavLst>
+                                        <p:tav tm="0">
+                                          <p:val>
+                                            <p:strVal val="#ppt_y+0.025"/>
+                                          </p:val>
+                                        </p:tav>
+                                        <p:tav tm="100000">
+                                          <p:val>
+                                            <p:strVal val="#ppt_y"/>
+                                          </p:val>
+                                        </p:tav>
+                                      </p:tavLst>
+                                    </p:anim>
+                                  </p:childTnLst>
+                                </p:cTn>
+                              </p:par>
+                              <p:par>
+                                <p:cTn id="92" presetID="42" presetClass="entr" presetSubtype="0" fill="hold" grpId="0" nodeType="withEffect">
+                                  <p:stCondLst>
+                                    <p:cond delay="1230"/>
+                                  </p:stCondLst>
+                                  <p:childTnLst>
+                                    <p:set>
+                                      <p:cBhvr>
+                                        <p:cTn id="93" dur="1" fill="hold">
+                                          <p:stCondLst>
+                                            <p:cond delay="0"/>
+                                          </p:stCondLst>
+                                        </p:cTn>
+                                        <p:tgtEl>
+                                          <p:spTgt spid="105"/>
+                                        </p:tgtEl>
+                                        <p:attrNameLst>
+                                          <p:attrName>style.visibility</p:attrName>
+                                        </p:attrNameLst>
+                                      </p:cBhvr>
+                                      <p:to>
+                                        <p:strVal val="visible"/>
+                                      </p:to>
+                                    </p:set>
+                                    <p:animEffect transition="in" filter="fade">
+                                      <p:cBhvr>
+                                        <p:cTn id="94" dur="400"/>
+                                        <p:tgtEl>
+                                          <p:spTgt spid="105"/>
+                                        </p:tgtEl>
+                                      </p:cBhvr>
+                                    </p:animEffect>
+                                    <p:anim calcmode="lin" valueType="num">
+                                      <p:cBhvr additive="base">
+                                        <p:cTn id="95" dur="400" fill="hold" decel="100000"/>
+                                        <p:tgtEl>
+                                          <p:spTgt spid="105"/>
+                                        </p:tgtEl>
+                                        <p:attrNameLst>
+                                          <p:attrName>ppt_x</p:attrName>
+                                        </p:attrNameLst>
+                                      </p:cBhvr>
+                                      <p:tavLst>
+                                        <p:tav tm="0">
+                                          <p:val>
+                                            <p:strVal val="#ppt_x"/>
+                                          </p:val>
+                                        </p:tav>
+                                        <p:tav tm="100000">
+                                          <p:val>
+                                            <p:strVal val="#ppt_x"/>
+                                          </p:val>
+                                        </p:tav>
+                                      </p:tavLst>
+                                    </p:anim>
+                                    <p:anim calcmode="lin" valueType="num">
+                                      <p:cBhvr additive="base">
+                                        <p:cTn id="96" dur="400" fill="hold" decel="100000"/>
+                                        <p:tgtEl>
+                                          <p:spTgt spid="105"/>
                                         </p:tgtEl>
                                         <p:attrNameLst>
                                           <p:attrName>ppt_y</p:attrName>
@@ -34034,7 +34455,7 @@
       <p:bldP spid="15" grpId="0" animBg="1"/>
       <p:bldP spid="16" grpId="0" animBg="1"/>
       <p:bldP spid="17" grpId="0" animBg="1"/>
-      <p:bldP spid="94" grpId="0" animBg="1"/>
+      <p:bldP spid="99" grpId="0" animBg="1"/>
     </p:bldLst>
   </p:timing>
 </p:sld>
@@ -38538,7 +38959,7 @@
                   </a:solidFill>
                   <a:latin typeface="Inter" panose="020B0502030000000004" pitchFamily="34" charset="0"/>
                 </a:rPr>
-                <a:t>8 bot personas</a:t>
+                <a:t>9 bot personas</a:t>
               </a:r>
             </a:p>
           </p:txBody>
@@ -40373,7 +40794,7 @@
                   </a:solidFill>
                   <a:latin typeface="Georgia" panose="02040502050405020303" pitchFamily="18" charset="0"/>
                 </a:rPr>
-                <a:t>6</a:t>
+                <a:t>8</a:t>
               </a:r>
             </a:p>
           </p:txBody>
@@ -40487,7 +40908,7 @@
                   </a:solidFill>
                   <a:latin typeface="Georgia" panose="02040502050405020303" pitchFamily="18" charset="0"/>
                 </a:rPr>
-                <a:t>8</a:t>
+                <a:t>9</a:t>
               </a:r>
             </a:p>
           </p:txBody>
@@ -40601,7 +41022,7 @@
                   </a:solidFill>
                   <a:latin typeface="Georgia" panose="02040502050405020303" pitchFamily="18" charset="0"/>
                 </a:rPr>
-                <a:t>5</a:t>
+                <a:t>6</a:t>
               </a:r>
             </a:p>
           </p:txBody>
@@ -41171,7 +41592,7 @@
                   </a:solidFill>
                   <a:latin typeface="Georgia" panose="02040502050405020303" pitchFamily="18" charset="0"/>
                 </a:rPr>
-                <a:t>9,248</a:t>
+                <a:t>9,324</a:t>
               </a:r>
             </a:p>
           </p:txBody>

--- a/docs/deck/Bidwire.pptx
+++ b/docs/deck/Bidwire.pptx
@@ -511,7 +511,7 @@
           <a:lstStyle/>
           <a:p>
             <a:r>
-              <a:t>Hi, this is Bidwire: the auction house for AI agents. Here's the thing. When an agent shops, nobody sees an ad. No banner, no sponsored slot, no clever copy. So the only way a merchant can win an agent's purchase is with an offer that's actually true. Bidwire is the saleroom where that happens, live, over MCP.</a:t>
+              <a:t>Hi, this is Bidwire: the auction house for AI agents. When an agent shops, nobody sees an ad: no banner, no sponsored slot. So the only way a merchant wins an agent's purchase is with an offer that's actually true. Bidwire is the saleroom where that happens, live, over MCP.</a:t>
             </a:r>
           </a:p>
         </p:txBody>
@@ -581,7 +581,7 @@
           <a:lstStyle/>
           <a:p>
             <a:r>
-              <a:t>So that's Bidwire. When agents do the shopping, attention stops being for sale, and the truth becomes the only thing worth bidding on. You can't bribe an agent. The code is on GitHub at vnmoorthy slash bidwire. The saleroom is live right now: connect your agent and buy something, or raise a paddle from your phone and try to bribe it. Thank you.</a:t>
+              <a:t>So that's Bidwire. When agents do the shopping, attention stops being for sale and the truth is the only thing worth bidding on. You can't bribe an agent. The code is at github.com/vnmoorthy/bidwire, and the saleroom is live right now: connect your agent and buy something, or raise a paddle from your phone and try to bribe it. Thank you.</a:t>
             </a:r>
           </a:p>
         </p:txBody>
@@ -651,7 +651,7 @@
           <a:lstStyle/>
           <a:p>
             <a:r>
-              <a:t>Agents can already shop for us. But the commerce stack they land on was built to manipulate humans: sponsored slots and SEO, drip pricing where $34.99 on the page becomes $63.99 at checkout, specs nobody checks, and now prompt injection: a pitch that says 'ignore your previous instructions'. Agents read those pages and get gamed. Merchants have the opposite problem: there is no ad slot inside a tool call, so they can't reach agents at all.</a:t>
+              <a:t>Agents can already shop for us, but the web they land on was built to manipulate humans: sponsored slots and SEO, drip pricing where $34.99 becomes $63.99 at checkout, fake specs, and now prompt injection hidden in product pitches. Agents get gamed. And merchants can't reach agents at all: there's no ad slot inside a tool call.</a:t>
             </a:r>
           </a:p>
         </p:txBody>
@@ -721,7 +721,7 @@
           <a:lstStyle/>
           <a:p>
             <a:r>
-              <a:t>Our insight: for an agent, the ad IS the offer. So instead of buying attention, merchants raise a paddle with claims a machine can check: delivered price, delivery time, features. We verify every claim, rank on merit with public weights, and commission can't buy rank. The YC prompt was to rebuild a tool built for humans: Google became Exa for search. This is Google Ads, rebuilt for agents, as a live auction.</a:t>
+              <a:t>Our insight: for an agent, the ad is the offer. So merchants raise a paddle with claims a machine can check: delivered price, delivery time, features. We verify every claim, rank on merit with public weights, and commission can't buy rank. YC asked us to rebuild a tool built for humans. This is Google Ads, rebuilt for agents.</a:t>
             </a:r>
           </a:p>
         </p:txBody>
@@ -791,7 +791,7 @@
           <a:lstStyle/>
           <a:p>
             <a:r>
-              <a:t>Here's how a lot sells. The agent calls one tool, find_offers, with its need, budget and deadline. That opens a twelve-second lot: bots, people in this room and merchant agents raise paddles. We fetch each merchant's real product page and checkout, run five checks, withdraw the liars, and rank on merit. Going once, going twice, sold: buy_offer pays from a prepaid wallet, and over the limit the human gets a text and replies YES. Everything settles in a double-entry ledger.</a:t>
+              <a:t>Here's how a lot sells. The agent calls find_offers with its need, budget and deadline. For twelve seconds, bots, people in this room and merchant agents bid. We check each bid against the merchant's real page and checkout, withdraw the liars and rank on merit. Then buy_offer pays from a prepaid wallet; over the limit, the human approves by text.</a:t>
             </a:r>
           </a:p>
         </p:txBody>
@@ -861,7 +861,7 @@
           <a:lstStyle/>
           <a:p>
             <a:r>
-              <a:t>This ran live today. One lot: 7 paddles, 5 verified, 2 withdrawn: a hidden fee and a fake ANC claim. A merchant offered $35 commission and stayed at number 5. A nine-day shipper got ranked down for missing a five-day deadline, and the $319.99 hammer price was over the $300 limit, so it went to the human's phone for a YES. If a merchant sells out mid-purchase, the agent gets the next best offer and recovers on its own.</a:t>
+              <a:t>This ran live today. One lot: 7 paddles, 5 verified, 2 withdrawn: a hidden fee and a fake ANC claim. A merchant offered $35 commission and stayed at number 5. A nine-day shipper missed a five-day deadline and ranked down. The $319.99 hammer price was over the $300 limit, so it went to the human's phone for a YES. And when a merchant sells out mid-purchase, the agent recovers on its own.</a:t>
             </a:r>
           </a:p>
         </p:txBody>
@@ -931,7 +931,7 @@
           <a:lstStyle/>
           <a:p>
             <a:r>
-              <a:t>We built Bidwire as an MCP server on mcp-use from Manufact: twelve tools, three resources, two prompts. The happy path is two calls: find_offers, then buy_offer. Errors come back structured, with a hint that tells the agent what to call next. Buys take idempotency keys. The first call needs zero config: no key makes you a guest agent. And the same server works in Claude Code, Claude Desktop, ChatGPT, Codex and Cursor.</a:t>
+              <a:t>Bidwire is an MCP server built on mcp-use from Manufact: twelve tools, three resources, two prompts. The happy path is two calls, find_offers then buy_offer. Errors come back with hints, buys take idempotency keys, the first call needs zero config, and merchant pitches are treated as data, never instructions. It works in Claude Code, Claude Desktop, ChatGPT, Codex and Cursor.</a:t>
             </a:r>
           </a:p>
         </p:txBody>
@@ -1001,7 +1001,7 @@
           <a:lstStyle/>
           <a:p>
             <a:r>
-              <a:t>Trust is the product, so it's enforced in code. Every paddle gets six checks against the merchant's own page and checkout, including pitch safety: a pitch is data, never instructions, so 'ignore your previous instructions' gets the bid withdrawn. A liar loses trust for every agent. The ranking weights are public: price forty, must-haves twenty-five, delivery fifteen, trust fifteen, returns five, commission zero. Spending limits come from the human, every transaction in the settlement ledger sums to zero, and every tool call is logged.</a:t>
+              <a:t>Trust is enforced in code. Every paddle gets six checks against the merchant's own page and checkout, including pitch safety. Fail one and the bid is withdrawn, and the merchant loses trust with every agent. Ranking weights are public, and commission counts for zero. Humans set spending limits, every transaction in the ledger sums to zero, and every tool call is logged.</a:t>
             </a:r>
           </a:p>
         </p:txBody>
@@ -1071,7 +1071,7 @@
           <a:lstStyle/>
           <a:p>
             <a:r>
-              <a:t>Business model: merchants pay commission only at the hammer, when a verified sale happens. Pay-per-sale, no impressions, no clicks, and that commission is our take. The wedge is DTC merchants and agent shopping apps; the long game is the trust layer for agent commerce. Why now: eighteen months ago there was no MCP, no ACP, and no agent had a card. This year agents got wallets and protocols. Search ads are a two-hundred-billion-dollar-plus business built on human attention, and agents don't look at ads.</a:t>
+              <a:t>Merchants pay commission only at the hammer, when a verified sale happens: no impressions, no clicks, and that commission is our take. The wedge is DTC merchants and agent shopping apps; the long game is the trust layer for agent commerce. Why now: eighteen months ago agents had no MCP, no ACP, no cards. Search ads are a $200B-plus business built on attention, and agents don't look at ads.</a:t>
             </a:r>
           </a:p>
         </p:txBody>
@@ -1141,7 +1141,7 @@
           <a:lstStyle/>
           <a:p>
             <a:r>
-              <a:t>All of this was built in twenty-four hours and it's running right now: an MCP server on mcp-use and Hono, SQLite, a live saleroom over server-sent events, real storefront pages with schema.org JSON-LD that the verifier fetches over HTTP, eight merchant bots with honest and dishonest strategies, and Inkbox for approval texts and receipts. Every number on the right is counted from the code.</a:t>
+              <a:t>We built all of this in twenty-four hours and it's running right now: an MCP server on mcp-use and Hono, SQLite, a live saleroom over server-sent events, real storefront pages with schema.org data that the verifier fetches over HTTP, merchant bots with honest and dishonest strategies, and Inkbox for approval texts and receipts. Every number on the right is counted from the code.</a:t>
             </a:r>
           </a:p>
         </p:txBody>
@@ -32181,12 +32181,21 @@
             </a:p>
           </p:txBody>
         </p:sp>
-        <p:sp>
-          <p:nvSpPr>
-            <p:cNvPr id="84" name="Rounded Rectangle 83"/>
-            <p:cNvSpPr/>
-            <p:nvPr/>
-          </p:nvSpPr>
+        <p:pic>
+          <p:nvPicPr>
+            <p:cNvPr id="84" name="Picture 83" descr="ledger.png"/>
+            <p:cNvPicPr>
+              <a:picLocks noChangeAspect="1"/>
+            </p:cNvPicPr>
+            <p:nvPr/>
+          </p:nvPicPr>
+          <p:blipFill>
+            <a:blip r:embed="rId2"/>
+            <a:srcRect r="40000" b="40000"/>
+            <a:stretch>
+              <a:fillRect/>
+            </a:stretch>
+          </p:blipFill>
           <p:spPr>
             <a:xfrm>
               <a:off x="6044184" y="4114800"/>
@@ -32194,494 +32203,15 @@
             </a:xfrm>
             <a:prstGeom prst="roundRect">
               <a:avLst>
-                <a:gd name="adj" fmla="val 1441"/>
+                <a:gd name="adj" fmla="val 2402"/>
               </a:avLst>
             </a:prstGeom>
-            <a:solidFill>
-              <a:srgbClr val="FFFDF7"/>
-            </a:solidFill>
-            <a:ln>
-              <a:noFill/>
-            </a:ln>
-          </p:spPr>
-          <p:txBody>
-            <a:bodyPr rtlCol="0" anchor="ctr"/>
-            <a:lstStyle/>
-            <a:p>
-              <a:pPr algn="ctr"/>
-            </a:p>
-          </p:txBody>
-        </p:sp>
-        <p:sp>
-          <p:nvSpPr>
-            <p:cNvPr id="85" name="Rectangle 84"/>
-            <p:cNvSpPr/>
-            <p:nvPr/>
-          </p:nvSpPr>
-          <p:spPr>
-            <a:xfrm>
-              <a:off x="6044184" y="4114800"/>
-              <a:ext cx="3383280" cy="274320"/>
-            </a:xfrm>
-            <a:prstGeom prst="rect">
-              <a:avLst/>
-            </a:prstGeom>
-            <a:solidFill>
-              <a:srgbClr val="EFE8D9"/>
-            </a:solidFill>
-            <a:ln>
-              <a:noFill/>
-            </a:ln>
-          </p:spPr>
-          <p:txBody>
-            <a:bodyPr rtlCol="0" anchor="ctr"/>
-            <a:lstStyle/>
-            <a:p>
-              <a:pPr algn="ctr"/>
-            </a:p>
-          </p:txBody>
-        </p:sp>
-        <p:sp>
-          <p:nvSpPr>
-            <p:cNvPr id="86" name="TextBox 85"/>
-            <p:cNvSpPr txBox="1"/>
-            <p:nvPr/>
-          </p:nvSpPr>
-          <p:spPr>
-            <a:xfrm>
-              <a:off x="6153912" y="4142232"/>
-              <a:ext cx="3163824" cy="219456"/>
-            </a:xfrm>
-            <a:prstGeom prst="rect">
-              <a:avLst/>
-            </a:prstGeom>
-            <a:noFill/>
-          </p:spPr>
-          <p:txBody>
-            <a:bodyPr wrap="square" lIns="0" rIns="0" tIns="0" bIns="0" anchor="ctr">
-              <a:noAutofit/>
-            </a:bodyPr>
-            <a:lstStyle/>
-            <a:p>
-              <a:pPr algn="l"/>
-              <a:r>
-                <a:rPr sz="650" b="1" i="0" spc="110">
-                  <a:solidFill>
-                    <a:srgbClr val="6E6658"/>
-                  </a:solidFill>
-                  <a:latin typeface="Inter" panose="020B0502030000000004" pitchFamily="34" charset="0"/>
-                </a:rPr>
-                <a:t>SETTLEMENT LEDGER · EVERY TRANSACTION SUMS TO $0.00</a:t>
-              </a:r>
-            </a:p>
-          </p:txBody>
-        </p:sp>
-        <p:sp>
-          <p:nvSpPr>
-            <p:cNvPr id="87" name="TextBox 86"/>
-            <p:cNvSpPr txBox="1"/>
-            <p:nvPr/>
-          </p:nvSpPr>
-          <p:spPr>
-            <a:xfrm>
-              <a:off x="6181344" y="4425696"/>
-              <a:ext cx="2232965" cy="384334"/>
-            </a:xfrm>
-            <a:prstGeom prst="rect">
-              <a:avLst/>
-            </a:prstGeom>
-            <a:noFill/>
-          </p:spPr>
-          <p:txBody>
-            <a:bodyPr wrap="square" lIns="0" rIns="0" tIns="0" bIns="0" anchor="ctr">
-              <a:noAutofit/>
-            </a:bodyPr>
-            <a:lstStyle/>
-            <a:p>
-              <a:pPr algn="l"/>
-              <a:r>
-                <a:rPr sz="650" b="0" i="0">
-                  <a:solidFill>
-                    <a:srgbClr val="16130E"/>
-                  </a:solidFill>
-                  <a:latin typeface="JetBrains Mono" panose="02000009000000000000" pitchFamily="49" charset="0"/>
-                </a:rPr>
-                <a:t>buyer:b_claude:wallet</a:t>
-              </a:r>
-            </a:p>
-          </p:txBody>
-        </p:sp>
-        <p:sp>
-          <p:nvSpPr>
-            <p:cNvPr id="88" name="TextBox 87"/>
-            <p:cNvSpPr txBox="1"/>
-            <p:nvPr/>
-          </p:nvSpPr>
-          <p:spPr>
-            <a:xfrm>
-              <a:off x="8513064" y="4425696"/>
-              <a:ext cx="777240" cy="384334"/>
-            </a:xfrm>
-            <a:prstGeom prst="rect">
-              <a:avLst/>
-            </a:prstGeom>
-            <a:noFill/>
-          </p:spPr>
-          <p:txBody>
-            <a:bodyPr wrap="square" lIns="0" rIns="0" tIns="0" bIns="0" anchor="ctr">
-              <a:noAutofit/>
-            </a:bodyPr>
-            <a:lstStyle/>
-            <a:p>
-              <a:pPr algn="r"/>
-              <a:r>
-                <a:rPr sz="800" b="0" i="0">
-                  <a:solidFill>
-                    <a:srgbClr val="8E2A22"/>
-                  </a:solidFill>
-                  <a:latin typeface="Georgia" panose="02040502050405020303" pitchFamily="18" charset="0"/>
-                </a:rPr>
-                <a:t>−$319.99</a:t>
-              </a:r>
-            </a:p>
-          </p:txBody>
-        </p:sp>
-        <p:sp>
-          <p:nvSpPr>
-            <p:cNvPr id="89" name="Rectangle 88"/>
-            <p:cNvSpPr/>
-            <p:nvPr/>
-          </p:nvSpPr>
-          <p:spPr>
-            <a:xfrm>
-              <a:off x="6135624" y="4810030"/>
-              <a:ext cx="3200400" cy="5486"/>
-            </a:xfrm>
-            <a:prstGeom prst="rect">
-              <a:avLst/>
-            </a:prstGeom>
-            <a:solidFill>
-              <a:srgbClr val="E2D9C6"/>
-            </a:solidFill>
-            <a:ln>
-              <a:noFill/>
-            </a:ln>
-          </p:spPr>
-          <p:txBody>
-            <a:bodyPr rtlCol="0" anchor="ctr"/>
-            <a:lstStyle/>
-            <a:p>
-              <a:pPr algn="ctr"/>
-            </a:p>
-          </p:txBody>
-        </p:sp>
-        <p:sp>
-          <p:nvSpPr>
-            <p:cNvPr id="90" name="TextBox 89"/>
-            <p:cNvSpPr txBox="1"/>
-            <p:nvPr/>
-          </p:nvSpPr>
-          <p:spPr>
-            <a:xfrm>
-              <a:off x="6181344" y="4810030"/>
-              <a:ext cx="2232965" cy="384334"/>
-            </a:xfrm>
-            <a:prstGeom prst="rect">
-              <a:avLst/>
-            </a:prstGeom>
-            <a:noFill/>
-          </p:spPr>
-          <p:txBody>
-            <a:bodyPr wrap="square" lIns="0" rIns="0" tIns="0" bIns="0" anchor="ctr">
-              <a:noAutofit/>
-            </a:bodyPr>
-            <a:lstStyle/>
-            <a:p>
-              <a:pPr algn="l"/>
-              <a:r>
-                <a:rPr sz="650" b="0" i="0">
-                  <a:solidFill>
-                    <a:srgbClr val="16130E"/>
-                  </a:solidFill>
-                  <a:latin typeface="JetBrains Mono" panose="02000009000000000000" pitchFamily="49" charset="0"/>
-                </a:rPr>
-                <a:t>merchant:revenue</a:t>
-              </a:r>
-            </a:p>
-          </p:txBody>
-        </p:sp>
-        <p:sp>
-          <p:nvSpPr>
-            <p:cNvPr id="91" name="TextBox 90"/>
-            <p:cNvSpPr txBox="1"/>
-            <p:nvPr/>
-          </p:nvSpPr>
-          <p:spPr>
-            <a:xfrm>
-              <a:off x="8513064" y="4810030"/>
-              <a:ext cx="777240" cy="384334"/>
-            </a:xfrm>
-            <a:prstGeom prst="rect">
-              <a:avLst/>
-            </a:prstGeom>
-            <a:noFill/>
-          </p:spPr>
-          <p:txBody>
-            <a:bodyPr wrap="square" lIns="0" rIns="0" tIns="0" bIns="0" anchor="ctr">
-              <a:noAutofit/>
-            </a:bodyPr>
-            <a:lstStyle/>
-            <a:p>
-              <a:pPr algn="r"/>
-              <a:r>
-                <a:rPr sz="800" b="0" i="0">
-                  <a:solidFill>
-                    <a:srgbClr val="2D6A48"/>
-                  </a:solidFill>
-                  <a:latin typeface="Georgia" panose="02040502050405020303" pitchFamily="18" charset="0"/>
-                </a:rPr>
-                <a:t>+$319.99</a:t>
-              </a:r>
-            </a:p>
-          </p:txBody>
-        </p:sp>
-        <p:sp>
-          <p:nvSpPr>
-            <p:cNvPr id="92" name="Rectangle 91"/>
-            <p:cNvSpPr/>
-            <p:nvPr/>
-          </p:nvSpPr>
-          <p:spPr>
-            <a:xfrm>
-              <a:off x="6135624" y="5194364"/>
-              <a:ext cx="3200400" cy="5486"/>
-            </a:xfrm>
-            <a:prstGeom prst="rect">
-              <a:avLst/>
-            </a:prstGeom>
-            <a:solidFill>
-              <a:srgbClr val="E2D9C6"/>
-            </a:solidFill>
-            <a:ln>
-              <a:noFill/>
-            </a:ln>
-          </p:spPr>
-          <p:txBody>
-            <a:bodyPr rtlCol="0" anchor="ctr"/>
-            <a:lstStyle/>
-            <a:p>
-              <a:pPr algn="ctr"/>
-            </a:p>
-          </p:txBody>
-        </p:sp>
-        <p:sp>
-          <p:nvSpPr>
-            <p:cNvPr id="93" name="TextBox 92"/>
-            <p:cNvSpPr txBox="1"/>
-            <p:nvPr/>
-          </p:nvSpPr>
-          <p:spPr>
-            <a:xfrm>
-              <a:off x="6181344" y="5194364"/>
-              <a:ext cx="2232965" cy="384334"/>
-            </a:xfrm>
-            <a:prstGeom prst="rect">
-              <a:avLst/>
-            </a:prstGeom>
-            <a:noFill/>
-          </p:spPr>
-          <p:txBody>
-            <a:bodyPr wrap="square" lIns="0" rIns="0" tIns="0" bIns="0" anchor="ctr">
-              <a:noAutofit/>
-            </a:bodyPr>
-            <a:lstStyle/>
-            <a:p>
-              <a:pPr algn="l"/>
-              <a:r>
-                <a:rPr sz="650" b="0" i="0">
-                  <a:solidFill>
-                    <a:srgbClr val="16130E"/>
-                  </a:solidFill>
-                  <a:latin typeface="JetBrains Mono" panose="02000009000000000000" pitchFamily="49" charset="0"/>
-                </a:rPr>
-                <a:t>merchant:revenue</a:t>
-              </a:r>
-            </a:p>
-          </p:txBody>
-        </p:sp>
-        <p:sp>
-          <p:nvSpPr>
-            <p:cNvPr id="94" name="TextBox 93"/>
-            <p:cNvSpPr txBox="1"/>
-            <p:nvPr/>
-          </p:nvSpPr>
-          <p:spPr>
-            <a:xfrm>
-              <a:off x="8513064" y="5194364"/>
-              <a:ext cx="777240" cy="384334"/>
-            </a:xfrm>
-            <a:prstGeom prst="rect">
-              <a:avLst/>
-            </a:prstGeom>
-            <a:noFill/>
-          </p:spPr>
-          <p:txBody>
-            <a:bodyPr wrap="square" lIns="0" rIns="0" tIns="0" bIns="0" anchor="ctr">
-              <a:noAutofit/>
-            </a:bodyPr>
-            <a:lstStyle/>
-            <a:p>
-              <a:pPr algn="r"/>
-              <a:r>
-                <a:rPr sz="800" b="0" i="0">
-                  <a:solidFill>
-                    <a:srgbClr val="8E2A22"/>
-                  </a:solidFill>
-                  <a:latin typeface="Georgia" panose="02040502050405020303" pitchFamily="18" charset="0"/>
-                </a:rPr>
-                <a:t>−$5.00</a:t>
-              </a:r>
-            </a:p>
-          </p:txBody>
-        </p:sp>
-        <p:sp>
-          <p:nvSpPr>
-            <p:cNvPr id="95" name="Rectangle 94"/>
-            <p:cNvSpPr/>
-            <p:nvPr/>
-          </p:nvSpPr>
-          <p:spPr>
-            <a:xfrm>
-              <a:off x="6135624" y="5578697"/>
-              <a:ext cx="3200400" cy="5486"/>
-            </a:xfrm>
-            <a:prstGeom prst="rect">
-              <a:avLst/>
-            </a:prstGeom>
-            <a:solidFill>
-              <a:srgbClr val="E2D9C6"/>
-            </a:solidFill>
-            <a:ln>
-              <a:noFill/>
-            </a:ln>
-          </p:spPr>
-          <p:txBody>
-            <a:bodyPr rtlCol="0" anchor="ctr"/>
-            <a:lstStyle/>
-            <a:p>
-              <a:pPr algn="ctr"/>
-            </a:p>
-          </p:txBody>
-        </p:sp>
-        <p:sp>
-          <p:nvSpPr>
-            <p:cNvPr id="96" name="TextBox 95"/>
-            <p:cNvSpPr txBox="1"/>
-            <p:nvPr/>
-          </p:nvSpPr>
-          <p:spPr>
-            <a:xfrm>
-              <a:off x="6181344" y="5578697"/>
-              <a:ext cx="2232965" cy="384334"/>
-            </a:xfrm>
-            <a:prstGeom prst="rect">
-              <a:avLst/>
-            </a:prstGeom>
-            <a:noFill/>
-          </p:spPr>
-          <p:txBody>
-            <a:bodyPr wrap="square" lIns="0" rIns="0" tIns="0" bIns="0" anchor="ctr">
-              <a:noAutofit/>
-            </a:bodyPr>
-            <a:lstStyle/>
-            <a:p>
-              <a:pPr algn="l"/>
-              <a:r>
-                <a:rPr sz="650" b="0" i="0">
-                  <a:solidFill>
-                    <a:srgbClr val="16130E"/>
-                  </a:solidFill>
-                  <a:latin typeface="JetBrains Mono" panose="02000009000000000000" pitchFamily="49" charset="0"/>
-                </a:rPr>
-                <a:t>platform:fees</a:t>
-              </a:r>
-            </a:p>
-          </p:txBody>
-        </p:sp>
-        <p:sp>
-          <p:nvSpPr>
-            <p:cNvPr id="97" name="TextBox 96"/>
-            <p:cNvSpPr txBox="1"/>
-            <p:nvPr/>
-          </p:nvSpPr>
-          <p:spPr>
-            <a:xfrm>
-              <a:off x="8513064" y="5578697"/>
-              <a:ext cx="777240" cy="384334"/>
-            </a:xfrm>
-            <a:prstGeom prst="rect">
-              <a:avLst/>
-            </a:prstGeom>
-            <a:noFill/>
-          </p:spPr>
-          <p:txBody>
-            <a:bodyPr wrap="square" lIns="0" rIns="0" tIns="0" bIns="0" anchor="ctr">
-              <a:noAutofit/>
-            </a:bodyPr>
-            <a:lstStyle/>
-            <a:p>
-              <a:pPr algn="r"/>
-              <a:r>
-                <a:rPr sz="800" b="0" i="0">
-                  <a:solidFill>
-                    <a:srgbClr val="2D6A48"/>
-                  </a:solidFill>
-                  <a:latin typeface="Georgia" panose="02040502050405020303" pitchFamily="18" charset="0"/>
-                </a:rPr>
-                <a:t>+$5.00</a:t>
-              </a:r>
-            </a:p>
-          </p:txBody>
-        </p:sp>
-        <p:sp>
-          <p:nvSpPr>
-            <p:cNvPr id="98" name="TextBox 97"/>
-            <p:cNvSpPr txBox="1"/>
-            <p:nvPr/>
-          </p:nvSpPr>
-          <p:spPr>
-            <a:xfrm>
-              <a:off x="6126480" y="5798439"/>
-              <a:ext cx="3218688" cy="182880"/>
-            </a:xfrm>
-            <a:prstGeom prst="rect">
-              <a:avLst/>
-            </a:prstGeom>
-            <a:noFill/>
-          </p:spPr>
-          <p:txBody>
-            <a:bodyPr wrap="square" lIns="0" rIns="0" tIns="0" bIns="0" anchor="ctr">
-              <a:noAutofit/>
-            </a:bodyPr>
-            <a:lstStyle/>
-            <a:p>
-              <a:pPr algn="r"/>
-              <a:r>
-                <a:rPr sz="700" b="0" i="0">
-                  <a:solidFill>
-                    <a:srgbClr val="9C937F"/>
-                  </a:solidFill>
-                  <a:latin typeface="JetBrains Mono" panose="02000009000000000000" pitchFamily="49" charset="0"/>
-                </a:rPr>
-                <a:t>Placeholder: screenshots/ledger.png</a:t>
-              </a:r>
-            </a:p>
-          </p:txBody>
-        </p:sp>
+          </p:spPr>
+        </p:pic>
       </p:grpSp>
       <p:sp>
         <p:nvSpPr>
-          <p:cNvPr id="99" name="TextBox 98"/>
+          <p:cNvPr id="85" name="TextBox 84"/>
           <p:cNvSpPr txBox="1"/>
           <p:nvPr/>
         </p:nvSpPr>
@@ -32725,7 +32255,7 @@
       </p:sp>
       <p:grpSp>
         <p:nvGrpSpPr>
-          <p:cNvPr id="100" name="Group 99"/>
+          <p:cNvPr id="86" name="Group 85"/>
           <p:cNvGrpSpPr/>
           <p:nvPr/>
         </p:nvGrpSpPr>
@@ -32739,7 +32269,7 @@
         </p:grpSpPr>
         <p:sp>
           <p:nvSpPr>
-            <p:cNvPr id="101" name="Rounded Rectangle 100"/>
+            <p:cNvPr id="87" name="Rounded Rectangle 86"/>
             <p:cNvSpPr/>
             <p:nvPr/>
           </p:nvSpPr>
@@ -32772,7 +32302,7 @@
         </p:sp>
         <p:sp>
           <p:nvSpPr>
-            <p:cNvPr id="102" name="Rectangle 101"/>
+            <p:cNvPr id="88" name="Rectangle 87"/>
             <p:cNvSpPr/>
             <p:nvPr/>
           </p:nvSpPr>
@@ -32801,7 +32331,7 @@
         </p:sp>
         <p:sp>
           <p:nvSpPr>
-            <p:cNvPr id="103" name="TextBox 102"/>
+            <p:cNvPr id="89" name="TextBox 88"/>
             <p:cNvSpPr txBox="1"/>
             <p:nvPr/>
           </p:nvSpPr>
@@ -32836,7 +32366,7 @@
         </p:sp>
         <p:sp>
           <p:nvSpPr>
-            <p:cNvPr id="104" name="TextBox 103"/>
+            <p:cNvPr id="90" name="TextBox 89"/>
             <p:cNvSpPr txBox="1"/>
             <p:nvPr/>
           </p:nvSpPr>
@@ -32876,7 +32406,7 @@
       </p:grpSp>
       <p:grpSp>
         <p:nvGrpSpPr>
-          <p:cNvPr id="105" name="Group 104"/>
+          <p:cNvPr id="91" name="Group 90"/>
           <p:cNvGrpSpPr/>
           <p:nvPr/>
         </p:nvGrpSpPr>
@@ -32890,7 +32420,7 @@
         </p:grpSpPr>
         <p:sp>
           <p:nvSpPr>
-            <p:cNvPr id="106" name="Rounded Rectangle 105"/>
+            <p:cNvPr id="92" name="Rounded Rectangle 91"/>
             <p:cNvSpPr/>
             <p:nvPr/>
           </p:nvSpPr>
@@ -32923,7 +32453,7 @@
         </p:sp>
         <p:sp>
           <p:nvSpPr>
-            <p:cNvPr id="107" name="Rectangle 106"/>
+            <p:cNvPr id="93" name="Rectangle 92"/>
             <p:cNvSpPr/>
             <p:nvPr/>
           </p:nvSpPr>
@@ -32952,7 +32482,7 @@
         </p:sp>
         <p:sp>
           <p:nvSpPr>
-            <p:cNvPr id="108" name="TextBox 107"/>
+            <p:cNvPr id="94" name="TextBox 93"/>
             <p:cNvSpPr txBox="1"/>
             <p:nvPr/>
           </p:nvSpPr>
@@ -32987,7 +32517,7 @@
         </p:sp>
         <p:sp>
           <p:nvSpPr>
-            <p:cNvPr id="109" name="TextBox 108"/>
+            <p:cNvPr id="95" name="TextBox 94"/>
             <p:cNvSpPr txBox="1"/>
             <p:nvPr/>
           </p:nvSpPr>
@@ -34241,7 +33771,7 @@
                                           </p:stCondLst>
                                         </p:cTn>
                                         <p:tgtEl>
-                                          <p:spTgt spid="99"/>
+                                          <p:spTgt spid="85"/>
                                         </p:tgtEl>
                                         <p:attrNameLst>
                                           <p:attrName>style.visibility</p:attrName>
@@ -34255,7 +33785,7 @@
                                       <p:cBhvr>
                                         <p:cTn id="86" dur="400"/>
                                         <p:tgtEl>
-                                          <p:spTgt spid="99"/>
+                                          <p:spTgt spid="85"/>
                                         </p:tgtEl>
                                       </p:cBhvr>
                                     </p:animEffect>
@@ -34276,7 +33806,7 @@
                                           </p:stCondLst>
                                         </p:cTn>
                                         <p:tgtEl>
-                                          <p:spTgt spid="100"/>
+                                          <p:spTgt spid="86"/>
                                         </p:tgtEl>
                                         <p:attrNameLst>
                                           <p:attrName>style.visibility</p:attrName>
@@ -34290,7 +33820,7 @@
                                       <p:cBhvr>
                                         <p:cTn id="89" dur="400"/>
                                         <p:tgtEl>
-                                          <p:spTgt spid="100"/>
+                                          <p:spTgt spid="86"/>
                                         </p:tgtEl>
                                       </p:cBhvr>
                                     </p:animEffect>
@@ -34298,7 +33828,7 @@
                                       <p:cBhvr additive="base">
                                         <p:cTn id="90" dur="400" fill="hold" decel="100000"/>
                                         <p:tgtEl>
-                                          <p:spTgt spid="100"/>
+                                          <p:spTgt spid="86"/>
                                         </p:tgtEl>
                                         <p:attrNameLst>
                                           <p:attrName>ppt_x</p:attrName>
@@ -34321,7 +33851,7 @@
                                       <p:cBhvr additive="base">
                                         <p:cTn id="91" dur="400" fill="hold" decel="100000"/>
                                         <p:tgtEl>
-                                          <p:spTgt spid="100"/>
+                                          <p:spTgt spid="86"/>
                                         </p:tgtEl>
                                         <p:attrNameLst>
                                           <p:attrName>ppt_y</p:attrName>
@@ -34357,7 +33887,7 @@
                                           </p:stCondLst>
                                         </p:cTn>
                                         <p:tgtEl>
-                                          <p:spTgt spid="105"/>
+                                          <p:spTgt spid="91"/>
                                         </p:tgtEl>
                                         <p:attrNameLst>
                                           <p:attrName>style.visibility</p:attrName>
@@ -34371,7 +33901,7 @@
                                       <p:cBhvr>
                                         <p:cTn id="94" dur="400"/>
                                         <p:tgtEl>
-                                          <p:spTgt spid="105"/>
+                                          <p:spTgt spid="91"/>
                                         </p:tgtEl>
                                       </p:cBhvr>
                                     </p:animEffect>
@@ -34379,7 +33909,7 @@
                                       <p:cBhvr additive="base">
                                         <p:cTn id="95" dur="400" fill="hold" decel="100000"/>
                                         <p:tgtEl>
-                                          <p:spTgt spid="105"/>
+                                          <p:spTgt spid="91"/>
                                         </p:tgtEl>
                                         <p:attrNameLst>
                                           <p:attrName>ppt_x</p:attrName>
@@ -34402,7 +33932,7 @@
                                       <p:cBhvr additive="base">
                                         <p:cTn id="96" dur="400" fill="hold" decel="100000"/>
                                         <p:tgtEl>
-                                          <p:spTgt spid="105"/>
+                                          <p:spTgt spid="91"/>
                                         </p:tgtEl>
                                         <p:attrNameLst>
                                           <p:attrName>ppt_y</p:attrName>
@@ -34455,7 +33985,7 @@
       <p:bldP spid="15" grpId="0" animBg="1"/>
       <p:bldP spid="16" grpId="0" animBg="1"/>
       <p:bldP spid="17" grpId="0" animBg="1"/>
-      <p:bldP spid="99" grpId="0" animBg="1"/>
+      <p:bldP spid="85" grpId="0" animBg="1"/>
     </p:bldLst>
   </p:timing>
 </p:sld>
@@ -41592,7 +41122,7 @@
                   </a:solidFill>
                   <a:latin typeface="Georgia" panose="02040502050405020303" pitchFamily="18" charset="0"/>
                 </a:rPr>
-                <a:t>9,324</a:t>
+                <a:t>9,415</a:t>
               </a:r>
             </a:p>
           </p:txBody>

--- a/docs/deck/Bidwire.pptx
+++ b/docs/deck/Bidwire.pptx
@@ -861,7 +861,7 @@
           <a:lstStyle/>
           <a:p>
             <a:r>
-              <a:t>This ran live today. One lot: 7 paddles, 5 verified, 2 withdrawn: a hidden fee and a fake ANC claim. A merchant offered $35 commission and stayed at number 5. A nine-day shipper missed a five-day deadline and ranked down. The $319.99 hammer price was over the $300 limit, so it went to the human's phone for a YES. And when a merchant sells out mid-purchase, the agent recovers on its own.</a:t>
+              <a:t>This ran live today. One lot: 8 paddles, 5 verified, 3 withdrawn: a prompt injection, a hidden checkout fee and a fake ANC claim. A merchant offered $35 commission and stayed at number 5. A nine-day shipper missed a five-day deadline and ranked down. The $368.99 hammer price was over the $300 limit, so it went to the human's phone for a YES. And when a merchant sells out mid-purchase, the agent recovers on its own.</a:t>
             </a:r>
           </a:p>
         </p:txBody>
@@ -5295,12 +5295,21 @@
             </a:p>
           </p:txBody>
         </p:sp>
-        <p:sp>
-          <p:nvSpPr>
-            <p:cNvPr id="37" name="Rounded Rectangle 36"/>
-            <p:cNvSpPr/>
-            <p:nvPr/>
-          </p:nvSpPr>
+        <p:pic>
+          <p:nvPicPr>
+            <p:cNvPr id="37" name="Picture 36" descr="exchange-liar.png"/>
+            <p:cNvPicPr>
+              <a:picLocks noChangeAspect="1"/>
+            </p:cNvPicPr>
+            <p:nvPr/>
+          </p:nvPicPr>
+          <p:blipFill>
+            <a:blip r:embed="rId2"/>
+            <a:srcRect/>
+            <a:stretch>
+              <a:fillRect/>
+            </a:stretch>
+          </p:blipFill>
           <p:spPr>
             <a:xfrm>
               <a:off x="6729984" y="1371600"/>
@@ -5308,1371 +5317,15 @@
             </a:xfrm>
             <a:prstGeom prst="roundRect">
               <a:avLst>
-                <a:gd name="adj" fmla="val 816"/>
+                <a:gd name="adj" fmla="val 1361"/>
               </a:avLst>
             </a:prstGeom>
-            <a:solidFill>
-              <a:srgbClr val="F4EFE4"/>
-            </a:solidFill>
-            <a:ln>
-              <a:noFill/>
-            </a:ln>
-          </p:spPr>
-          <p:txBody>
-            <a:bodyPr rtlCol="0" anchor="ctr"/>
-            <a:lstStyle/>
-            <a:p>
-              <a:pPr algn="ctr"/>
-            </a:p>
-          </p:txBody>
-        </p:sp>
-        <p:sp>
-          <p:nvSpPr>
-            <p:cNvPr id="38" name="Rectangle 37"/>
-            <p:cNvSpPr/>
-            <p:nvPr/>
-          </p:nvSpPr>
-          <p:spPr>
-            <a:xfrm>
-              <a:off x="6729984" y="1371600"/>
-              <a:ext cx="5971032" cy="292608"/>
-            </a:xfrm>
-            <a:prstGeom prst="rect">
-              <a:avLst/>
-            </a:prstGeom>
-            <a:solidFill>
-              <a:srgbClr val="FFFDF7"/>
-            </a:solidFill>
-            <a:ln>
-              <a:noFill/>
-            </a:ln>
-          </p:spPr>
-          <p:txBody>
-            <a:bodyPr rtlCol="0" anchor="ctr"/>
-            <a:lstStyle/>
-            <a:p>
-              <a:pPr algn="ctr"/>
-            </a:p>
-          </p:txBody>
-        </p:sp>
-        <p:sp>
-          <p:nvSpPr>
-            <p:cNvPr id="39" name="Rectangle 38"/>
-            <p:cNvSpPr/>
-            <p:nvPr/>
-          </p:nvSpPr>
-          <p:spPr>
-            <a:xfrm>
-              <a:off x="6729984" y="1664208"/>
-              <a:ext cx="5971032" cy="7315"/>
-            </a:xfrm>
-            <a:prstGeom prst="rect">
-              <a:avLst/>
-            </a:prstGeom>
-            <a:solidFill>
-              <a:srgbClr val="E2D9C6"/>
-            </a:solidFill>
-            <a:ln>
-              <a:noFill/>
-            </a:ln>
-          </p:spPr>
-          <p:txBody>
-            <a:bodyPr rtlCol="0" anchor="ctr"/>
-            <a:lstStyle/>
-            <a:p>
-              <a:pPr algn="ctr"/>
-            </a:p>
-          </p:txBody>
-        </p:sp>
-        <p:sp>
-          <p:nvSpPr>
-            <p:cNvPr id="40" name="TextBox 39"/>
-            <p:cNvSpPr txBox="1"/>
-            <p:nvPr/>
-          </p:nvSpPr>
-          <p:spPr>
-            <a:xfrm>
-              <a:off x="6894576" y="1371600"/>
-              <a:ext cx="2743200" cy="292608"/>
-            </a:xfrm>
-            <a:prstGeom prst="rect">
-              <a:avLst/>
-            </a:prstGeom>
-            <a:noFill/>
-          </p:spPr>
-          <p:txBody>
-            <a:bodyPr wrap="square" lIns="0" rIns="0" tIns="0" bIns="0" anchor="ctr">
-              <a:noAutofit/>
-            </a:bodyPr>
-            <a:lstStyle/>
-            <a:p>
-              <a:pPr algn="l"/>
-              <a:r>
-                <a:rPr sz="1000" b="0" i="0">
-                  <a:solidFill>
-                    <a:srgbClr val="16130E"/>
-                  </a:solidFill>
-                  <a:latin typeface="Georgia" panose="02040502050405020303" pitchFamily="18" charset="0"/>
-                </a:rPr>
-                <a:t>Bidwire  </a:t>
-              </a:r>
-              <a:r>
-                <a:rPr sz="750" b="0" i="0">
-                  <a:solidFill>
-                    <a:srgbClr val="9C937F"/>
-                  </a:solidFill>
-                  <a:latin typeface="Inter" panose="020B0502030000000004" pitchFamily="34" charset="0"/>
-                </a:rPr>
-                <a:t>Saleroom</a:t>
-              </a:r>
-            </a:p>
-          </p:txBody>
-        </p:sp>
-        <p:sp>
-          <p:nvSpPr>
-            <p:cNvPr id="41" name="Rounded Rectangle 40"/>
-            <p:cNvSpPr/>
-            <p:nvPr/>
-          </p:nvSpPr>
-          <p:spPr>
-            <a:xfrm>
-              <a:off x="6867144" y="1783080"/>
-              <a:ext cx="3702040" cy="1410656"/>
-            </a:xfrm>
-            <a:prstGeom prst="roundRect">
-              <a:avLst>
-                <a:gd name="adj" fmla="val 3889"/>
-              </a:avLst>
-            </a:prstGeom>
-            <a:solidFill>
-              <a:srgbClr val="0F0E0C"/>
-            </a:solidFill>
-            <a:ln>
-              <a:noFill/>
-            </a:ln>
-          </p:spPr>
-          <p:txBody>
-            <a:bodyPr rtlCol="0" anchor="ctr"/>
-            <a:lstStyle/>
-            <a:p>
-              <a:pPr algn="ctr"/>
-            </a:p>
-          </p:txBody>
-        </p:sp>
-        <p:sp>
-          <p:nvSpPr>
-            <p:cNvPr id="42" name="Rounded Rectangle 41"/>
-            <p:cNvSpPr/>
-            <p:nvPr/>
-          </p:nvSpPr>
-          <p:spPr>
-            <a:xfrm>
-              <a:off x="6912864" y="1828800"/>
-              <a:ext cx="3610600" cy="1319216"/>
-            </a:xfrm>
-            <a:prstGeom prst="roundRect">
-              <a:avLst>
-                <a:gd name="adj" fmla="val 2772"/>
-              </a:avLst>
-            </a:prstGeom>
-            <a:noFill/>
-            <a:ln w="6350">
-              <a:solidFill>
-                <a:srgbClr val="B0894F">
-                  <a:alpha val="60000"/>
-                </a:srgbClr>
-              </a:solidFill>
-            </a:ln>
-          </p:spPr>
-          <p:txBody>
-            <a:bodyPr rtlCol="0" anchor="ctr"/>
-            <a:lstStyle/>
-            <a:p>
-              <a:pPr algn="ctr"/>
-            </a:p>
-          </p:txBody>
-        </p:sp>
-        <p:sp>
-          <p:nvSpPr>
-            <p:cNvPr id="43" name="TextBox 42"/>
-            <p:cNvSpPr txBox="1"/>
-            <p:nvPr/>
-          </p:nvSpPr>
-          <p:spPr>
-            <a:xfrm>
-              <a:off x="7031736" y="1874520"/>
-              <a:ext cx="3427720" cy="219456"/>
-            </a:xfrm>
-            <a:prstGeom prst="rect">
-              <a:avLst/>
-            </a:prstGeom>
-            <a:noFill/>
-          </p:spPr>
-          <p:txBody>
-            <a:bodyPr wrap="square" lIns="0" rIns="0" tIns="0" bIns="0" anchor="ctr">
-              <a:noAutofit/>
-            </a:bodyPr>
-            <a:lstStyle/>
-            <a:p>
-              <a:pPr algn="l"/>
-              <a:r>
-                <a:rPr sz="600" b="1" i="0" spc="110">
-                  <a:solidFill>
-                    <a:srgbClr val="B0894F"/>
-                  </a:solidFill>
-                  <a:latin typeface="Inter" panose="020B0502030000000004" pitchFamily="34" charset="0"/>
-                </a:rPr>
-                <a:t>LOT · HEADPHONES · OPENED BY CLAUDE</a:t>
-              </a:r>
-            </a:p>
-          </p:txBody>
-        </p:sp>
-        <p:sp>
-          <p:nvSpPr>
-            <p:cNvPr id="44" name="TextBox 43"/>
-            <p:cNvSpPr txBox="1"/>
-            <p:nvPr/>
-          </p:nvSpPr>
-          <p:spPr>
-            <a:xfrm>
-              <a:off x="7031736" y="2084832"/>
-              <a:ext cx="3427720" cy="182880"/>
-            </a:xfrm>
-            <a:prstGeom prst="rect">
-              <a:avLst/>
-            </a:prstGeom>
-            <a:noFill/>
-          </p:spPr>
-          <p:txBody>
-            <a:bodyPr wrap="square" lIns="0" rIns="0" tIns="0" bIns="0" anchor="ctr">
-              <a:noAutofit/>
-            </a:bodyPr>
-            <a:lstStyle/>
-            <a:p>
-              <a:pPr algn="l"/>
-              <a:r>
-                <a:rPr sz="700" b="0" i="0">
-                  <a:solidFill>
-                    <a:srgbClr val="8C8270"/>
-                  </a:solidFill>
-                  <a:latin typeface="Inter" panose="020B0502030000000004" pitchFamily="34" charset="0"/>
-                </a:rPr>
-                <a:t>Best verified offer</a:t>
-              </a:r>
-            </a:p>
-          </p:txBody>
-        </p:sp>
-        <p:sp>
-          <p:nvSpPr>
-            <p:cNvPr id="45" name="TextBox 44"/>
-            <p:cNvSpPr txBox="1"/>
-            <p:nvPr/>
-          </p:nvSpPr>
-          <p:spPr>
-            <a:xfrm>
-              <a:off x="7031736" y="2240280"/>
-              <a:ext cx="3427720" cy="564263"/>
-            </a:xfrm>
-            <a:prstGeom prst="rect">
-              <a:avLst/>
-            </a:prstGeom>
-            <a:noFill/>
-          </p:spPr>
-          <p:txBody>
-            <a:bodyPr wrap="square" lIns="0" rIns="0" tIns="0" bIns="0" anchor="ctr">
-              <a:noAutofit/>
-            </a:bodyPr>
-            <a:lstStyle/>
-            <a:p>
-              <a:pPr algn="l"/>
-              <a:r>
-                <a:rPr sz="2400" b="0" i="0">
-                  <a:solidFill>
-                    <a:srgbClr val="F3E9D2"/>
-                  </a:solidFill>
-                  <a:latin typeface="Georgia" panose="02040502050405020303" pitchFamily="18" charset="0"/>
-                </a:rPr>
-                <a:t>$319.99</a:t>
-              </a:r>
-            </a:p>
-          </p:txBody>
-        </p:sp>
-        <p:sp>
-          <p:nvSpPr>
-            <p:cNvPr id="46" name="TextBox 45"/>
-            <p:cNvSpPr txBox="1"/>
-            <p:nvPr/>
-          </p:nvSpPr>
-          <p:spPr>
-            <a:xfrm>
-              <a:off x="7031736" y="2864552"/>
-              <a:ext cx="3427720" cy="201168"/>
-            </a:xfrm>
-            <a:prstGeom prst="rect">
-              <a:avLst/>
-            </a:prstGeom>
-            <a:noFill/>
-          </p:spPr>
-          <p:txBody>
-            <a:bodyPr wrap="square" lIns="0" rIns="0" tIns="0" bIns="0" anchor="ctr">
-              <a:noAutofit/>
-            </a:bodyPr>
-            <a:lstStyle/>
-            <a:p>
-              <a:pPr algn="l"/>
-              <a:r>
-                <a:rPr sz="750" b="0" i="0">
-                  <a:solidFill>
-                    <a:srgbClr val="F3E9D2"/>
-                  </a:solidFill>
-                  <a:latin typeface="Inter" panose="020B0502030000000004" pitchFamily="34" charset="0"/>
-                </a:rPr>
-                <a:t>Last Unit Labs</a:t>
-              </a:r>
-            </a:p>
-          </p:txBody>
-        </p:sp>
-        <p:sp>
-          <p:nvSpPr>
-            <p:cNvPr id="47" name="Rounded Rectangle 46"/>
-            <p:cNvSpPr/>
-            <p:nvPr/>
-          </p:nvSpPr>
-          <p:spPr>
-            <a:xfrm>
-              <a:off x="10706344" y="1783080"/>
-              <a:ext cx="1857512" cy="1410656"/>
-            </a:xfrm>
-            <a:prstGeom prst="roundRect">
-              <a:avLst>
-                <a:gd name="adj" fmla="val 2592"/>
-              </a:avLst>
-            </a:prstGeom>
-            <a:solidFill>
-              <a:srgbClr val="FFFDF7"/>
-            </a:solidFill>
-            <a:ln w="9525">
-              <a:solidFill>
-                <a:srgbClr val="E2D9C6"/>
-              </a:solidFill>
-            </a:ln>
-          </p:spPr>
-          <p:txBody>
-            <a:bodyPr rtlCol="0" anchor="ctr"/>
-            <a:lstStyle/>
-            <a:p>
-              <a:pPr algn="ctr"/>
-            </a:p>
-          </p:txBody>
-        </p:sp>
-        <p:sp>
-          <p:nvSpPr>
-            <p:cNvPr id="48" name="TextBox 47"/>
-            <p:cNvSpPr txBox="1"/>
-            <p:nvPr/>
-          </p:nvSpPr>
-          <p:spPr>
-            <a:xfrm>
-              <a:off x="10816072" y="1856232"/>
-              <a:ext cx="1463040" cy="219456"/>
-            </a:xfrm>
-            <a:prstGeom prst="rect">
-              <a:avLst/>
-            </a:prstGeom>
-            <a:noFill/>
-          </p:spPr>
-          <p:txBody>
-            <a:bodyPr wrap="square" lIns="0" rIns="0" tIns="0" bIns="0" anchor="ctr">
-              <a:noAutofit/>
-            </a:bodyPr>
-            <a:lstStyle/>
-            <a:p>
-              <a:pPr algn="l"/>
-              <a:r>
-                <a:rPr sz="600" b="1" i="0" spc="110">
-                  <a:solidFill>
-                    <a:srgbClr val="9C937F"/>
-                  </a:solidFill>
-                  <a:latin typeface="Inter" panose="020B0502030000000004" pitchFamily="34" charset="0"/>
-                </a:rPr>
-                <a:t>AGENT BIDDERS</a:t>
-              </a:r>
-            </a:p>
-          </p:txBody>
-        </p:sp>
-        <p:sp>
-          <p:nvSpPr>
-            <p:cNvPr id="49" name="TextBox 48"/>
-            <p:cNvSpPr txBox="1"/>
-            <p:nvPr/>
-          </p:nvSpPr>
-          <p:spPr>
-            <a:xfrm>
-              <a:off x="10816072" y="2093976"/>
-              <a:ext cx="1645920" cy="182880"/>
-            </a:xfrm>
-            <a:prstGeom prst="rect">
-              <a:avLst/>
-            </a:prstGeom>
-            <a:noFill/>
-          </p:spPr>
-          <p:txBody>
-            <a:bodyPr wrap="square" lIns="0" rIns="0" tIns="0" bIns="0" anchor="ctr">
-              <a:noAutofit/>
-            </a:bodyPr>
-            <a:lstStyle/>
-            <a:p>
-              <a:pPr algn="l"/>
-              <a:r>
-                <a:rPr sz="650" b="0" i="0">
-                  <a:solidFill>
-                    <a:srgbClr val="233F6E"/>
-                  </a:solidFill>
-                  <a:latin typeface="JetBrains Mono" panose="02000009000000000000" pitchFamily="49" charset="0"/>
-                </a:rPr>
-                <a:t>find_offers</a:t>
-              </a:r>
-            </a:p>
-          </p:txBody>
-        </p:sp>
-        <p:sp>
-          <p:nvSpPr>
-            <p:cNvPr id="50" name="TextBox 49"/>
-            <p:cNvSpPr txBox="1"/>
-            <p:nvPr/>
-          </p:nvSpPr>
-          <p:spPr>
-            <a:xfrm>
-              <a:off x="10816072" y="2322576"/>
-              <a:ext cx="1645920" cy="182880"/>
-            </a:xfrm>
-            <a:prstGeom prst="rect">
-              <a:avLst/>
-            </a:prstGeom>
-            <a:noFill/>
-          </p:spPr>
-          <p:txBody>
-            <a:bodyPr wrap="square" lIns="0" rIns="0" tIns="0" bIns="0" anchor="ctr">
-              <a:noAutofit/>
-            </a:bodyPr>
-            <a:lstStyle/>
-            <a:p>
-              <a:pPr algn="l"/>
-              <a:r>
-                <a:rPr sz="650" b="0" i="0">
-                  <a:solidFill>
-                    <a:srgbClr val="233F6E"/>
-                  </a:solidFill>
-                  <a:latin typeface="JetBrains Mono" panose="02000009000000000000" pitchFamily="49" charset="0"/>
-                </a:rPr>
-                <a:t>buy_offer</a:t>
-              </a:r>
-            </a:p>
-          </p:txBody>
-        </p:sp>
-        <p:sp>
-          <p:nvSpPr>
-            <p:cNvPr id="51" name="TextBox 50"/>
-            <p:cNvSpPr txBox="1"/>
-            <p:nvPr/>
-          </p:nvSpPr>
-          <p:spPr>
-            <a:xfrm>
-              <a:off x="10816072" y="2551176"/>
-              <a:ext cx="1645920" cy="182880"/>
-            </a:xfrm>
-            <a:prstGeom prst="rect">
-              <a:avLst/>
-            </a:prstGeom>
-            <a:noFill/>
-          </p:spPr>
-          <p:txBody>
-            <a:bodyPr wrap="square" lIns="0" rIns="0" tIns="0" bIns="0" anchor="ctr">
-              <a:noAutofit/>
-            </a:bodyPr>
-            <a:lstStyle/>
-            <a:p>
-              <a:pPr algn="l"/>
-              <a:r>
-                <a:rPr sz="650" b="0" i="0">
-                  <a:solidFill>
-                    <a:srgbClr val="233F6E"/>
-                  </a:solidFill>
-                  <a:latin typeface="JetBrains Mono" panose="02000009000000000000" pitchFamily="49" charset="0"/>
-                </a:rPr>
-                <a:t>check_approval</a:t>
-              </a:r>
-            </a:p>
-          </p:txBody>
-        </p:sp>
-        <p:sp>
-          <p:nvSpPr>
-            <p:cNvPr id="52" name="Rounded Rectangle 51"/>
-            <p:cNvSpPr/>
-            <p:nvPr/>
-          </p:nvSpPr>
-          <p:spPr>
-            <a:xfrm>
-              <a:off x="6867144" y="3321752"/>
-              <a:ext cx="5696712" cy="1298825"/>
-            </a:xfrm>
-            <a:prstGeom prst="roundRect">
-              <a:avLst>
-                <a:gd name="adj" fmla="val 2816"/>
-              </a:avLst>
-            </a:prstGeom>
-            <a:solidFill>
-              <a:srgbClr val="FFFDF7"/>
-            </a:solidFill>
-            <a:ln w="9525">
-              <a:solidFill>
-                <a:srgbClr val="E2D9C6"/>
-              </a:solidFill>
-            </a:ln>
-          </p:spPr>
-          <p:txBody>
-            <a:bodyPr rtlCol="0" anchor="ctr"/>
-            <a:lstStyle/>
-            <a:p>
-              <a:pPr algn="ctr"/>
-            </a:p>
-          </p:txBody>
-        </p:sp>
-        <p:sp>
-          <p:nvSpPr>
-            <p:cNvPr id="53" name="TextBox 52"/>
-            <p:cNvSpPr txBox="1"/>
-            <p:nvPr/>
-          </p:nvSpPr>
-          <p:spPr>
-            <a:xfrm>
-              <a:off x="6958584" y="3349184"/>
-              <a:ext cx="365760" cy="248792"/>
-            </a:xfrm>
-            <a:prstGeom prst="rect">
-              <a:avLst/>
-            </a:prstGeom>
-            <a:noFill/>
-          </p:spPr>
-          <p:txBody>
-            <a:bodyPr wrap="square" lIns="0" rIns="0" tIns="0" bIns="0" anchor="ctr">
-              <a:noAutofit/>
-            </a:bodyPr>
-            <a:lstStyle/>
-            <a:p>
-              <a:pPr algn="l"/>
-              <a:r>
-                <a:rPr sz="900" b="0" i="0">
-                  <a:solidFill>
-                    <a:srgbClr val="16130E"/>
-                  </a:solidFill>
-                  <a:latin typeface="Georgia" panose="02040502050405020303" pitchFamily="18" charset="0"/>
-                </a:rPr>
-                <a:t>1</a:t>
-              </a:r>
-            </a:p>
-          </p:txBody>
-        </p:sp>
-        <p:sp>
-          <p:nvSpPr>
-            <p:cNvPr id="54" name="TextBox 53"/>
-            <p:cNvSpPr txBox="1"/>
-            <p:nvPr/>
-          </p:nvSpPr>
-          <p:spPr>
-            <a:xfrm>
-              <a:off x="7278624" y="3349184"/>
-              <a:ext cx="2985516" cy="248792"/>
-            </a:xfrm>
-            <a:prstGeom prst="rect">
-              <a:avLst/>
-            </a:prstGeom>
-            <a:noFill/>
-          </p:spPr>
-          <p:txBody>
-            <a:bodyPr wrap="square" lIns="0" rIns="0" tIns="0" bIns="0" anchor="ctr">
-              <a:noAutofit/>
-            </a:bodyPr>
-            <a:lstStyle/>
-            <a:p>
-              <a:pPr algn="l"/>
-              <a:r>
-                <a:rPr sz="750" b="1" i="0">
-                  <a:solidFill>
-                    <a:srgbClr val="16130E"/>
-                  </a:solidFill>
-                  <a:latin typeface="Inter" panose="020B0502030000000004" pitchFamily="34" charset="0"/>
-                </a:rPr>
-                <a:t>Last Unit Labs</a:t>
-              </a:r>
-            </a:p>
-          </p:txBody>
-        </p:sp>
-        <p:sp>
-          <p:nvSpPr>
-            <p:cNvPr id="55" name="Rounded Rectangle 54"/>
-            <p:cNvSpPr/>
-            <p:nvPr/>
-          </p:nvSpPr>
-          <p:spPr>
-            <a:xfrm>
-              <a:off x="12003024" y="3395856"/>
-              <a:ext cx="423672" cy="155448"/>
-            </a:xfrm>
-            <a:prstGeom prst="roundRect">
-              <a:avLst>
-                <a:gd name="adj" fmla="val 50000"/>
-              </a:avLst>
-            </a:prstGeom>
-            <a:solidFill>
-              <a:srgbClr val="F5EBD6"/>
-            </a:solidFill>
-            <a:ln>
-              <a:noFill/>
-            </a:ln>
-          </p:spPr>
-          <p:txBody>
-            <a:bodyPr rtlCol="0" anchor="ctr"/>
-            <a:lstStyle/>
-            <a:p>
-              <a:pPr algn="ctr"/>
-            </a:p>
-          </p:txBody>
-        </p:sp>
-        <p:sp>
-          <p:nvSpPr>
-            <p:cNvPr id="56" name="TextBox 55"/>
-            <p:cNvSpPr txBox="1"/>
-            <p:nvPr/>
-          </p:nvSpPr>
-          <p:spPr>
-            <a:xfrm>
-              <a:off x="12003024" y="3395856"/>
-              <a:ext cx="423672" cy="155448"/>
-            </a:xfrm>
-            <a:prstGeom prst="rect">
-              <a:avLst/>
-            </a:prstGeom>
-            <a:noFill/>
-          </p:spPr>
-          <p:txBody>
-            <a:bodyPr wrap="square" lIns="0" rIns="0" tIns="0" bIns="0" anchor="ctr">
-              <a:noAutofit/>
-            </a:bodyPr>
-            <a:lstStyle/>
-            <a:p>
-              <a:pPr algn="ctr"/>
-              <a:r>
-                <a:rPr sz="650" b="1" i="0">
-                  <a:solidFill>
-                    <a:srgbClr val="B0894F"/>
-                  </a:solidFill>
-                  <a:latin typeface="Inter" panose="020B0502030000000004" pitchFamily="34" charset="0"/>
-                </a:rPr>
-                <a:t>Hammer</a:t>
-              </a:r>
-            </a:p>
-          </p:txBody>
-        </p:sp>
-        <p:sp>
-          <p:nvSpPr>
-            <p:cNvPr id="57" name="Rectangle 56"/>
-            <p:cNvSpPr/>
-            <p:nvPr/>
-          </p:nvSpPr>
-          <p:spPr>
-            <a:xfrm>
-              <a:off x="6912864" y="3597977"/>
-              <a:ext cx="5605272" cy="5486"/>
-            </a:xfrm>
-            <a:prstGeom prst="rect">
-              <a:avLst/>
-            </a:prstGeom>
-            <a:solidFill>
-              <a:srgbClr val="E2D9C6"/>
-            </a:solidFill>
-            <a:ln>
-              <a:noFill/>
-            </a:ln>
-          </p:spPr>
-          <p:txBody>
-            <a:bodyPr rtlCol="0" anchor="ctr"/>
-            <a:lstStyle/>
-            <a:p>
-              <a:pPr algn="ctr"/>
-            </a:p>
-          </p:txBody>
-        </p:sp>
-        <p:sp>
-          <p:nvSpPr>
-            <p:cNvPr id="58" name="TextBox 57"/>
-            <p:cNvSpPr txBox="1"/>
-            <p:nvPr/>
-          </p:nvSpPr>
-          <p:spPr>
-            <a:xfrm>
-              <a:off x="6958584" y="3597977"/>
-              <a:ext cx="365760" cy="248792"/>
-            </a:xfrm>
-            <a:prstGeom prst="rect">
-              <a:avLst/>
-            </a:prstGeom>
-            <a:noFill/>
-          </p:spPr>
-          <p:txBody>
-            <a:bodyPr wrap="square" lIns="0" rIns="0" tIns="0" bIns="0" anchor="ctr">
-              <a:noAutofit/>
-            </a:bodyPr>
-            <a:lstStyle/>
-            <a:p>
-              <a:pPr algn="l"/>
-              <a:r>
-                <a:rPr sz="900" b="0" i="0">
-                  <a:solidFill>
-                    <a:srgbClr val="16130E"/>
-                  </a:solidFill>
-                  <a:latin typeface="Georgia" panose="02040502050405020303" pitchFamily="18" charset="0"/>
-                </a:rPr>
-                <a:t>2</a:t>
-              </a:r>
-            </a:p>
-          </p:txBody>
-        </p:sp>
-        <p:sp>
-          <p:nvSpPr>
-            <p:cNvPr id="59" name="TextBox 58"/>
-            <p:cNvSpPr txBox="1"/>
-            <p:nvPr/>
-          </p:nvSpPr>
-          <p:spPr>
-            <a:xfrm>
-              <a:off x="7278624" y="3597977"/>
-              <a:ext cx="2985516" cy="248792"/>
-            </a:xfrm>
-            <a:prstGeom prst="rect">
-              <a:avLst/>
-            </a:prstGeom>
-            <a:noFill/>
-          </p:spPr>
-          <p:txBody>
-            <a:bodyPr wrap="square" lIns="0" rIns="0" tIns="0" bIns="0" anchor="ctr">
-              <a:noAutofit/>
-            </a:bodyPr>
-            <a:lstStyle/>
-            <a:p>
-              <a:pPr algn="l"/>
-              <a:r>
-                <a:rPr sz="750" b="1" i="0">
-                  <a:solidFill>
-                    <a:srgbClr val="16130E"/>
-                  </a:solidFill>
-                  <a:latin typeface="Inter" panose="020B0502030000000004" pitchFamily="34" charset="0"/>
-                </a:rPr>
-                <a:t>Parcel &amp; Pine</a:t>
-              </a:r>
-            </a:p>
-          </p:txBody>
-        </p:sp>
-        <p:sp>
-          <p:nvSpPr>
-            <p:cNvPr id="60" name="Rounded Rectangle 59"/>
-            <p:cNvSpPr/>
-            <p:nvPr/>
-          </p:nvSpPr>
-          <p:spPr>
-            <a:xfrm>
-              <a:off x="11910568" y="3644649"/>
-              <a:ext cx="516128" cy="155448"/>
-            </a:xfrm>
-            <a:prstGeom prst="roundRect">
-              <a:avLst>
-                <a:gd name="adj" fmla="val 50000"/>
-              </a:avLst>
-            </a:prstGeom>
-            <a:solidFill>
-              <a:srgbClr val="E5F0E8"/>
-            </a:solidFill>
-            <a:ln>
-              <a:noFill/>
-            </a:ln>
-          </p:spPr>
-          <p:txBody>
-            <a:bodyPr rtlCol="0" anchor="ctr"/>
-            <a:lstStyle/>
-            <a:p>
-              <a:pPr algn="ctr"/>
-            </a:p>
-          </p:txBody>
-        </p:sp>
-        <p:sp>
-          <p:nvSpPr>
-            <p:cNvPr id="61" name="TextBox 60"/>
-            <p:cNvSpPr txBox="1"/>
-            <p:nvPr/>
-          </p:nvSpPr>
-          <p:spPr>
-            <a:xfrm>
-              <a:off x="11910568" y="3644649"/>
-              <a:ext cx="516128" cy="155448"/>
-            </a:xfrm>
-            <a:prstGeom prst="rect">
-              <a:avLst/>
-            </a:prstGeom>
-            <a:noFill/>
-          </p:spPr>
-          <p:txBody>
-            <a:bodyPr wrap="square" lIns="0" rIns="0" tIns="0" bIns="0" anchor="ctr">
-              <a:noAutofit/>
-            </a:bodyPr>
-            <a:lstStyle/>
-            <a:p>
-              <a:pPr algn="ctr"/>
-              <a:r>
-                <a:rPr sz="650" b="1" i="0">
-                  <a:solidFill>
-                    <a:srgbClr val="2D6A48"/>
-                  </a:solidFill>
-                  <a:latin typeface="Inter" panose="020B0502030000000004" pitchFamily="34" charset="0"/>
-                </a:rPr>
-                <a:t>Verified</a:t>
-              </a:r>
-            </a:p>
-          </p:txBody>
-        </p:sp>
-        <p:sp>
-          <p:nvSpPr>
-            <p:cNvPr id="62" name="Rectangle 61"/>
-            <p:cNvSpPr/>
-            <p:nvPr/>
-          </p:nvSpPr>
-          <p:spPr>
-            <a:xfrm>
-              <a:off x="6912864" y="3846769"/>
-              <a:ext cx="5605272" cy="5486"/>
-            </a:xfrm>
-            <a:prstGeom prst="rect">
-              <a:avLst/>
-            </a:prstGeom>
-            <a:solidFill>
-              <a:srgbClr val="E2D9C6"/>
-            </a:solidFill>
-            <a:ln>
-              <a:noFill/>
-            </a:ln>
-          </p:spPr>
-          <p:txBody>
-            <a:bodyPr rtlCol="0" anchor="ctr"/>
-            <a:lstStyle/>
-            <a:p>
-              <a:pPr algn="ctr"/>
-            </a:p>
-          </p:txBody>
-        </p:sp>
-        <p:sp>
-          <p:nvSpPr>
-            <p:cNvPr id="63" name="TextBox 62"/>
-            <p:cNvSpPr txBox="1"/>
-            <p:nvPr/>
-          </p:nvSpPr>
-          <p:spPr>
-            <a:xfrm>
-              <a:off x="6958584" y="3846769"/>
-              <a:ext cx="365760" cy="248792"/>
-            </a:xfrm>
-            <a:prstGeom prst="rect">
-              <a:avLst/>
-            </a:prstGeom>
-            <a:noFill/>
-          </p:spPr>
-          <p:txBody>
-            <a:bodyPr wrap="square" lIns="0" rIns="0" tIns="0" bIns="0" anchor="ctr">
-              <a:noAutofit/>
-            </a:bodyPr>
-            <a:lstStyle/>
-            <a:p>
-              <a:pPr algn="l"/>
-              <a:r>
-                <a:rPr sz="900" b="0" i="0">
-                  <a:solidFill>
-                    <a:srgbClr val="16130E"/>
-                  </a:solidFill>
-                  <a:latin typeface="Georgia" panose="02040502050405020303" pitchFamily="18" charset="0"/>
-                </a:rPr>
-                <a:t>3</a:t>
-              </a:r>
-            </a:p>
-          </p:txBody>
-        </p:sp>
-        <p:sp>
-          <p:nvSpPr>
-            <p:cNvPr id="64" name="TextBox 63"/>
-            <p:cNvSpPr txBox="1"/>
-            <p:nvPr/>
-          </p:nvSpPr>
-          <p:spPr>
-            <a:xfrm>
-              <a:off x="7278624" y="3846769"/>
-              <a:ext cx="2985516" cy="248792"/>
-            </a:xfrm>
-            <a:prstGeom prst="rect">
-              <a:avLst/>
-            </a:prstGeom>
-            <a:noFill/>
-          </p:spPr>
-          <p:txBody>
-            <a:bodyPr wrap="square" lIns="0" rIns="0" tIns="0" bIns="0" anchor="ctr">
-              <a:noAutofit/>
-            </a:bodyPr>
-            <a:lstStyle/>
-            <a:p>
-              <a:pPr algn="l"/>
-              <a:r>
-                <a:rPr sz="750" b="1" i="0">
-                  <a:solidFill>
-                    <a:srgbClr val="16130E"/>
-                  </a:solidFill>
-                  <a:latin typeface="Inter" panose="020B0502030000000004" pitchFamily="34" charset="0"/>
-                </a:rPr>
-                <a:t>Northwind Electronics</a:t>
-              </a:r>
-            </a:p>
-          </p:txBody>
-        </p:sp>
-        <p:sp>
-          <p:nvSpPr>
-            <p:cNvPr id="65" name="Rounded Rectangle 64"/>
-            <p:cNvSpPr/>
-            <p:nvPr/>
-          </p:nvSpPr>
-          <p:spPr>
-            <a:xfrm>
-              <a:off x="11910568" y="3893441"/>
-              <a:ext cx="516128" cy="155448"/>
-            </a:xfrm>
-            <a:prstGeom prst="roundRect">
-              <a:avLst>
-                <a:gd name="adj" fmla="val 50000"/>
-              </a:avLst>
-            </a:prstGeom>
-            <a:solidFill>
-              <a:srgbClr val="E5F0E8"/>
-            </a:solidFill>
-            <a:ln>
-              <a:noFill/>
-            </a:ln>
-          </p:spPr>
-          <p:txBody>
-            <a:bodyPr rtlCol="0" anchor="ctr"/>
-            <a:lstStyle/>
-            <a:p>
-              <a:pPr algn="ctr"/>
-            </a:p>
-          </p:txBody>
-        </p:sp>
-        <p:sp>
-          <p:nvSpPr>
-            <p:cNvPr id="66" name="TextBox 65"/>
-            <p:cNvSpPr txBox="1"/>
-            <p:nvPr/>
-          </p:nvSpPr>
-          <p:spPr>
-            <a:xfrm>
-              <a:off x="11910568" y="3893441"/>
-              <a:ext cx="516128" cy="155448"/>
-            </a:xfrm>
-            <a:prstGeom prst="rect">
-              <a:avLst/>
-            </a:prstGeom>
-            <a:noFill/>
-          </p:spPr>
-          <p:txBody>
-            <a:bodyPr wrap="square" lIns="0" rIns="0" tIns="0" bIns="0" anchor="ctr">
-              <a:noAutofit/>
-            </a:bodyPr>
-            <a:lstStyle/>
-            <a:p>
-              <a:pPr algn="ctr"/>
-              <a:r>
-                <a:rPr sz="650" b="1" i="0">
-                  <a:solidFill>
-                    <a:srgbClr val="2D6A48"/>
-                  </a:solidFill>
-                  <a:latin typeface="Inter" panose="020B0502030000000004" pitchFamily="34" charset="0"/>
-                </a:rPr>
-                <a:t>Verified</a:t>
-              </a:r>
-            </a:p>
-          </p:txBody>
-        </p:sp>
-        <p:sp>
-          <p:nvSpPr>
-            <p:cNvPr id="67" name="Rectangle 66"/>
-            <p:cNvSpPr/>
-            <p:nvPr/>
-          </p:nvSpPr>
-          <p:spPr>
-            <a:xfrm>
-              <a:off x="6912864" y="4095561"/>
-              <a:ext cx="5605272" cy="5486"/>
-            </a:xfrm>
-            <a:prstGeom prst="rect">
-              <a:avLst/>
-            </a:prstGeom>
-            <a:solidFill>
-              <a:srgbClr val="E2D9C6"/>
-            </a:solidFill>
-            <a:ln>
-              <a:noFill/>
-            </a:ln>
-          </p:spPr>
-          <p:txBody>
-            <a:bodyPr rtlCol="0" anchor="ctr"/>
-            <a:lstStyle/>
-            <a:p>
-              <a:pPr algn="ctr"/>
-            </a:p>
-          </p:txBody>
-        </p:sp>
-        <p:sp>
-          <p:nvSpPr>
-            <p:cNvPr id="68" name="TextBox 67"/>
-            <p:cNvSpPr txBox="1"/>
-            <p:nvPr/>
-          </p:nvSpPr>
-          <p:spPr>
-            <a:xfrm>
-              <a:off x="6958584" y="4095561"/>
-              <a:ext cx="365760" cy="248792"/>
-            </a:xfrm>
-            <a:prstGeom prst="rect">
-              <a:avLst/>
-            </a:prstGeom>
-            <a:noFill/>
-          </p:spPr>
-          <p:txBody>
-            <a:bodyPr wrap="square" lIns="0" rIns="0" tIns="0" bIns="0" anchor="ctr">
-              <a:noAutofit/>
-            </a:bodyPr>
-            <a:lstStyle/>
-            <a:p>
-              <a:pPr algn="l"/>
-              <a:r>
-                <a:rPr sz="900" b="0" i="0">
-                  <a:solidFill>
-                    <a:srgbClr val="16130E"/>
-                  </a:solidFill>
-                  <a:latin typeface="Georgia" panose="02040502050405020303" pitchFamily="18" charset="0"/>
-                </a:rPr>
-                <a:t>5</a:t>
-              </a:r>
-            </a:p>
-          </p:txBody>
-        </p:sp>
-        <p:sp>
-          <p:nvSpPr>
-            <p:cNvPr id="69" name="TextBox 68"/>
-            <p:cNvSpPr txBox="1"/>
-            <p:nvPr/>
-          </p:nvSpPr>
-          <p:spPr>
-            <a:xfrm>
-              <a:off x="7278624" y="4095561"/>
-              <a:ext cx="2985516" cy="248792"/>
-            </a:xfrm>
-            <a:prstGeom prst="rect">
-              <a:avLst/>
-            </a:prstGeom>
-            <a:noFill/>
-          </p:spPr>
-          <p:txBody>
-            <a:bodyPr wrap="square" lIns="0" rIns="0" tIns="0" bIns="0" anchor="ctr">
-              <a:noAutofit/>
-            </a:bodyPr>
-            <a:lstStyle/>
-            <a:p>
-              <a:pPr algn="l"/>
-              <a:r>
-                <a:rPr sz="750" b="1" i="0">
-                  <a:solidFill>
-                    <a:srgbClr val="16130E"/>
-                  </a:solidFill>
-                  <a:latin typeface="Inter" panose="020B0502030000000004" pitchFamily="34" charset="0"/>
-                </a:rPr>
-                <a:t>MegaMart Ads Co.</a:t>
-              </a:r>
-            </a:p>
-          </p:txBody>
-        </p:sp>
-        <p:sp>
-          <p:nvSpPr>
-            <p:cNvPr id="70" name="Rounded Rectangle 69"/>
-            <p:cNvSpPr/>
-            <p:nvPr/>
-          </p:nvSpPr>
-          <p:spPr>
-            <a:xfrm>
-              <a:off x="11679428" y="4142233"/>
-              <a:ext cx="747268" cy="155448"/>
-            </a:xfrm>
-            <a:prstGeom prst="roundRect">
-              <a:avLst>
-                <a:gd name="adj" fmla="val 50000"/>
-              </a:avLst>
-            </a:prstGeom>
-            <a:solidFill>
-              <a:srgbClr val="F6EBD6"/>
-            </a:solidFill>
-            <a:ln>
-              <a:noFill/>
-            </a:ln>
-          </p:spPr>
-          <p:txBody>
-            <a:bodyPr rtlCol="0" anchor="ctr"/>
-            <a:lstStyle/>
-            <a:p>
-              <a:pPr algn="ctr"/>
-            </a:p>
-          </p:txBody>
-        </p:sp>
-        <p:sp>
-          <p:nvSpPr>
-            <p:cNvPr id="71" name="TextBox 70"/>
-            <p:cNvSpPr txBox="1"/>
-            <p:nvPr/>
-          </p:nvSpPr>
-          <p:spPr>
-            <a:xfrm>
-              <a:off x="11679428" y="4142233"/>
-              <a:ext cx="747268" cy="155448"/>
-            </a:xfrm>
-            <a:prstGeom prst="rect">
-              <a:avLst/>
-            </a:prstGeom>
-            <a:noFill/>
-          </p:spPr>
-          <p:txBody>
-            <a:bodyPr wrap="square" lIns="0" rIns="0" tIns="0" bIns="0" anchor="ctr">
-              <a:noAutofit/>
-            </a:bodyPr>
-            <a:lstStyle/>
-            <a:p>
-              <a:pPr algn="ctr"/>
-              <a:r>
-                <a:rPr sz="650" b="1" i="0">
-                  <a:solidFill>
-                    <a:srgbClr val="94641F"/>
-                  </a:solidFill>
-                  <a:latin typeface="Inter" panose="020B0502030000000004" pitchFamily="34" charset="0"/>
-                </a:rPr>
-                <a:t>Bribe ignored</a:t>
-              </a:r>
-            </a:p>
-          </p:txBody>
-        </p:sp>
-        <p:sp>
-          <p:nvSpPr>
-            <p:cNvPr id="72" name="Rectangle 71"/>
-            <p:cNvSpPr/>
-            <p:nvPr/>
-          </p:nvSpPr>
-          <p:spPr>
-            <a:xfrm>
-              <a:off x="6912864" y="4344353"/>
-              <a:ext cx="5605272" cy="5486"/>
-            </a:xfrm>
-            <a:prstGeom prst="rect">
-              <a:avLst/>
-            </a:prstGeom>
-            <a:solidFill>
-              <a:srgbClr val="E2D9C6"/>
-            </a:solidFill>
-            <a:ln>
-              <a:noFill/>
-            </a:ln>
-          </p:spPr>
-          <p:txBody>
-            <a:bodyPr rtlCol="0" anchor="ctr"/>
-            <a:lstStyle/>
-            <a:p>
-              <a:pPr algn="ctr"/>
-            </a:p>
-          </p:txBody>
-        </p:sp>
-        <p:sp>
-          <p:nvSpPr>
-            <p:cNvPr id="73" name="TextBox 72"/>
-            <p:cNvSpPr txBox="1"/>
-            <p:nvPr/>
-          </p:nvSpPr>
-          <p:spPr>
-            <a:xfrm>
-              <a:off x="6958584" y="4344353"/>
-              <a:ext cx="365760" cy="248792"/>
-            </a:xfrm>
-            <a:prstGeom prst="rect">
-              <a:avLst/>
-            </a:prstGeom>
-            <a:noFill/>
-          </p:spPr>
-          <p:txBody>
-            <a:bodyPr wrap="square" lIns="0" rIns="0" tIns="0" bIns="0" anchor="ctr">
-              <a:noAutofit/>
-            </a:bodyPr>
-            <a:lstStyle/>
-            <a:p>
-              <a:pPr algn="l"/>
-              <a:r>
-                <a:rPr sz="900" b="0" i="0">
-                  <a:solidFill>
-                    <a:srgbClr val="16130E"/>
-                  </a:solidFill>
-                  <a:latin typeface="Georgia" panose="02040502050405020303" pitchFamily="18" charset="0"/>
-                </a:rPr>
-                <a:t>—</a:t>
-              </a:r>
-            </a:p>
-          </p:txBody>
-        </p:sp>
-        <p:sp>
-          <p:nvSpPr>
-            <p:cNvPr id="74" name="TextBox 73"/>
-            <p:cNvSpPr txBox="1"/>
-            <p:nvPr/>
-          </p:nvSpPr>
-          <p:spPr>
-            <a:xfrm>
-              <a:off x="7278624" y="4344353"/>
-              <a:ext cx="2985516" cy="248792"/>
-            </a:xfrm>
-            <a:prstGeom prst="rect">
-              <a:avLst/>
-            </a:prstGeom>
-            <a:noFill/>
-          </p:spPr>
-          <p:txBody>
-            <a:bodyPr wrap="square" lIns="0" rIns="0" tIns="0" bIns="0" anchor="ctr">
-              <a:noAutofit/>
-            </a:bodyPr>
-            <a:lstStyle/>
-            <a:p>
-              <a:pPr algn="l"/>
-              <a:r>
-                <a:rPr sz="750" b="1" i="0">
-                  <a:solidFill>
-                    <a:srgbClr val="16130E"/>
-                  </a:solidFill>
-                  <a:latin typeface="Inter" panose="020B0502030000000004" pitchFamily="34" charset="0"/>
-                </a:rPr>
-                <a:t>DealDrop Direct</a:t>
-              </a:r>
-            </a:p>
-          </p:txBody>
-        </p:sp>
-        <p:sp>
-          <p:nvSpPr>
-            <p:cNvPr id="75" name="Rounded Rectangle 74"/>
-            <p:cNvSpPr/>
-            <p:nvPr/>
-          </p:nvSpPr>
-          <p:spPr>
-            <a:xfrm>
-              <a:off x="11864340" y="4391025"/>
-              <a:ext cx="562356" cy="155448"/>
-            </a:xfrm>
-            <a:prstGeom prst="roundRect">
-              <a:avLst>
-                <a:gd name="adj" fmla="val 50000"/>
-              </a:avLst>
-            </a:prstGeom>
-            <a:solidFill>
-              <a:srgbClr val="F6E3DF"/>
-            </a:solidFill>
-            <a:ln>
-              <a:noFill/>
-            </a:ln>
-          </p:spPr>
-          <p:txBody>
-            <a:bodyPr rtlCol="0" anchor="ctr"/>
-            <a:lstStyle/>
-            <a:p>
-              <a:pPr algn="ctr"/>
-            </a:p>
-          </p:txBody>
-        </p:sp>
-        <p:sp>
-          <p:nvSpPr>
-            <p:cNvPr id="76" name="TextBox 75"/>
-            <p:cNvSpPr txBox="1"/>
-            <p:nvPr/>
-          </p:nvSpPr>
-          <p:spPr>
-            <a:xfrm>
-              <a:off x="11864340" y="4391025"/>
-              <a:ext cx="562356" cy="155448"/>
-            </a:xfrm>
-            <a:prstGeom prst="rect">
-              <a:avLst/>
-            </a:prstGeom>
-            <a:noFill/>
-          </p:spPr>
-          <p:txBody>
-            <a:bodyPr wrap="square" lIns="0" rIns="0" tIns="0" bIns="0" anchor="ctr">
-              <a:noAutofit/>
-            </a:bodyPr>
-            <a:lstStyle/>
-            <a:p>
-              <a:pPr algn="ctr"/>
-              <a:r>
-                <a:rPr sz="650" b="1" i="0">
-                  <a:solidFill>
-                    <a:srgbClr val="8E2A22"/>
-                  </a:solidFill>
-                  <a:latin typeface="Inter" panose="020B0502030000000004" pitchFamily="34" charset="0"/>
-                </a:rPr>
-                <a:t>Withdrawn</a:t>
-              </a:r>
-            </a:p>
-          </p:txBody>
-        </p:sp>
-        <p:sp>
-          <p:nvSpPr>
-            <p:cNvPr id="77" name="TextBox 76"/>
-            <p:cNvSpPr txBox="1"/>
-            <p:nvPr/>
-          </p:nvSpPr>
-          <p:spPr>
-            <a:xfrm>
-              <a:off x="6812280" y="4510850"/>
-              <a:ext cx="5806440" cy="182880"/>
-            </a:xfrm>
-            <a:prstGeom prst="rect">
-              <a:avLst/>
-            </a:prstGeom>
-            <a:noFill/>
-          </p:spPr>
-          <p:txBody>
-            <a:bodyPr wrap="square" lIns="0" rIns="0" tIns="0" bIns="0" anchor="ctr">
-              <a:noAutofit/>
-            </a:bodyPr>
-            <a:lstStyle/>
-            <a:p>
-              <a:pPr algn="r"/>
-              <a:r>
-                <a:rPr sz="700" b="0" i="0">
-                  <a:solidFill>
-                    <a:srgbClr val="9C937F"/>
-                  </a:solidFill>
-                  <a:latin typeface="JetBrains Mono" panose="02000009000000000000" pitchFamily="49" charset="0"/>
-                </a:rPr>
-                <a:t>Placeholder: screenshots/exchange-liar.png</a:t>
-              </a:r>
-            </a:p>
-          </p:txBody>
-        </p:sp>
+          </p:spPr>
+        </p:pic>
       </p:grpSp>
       <p:grpSp>
         <p:nvGrpSpPr>
-          <p:cNvPr id="78" name="Group 77"/>
+          <p:cNvPr id="38" name="Group 37"/>
           <p:cNvGrpSpPr/>
           <p:nvPr/>
         </p:nvGrpSpPr>
@@ -6686,7 +5339,7 @@
         </p:grpSpPr>
         <p:sp>
           <p:nvSpPr>
-            <p:cNvPr id="79" name="Rounded Rectangle 78"/>
+            <p:cNvPr id="39" name="Rounded Rectangle 38"/>
             <p:cNvSpPr/>
             <p:nvPr/>
           </p:nvSpPr>
@@ -6726,7 +5379,7 @@
         </p:sp>
         <p:sp>
           <p:nvSpPr>
-            <p:cNvPr id="80" name="Rectangle 79"/>
+            <p:cNvPr id="40" name="Rectangle 39"/>
             <p:cNvSpPr/>
             <p:nvPr/>
           </p:nvSpPr>
@@ -6755,7 +5408,7 @@
         </p:sp>
         <p:sp>
           <p:nvSpPr>
-            <p:cNvPr id="81" name="TextBox 80"/>
+            <p:cNvPr id="41" name="TextBox 40"/>
             <p:cNvSpPr txBox="1"/>
             <p:nvPr/>
           </p:nvSpPr>
@@ -6790,7 +5443,7 @@
         </p:sp>
         <p:sp>
           <p:nvSpPr>
-            <p:cNvPr id="82" name="TextBox 81"/>
+            <p:cNvPr id="42" name="TextBox 41"/>
             <p:cNvSpPr txBox="1"/>
             <p:nvPr/>
           </p:nvSpPr>
@@ -6829,7 +5482,7 @@
         </p:sp>
         <p:sp>
           <p:nvSpPr>
-            <p:cNvPr id="83" name="TextBox 82"/>
+            <p:cNvPr id="43" name="TextBox 42"/>
             <p:cNvSpPr txBox="1"/>
             <p:nvPr/>
           </p:nvSpPr>
@@ -6864,7 +5517,7 @@
         </p:sp>
         <p:sp>
           <p:nvSpPr>
-            <p:cNvPr id="84" name="Rounded Rectangle 83"/>
+            <p:cNvPr id="44" name="Rounded Rectangle 43"/>
             <p:cNvSpPr/>
             <p:nvPr/>
           </p:nvSpPr>
@@ -6897,7 +5550,7 @@
         </p:sp>
         <p:sp>
           <p:nvSpPr>
-            <p:cNvPr id="85" name="TextBox 84"/>
+            <p:cNvPr id="45" name="TextBox 44"/>
             <p:cNvSpPr txBox="1"/>
             <p:nvPr/>
           </p:nvSpPr>
@@ -7775,7 +6428,7 @@
                                           </p:stCondLst>
                                         </p:cTn>
                                         <p:tgtEl>
-                                          <p:spTgt spid="78"/>
+                                          <p:spTgt spid="38"/>
                                         </p:tgtEl>
                                         <p:attrNameLst>
                                           <p:attrName>style.visibility</p:attrName>
@@ -7789,7 +6442,7 @@
                                       <p:cBhvr>
                                         <p:cTn id="58" dur="210"/>
                                         <p:tgtEl>
-                                          <p:spTgt spid="78"/>
+                                          <p:spTgt spid="38"/>
                                         </p:tgtEl>
                                       </p:cBhvr>
                                     </p:animEffect>
@@ -7797,7 +6450,7 @@
                                       <p:cBhvr additive="base">
                                         <p:cTn id="59" dur="350" fill="hold" decel="100000"/>
                                         <p:tgtEl>
-                                          <p:spTgt spid="78"/>
+                                          <p:spTgt spid="38"/>
                                         </p:tgtEl>
                                         <p:attrNameLst>
                                           <p:attrName>ppt_w</p:attrName>
@@ -7820,7 +6473,7 @@
                                       <p:cBhvr additive="base">
                                         <p:cTn id="60" dur="350" fill="hold" decel="100000"/>
                                         <p:tgtEl>
-                                          <p:spTgt spid="78"/>
+                                          <p:spTgt spid="38"/>
                                         </p:tgtEl>
                                         <p:attrNameLst>
                                           <p:attrName>ppt_h</p:attrName>
@@ -20322,7 +18975,7 @@
                 </a:solidFill>
                 <a:latin typeface="Inter" panose="020B0502030000000004" pitchFamily="34" charset="0"/>
               </a:rPr>
-              <a:t>THE SALEROOM · BID WITHDRAWN</a:t>
+              <a:t>THE SALEROOM · AFTER THE HAMMER</a:t>
             </a:r>
           </a:p>
         </p:txBody>
@@ -20563,12 +19216,21 @@
             </a:p>
           </p:txBody>
         </p:sp>
-        <p:sp>
-          <p:nvSpPr>
-            <p:cNvPr id="26" name="Rounded Rectangle 25"/>
-            <p:cNvSpPr/>
-            <p:nvPr/>
-          </p:nvSpPr>
+        <p:pic>
+          <p:nvPicPr>
+            <p:cNvPr id="26" name="Picture 25" descr="exchange-ranked.png"/>
+            <p:cNvPicPr>
+              <a:picLocks noChangeAspect="1"/>
+            </p:cNvPicPr>
+            <p:nvPr/>
+          </p:nvPicPr>
+          <p:blipFill>
+            <a:blip r:embed="rId2"/>
+            <a:srcRect/>
+            <a:stretch>
+              <a:fillRect/>
+            </a:stretch>
+          </p:blipFill>
           <p:spPr>
             <a:xfrm>
               <a:off x="694944" y="2103120"/>
@@ -20576,1371 +19238,15 @@
             </a:xfrm>
             <a:prstGeom prst="roundRect">
               <a:avLst>
-                <a:gd name="adj" fmla="val 810"/>
+                <a:gd name="adj" fmla="val 1350"/>
               </a:avLst>
             </a:prstGeom>
-            <a:solidFill>
-              <a:srgbClr val="F4EFE4"/>
-            </a:solidFill>
-            <a:ln>
-              <a:noFill/>
-            </a:ln>
-          </p:spPr>
-          <p:txBody>
-            <a:bodyPr rtlCol="0" anchor="ctr"/>
-            <a:lstStyle/>
-            <a:p>
-              <a:pPr algn="ctr"/>
-            </a:p>
-          </p:txBody>
-        </p:sp>
-        <p:sp>
-          <p:nvSpPr>
-            <p:cNvPr id="27" name="Rectangle 26"/>
-            <p:cNvSpPr/>
-            <p:nvPr/>
-          </p:nvSpPr>
-          <p:spPr>
-            <a:xfrm>
-              <a:off x="694944" y="2103120"/>
-              <a:ext cx="6016752" cy="292608"/>
-            </a:xfrm>
-            <a:prstGeom prst="rect">
-              <a:avLst/>
-            </a:prstGeom>
-            <a:solidFill>
-              <a:srgbClr val="FFFDF7"/>
-            </a:solidFill>
-            <a:ln>
-              <a:noFill/>
-            </a:ln>
-          </p:spPr>
-          <p:txBody>
-            <a:bodyPr rtlCol="0" anchor="ctr"/>
-            <a:lstStyle/>
-            <a:p>
-              <a:pPr algn="ctr"/>
-            </a:p>
-          </p:txBody>
-        </p:sp>
-        <p:sp>
-          <p:nvSpPr>
-            <p:cNvPr id="28" name="Rectangle 27"/>
-            <p:cNvSpPr/>
-            <p:nvPr/>
-          </p:nvSpPr>
-          <p:spPr>
-            <a:xfrm>
-              <a:off x="694944" y="2395728"/>
-              <a:ext cx="6016752" cy="7315"/>
-            </a:xfrm>
-            <a:prstGeom prst="rect">
-              <a:avLst/>
-            </a:prstGeom>
-            <a:solidFill>
-              <a:srgbClr val="E2D9C6"/>
-            </a:solidFill>
-            <a:ln>
-              <a:noFill/>
-            </a:ln>
-          </p:spPr>
-          <p:txBody>
-            <a:bodyPr rtlCol="0" anchor="ctr"/>
-            <a:lstStyle/>
-            <a:p>
-              <a:pPr algn="ctr"/>
-            </a:p>
-          </p:txBody>
-        </p:sp>
-        <p:sp>
-          <p:nvSpPr>
-            <p:cNvPr id="29" name="TextBox 28"/>
-            <p:cNvSpPr txBox="1"/>
-            <p:nvPr/>
-          </p:nvSpPr>
-          <p:spPr>
-            <a:xfrm>
-              <a:off x="859536" y="2103120"/>
-              <a:ext cx="2743200" cy="292608"/>
-            </a:xfrm>
-            <a:prstGeom prst="rect">
-              <a:avLst/>
-            </a:prstGeom>
-            <a:noFill/>
-          </p:spPr>
-          <p:txBody>
-            <a:bodyPr wrap="square" lIns="0" rIns="0" tIns="0" bIns="0" anchor="ctr">
-              <a:noAutofit/>
-            </a:bodyPr>
-            <a:lstStyle/>
-            <a:p>
-              <a:pPr algn="l"/>
-              <a:r>
-                <a:rPr sz="1000" b="0" i="0">
-                  <a:solidFill>
-                    <a:srgbClr val="16130E"/>
-                  </a:solidFill>
-                  <a:latin typeface="Georgia" panose="02040502050405020303" pitchFamily="18" charset="0"/>
-                </a:rPr>
-                <a:t>Bidwire  </a:t>
-              </a:r>
-              <a:r>
-                <a:rPr sz="750" b="0" i="0">
-                  <a:solidFill>
-                    <a:srgbClr val="9C937F"/>
-                  </a:solidFill>
-                  <a:latin typeface="Inter" panose="020B0502030000000004" pitchFamily="34" charset="0"/>
-                </a:rPr>
-                <a:t>Saleroom</a:t>
-              </a:r>
-            </a:p>
-          </p:txBody>
-        </p:sp>
-        <p:sp>
-          <p:nvSpPr>
-            <p:cNvPr id="30" name="Rounded Rectangle 29"/>
-            <p:cNvSpPr/>
-            <p:nvPr/>
-          </p:nvSpPr>
-          <p:spPr>
-            <a:xfrm>
-              <a:off x="832104" y="2514600"/>
-              <a:ext cx="3730386" cy="1421458"/>
-            </a:xfrm>
-            <a:prstGeom prst="roundRect">
-              <a:avLst>
-                <a:gd name="adj" fmla="val 3859"/>
-              </a:avLst>
-            </a:prstGeom>
-            <a:solidFill>
-              <a:srgbClr val="0F0E0C"/>
-            </a:solidFill>
-            <a:ln>
-              <a:noFill/>
-            </a:ln>
-          </p:spPr>
-          <p:txBody>
-            <a:bodyPr rtlCol="0" anchor="ctr"/>
-            <a:lstStyle/>
-            <a:p>
-              <a:pPr algn="ctr"/>
-            </a:p>
-          </p:txBody>
-        </p:sp>
-        <p:sp>
-          <p:nvSpPr>
-            <p:cNvPr id="31" name="Rounded Rectangle 30"/>
-            <p:cNvSpPr/>
-            <p:nvPr/>
-          </p:nvSpPr>
-          <p:spPr>
-            <a:xfrm>
-              <a:off x="877824" y="2560320"/>
-              <a:ext cx="3638946" cy="1330018"/>
-            </a:xfrm>
-            <a:prstGeom prst="roundRect">
-              <a:avLst>
-                <a:gd name="adj" fmla="val 2750"/>
-              </a:avLst>
-            </a:prstGeom>
-            <a:noFill/>
-            <a:ln w="6350">
-              <a:solidFill>
-                <a:srgbClr val="B0894F">
-                  <a:alpha val="60000"/>
-                </a:srgbClr>
-              </a:solidFill>
-            </a:ln>
-          </p:spPr>
-          <p:txBody>
-            <a:bodyPr rtlCol="0" anchor="ctr"/>
-            <a:lstStyle/>
-            <a:p>
-              <a:pPr algn="ctr"/>
-            </a:p>
-          </p:txBody>
-        </p:sp>
-        <p:sp>
-          <p:nvSpPr>
-            <p:cNvPr id="32" name="TextBox 31"/>
-            <p:cNvSpPr txBox="1"/>
-            <p:nvPr/>
-          </p:nvSpPr>
-          <p:spPr>
-            <a:xfrm>
-              <a:off x="996696" y="2606040"/>
-              <a:ext cx="3456066" cy="219456"/>
-            </a:xfrm>
-            <a:prstGeom prst="rect">
-              <a:avLst/>
-            </a:prstGeom>
-            <a:noFill/>
-          </p:spPr>
-          <p:txBody>
-            <a:bodyPr wrap="square" lIns="0" rIns="0" tIns="0" bIns="0" anchor="ctr">
-              <a:noAutofit/>
-            </a:bodyPr>
-            <a:lstStyle/>
-            <a:p>
-              <a:pPr algn="l"/>
-              <a:r>
-                <a:rPr sz="600" b="1" i="0" spc="110">
-                  <a:solidFill>
-                    <a:srgbClr val="B0894F"/>
-                  </a:solidFill>
-                  <a:latin typeface="Inter" panose="020B0502030000000004" pitchFamily="34" charset="0"/>
-                </a:rPr>
-                <a:t>LOT · HEADPHONES · OPENED BY CLAUDE</a:t>
-              </a:r>
-            </a:p>
-          </p:txBody>
-        </p:sp>
-        <p:sp>
-          <p:nvSpPr>
-            <p:cNvPr id="33" name="TextBox 32"/>
-            <p:cNvSpPr txBox="1"/>
-            <p:nvPr/>
-          </p:nvSpPr>
-          <p:spPr>
-            <a:xfrm>
-              <a:off x="996696" y="2816352"/>
-              <a:ext cx="3456066" cy="182880"/>
-            </a:xfrm>
-            <a:prstGeom prst="rect">
-              <a:avLst/>
-            </a:prstGeom>
-            <a:noFill/>
-          </p:spPr>
-          <p:txBody>
-            <a:bodyPr wrap="square" lIns="0" rIns="0" tIns="0" bIns="0" anchor="ctr">
-              <a:noAutofit/>
-            </a:bodyPr>
-            <a:lstStyle/>
-            <a:p>
-              <a:pPr algn="l"/>
-              <a:r>
-                <a:rPr sz="700" b="0" i="0">
-                  <a:solidFill>
-                    <a:srgbClr val="8C8270"/>
-                  </a:solidFill>
-                  <a:latin typeface="Inter" panose="020B0502030000000004" pitchFamily="34" charset="0"/>
-                </a:rPr>
-                <a:t>Best verified offer</a:t>
-              </a:r>
-            </a:p>
-          </p:txBody>
-        </p:sp>
-        <p:sp>
-          <p:nvSpPr>
-            <p:cNvPr id="34" name="TextBox 33"/>
-            <p:cNvSpPr txBox="1"/>
-            <p:nvPr/>
-          </p:nvSpPr>
-          <p:spPr>
-            <a:xfrm>
-              <a:off x="996696" y="2971800"/>
-              <a:ext cx="3456066" cy="568583"/>
-            </a:xfrm>
-            <a:prstGeom prst="rect">
-              <a:avLst/>
-            </a:prstGeom>
-            <a:noFill/>
-          </p:spPr>
-          <p:txBody>
-            <a:bodyPr wrap="square" lIns="0" rIns="0" tIns="0" bIns="0" anchor="ctr">
-              <a:noAutofit/>
-            </a:bodyPr>
-            <a:lstStyle/>
-            <a:p>
-              <a:pPr algn="l"/>
-              <a:r>
-                <a:rPr sz="2400" b="0" i="0">
-                  <a:solidFill>
-                    <a:srgbClr val="F3E9D2"/>
-                  </a:solidFill>
-                  <a:latin typeface="Georgia" panose="02040502050405020303" pitchFamily="18" charset="0"/>
-                </a:rPr>
-                <a:t>$319.99</a:t>
-              </a:r>
-            </a:p>
-          </p:txBody>
-        </p:sp>
-        <p:sp>
-          <p:nvSpPr>
-            <p:cNvPr id="35" name="TextBox 34"/>
-            <p:cNvSpPr txBox="1"/>
-            <p:nvPr/>
-          </p:nvSpPr>
-          <p:spPr>
-            <a:xfrm>
-              <a:off x="996696" y="3606874"/>
-              <a:ext cx="3456066" cy="201168"/>
-            </a:xfrm>
-            <a:prstGeom prst="rect">
-              <a:avLst/>
-            </a:prstGeom>
-            <a:noFill/>
-          </p:spPr>
-          <p:txBody>
-            <a:bodyPr wrap="square" lIns="0" rIns="0" tIns="0" bIns="0" anchor="ctr">
-              <a:noAutofit/>
-            </a:bodyPr>
-            <a:lstStyle/>
-            <a:p>
-              <a:pPr algn="l"/>
-              <a:r>
-                <a:rPr sz="750" b="0" i="0">
-                  <a:solidFill>
-                    <a:srgbClr val="F3E9D2"/>
-                  </a:solidFill>
-                  <a:latin typeface="Inter" panose="020B0502030000000004" pitchFamily="34" charset="0"/>
-                </a:rPr>
-                <a:t>Last Unit Labs</a:t>
-              </a:r>
-            </a:p>
-          </p:txBody>
-        </p:sp>
-        <p:sp>
-          <p:nvSpPr>
-            <p:cNvPr id="36" name="Rounded Rectangle 35"/>
-            <p:cNvSpPr/>
-            <p:nvPr/>
-          </p:nvSpPr>
-          <p:spPr>
-            <a:xfrm>
-              <a:off x="4699650" y="2514600"/>
-              <a:ext cx="1874886" cy="1421458"/>
-            </a:xfrm>
-            <a:prstGeom prst="roundRect">
-              <a:avLst>
-                <a:gd name="adj" fmla="val 2573"/>
-              </a:avLst>
-            </a:prstGeom>
-            <a:solidFill>
-              <a:srgbClr val="FFFDF7"/>
-            </a:solidFill>
-            <a:ln w="9525">
-              <a:solidFill>
-                <a:srgbClr val="E2D9C6"/>
-              </a:solidFill>
-            </a:ln>
-          </p:spPr>
-          <p:txBody>
-            <a:bodyPr rtlCol="0" anchor="ctr"/>
-            <a:lstStyle/>
-            <a:p>
-              <a:pPr algn="ctr"/>
-            </a:p>
-          </p:txBody>
-        </p:sp>
-        <p:sp>
-          <p:nvSpPr>
-            <p:cNvPr id="37" name="TextBox 36"/>
-            <p:cNvSpPr txBox="1"/>
-            <p:nvPr/>
-          </p:nvSpPr>
-          <p:spPr>
-            <a:xfrm>
-              <a:off x="4809378" y="2587752"/>
-              <a:ext cx="1463040" cy="219456"/>
-            </a:xfrm>
-            <a:prstGeom prst="rect">
-              <a:avLst/>
-            </a:prstGeom>
-            <a:noFill/>
-          </p:spPr>
-          <p:txBody>
-            <a:bodyPr wrap="square" lIns="0" rIns="0" tIns="0" bIns="0" anchor="ctr">
-              <a:noAutofit/>
-            </a:bodyPr>
-            <a:lstStyle/>
-            <a:p>
-              <a:pPr algn="l"/>
-              <a:r>
-                <a:rPr sz="600" b="1" i="0" spc="110">
-                  <a:solidFill>
-                    <a:srgbClr val="9C937F"/>
-                  </a:solidFill>
-                  <a:latin typeface="Inter" panose="020B0502030000000004" pitchFamily="34" charset="0"/>
-                </a:rPr>
-                <a:t>AGENT BIDDERS</a:t>
-              </a:r>
-            </a:p>
-          </p:txBody>
-        </p:sp>
-        <p:sp>
-          <p:nvSpPr>
-            <p:cNvPr id="38" name="TextBox 37"/>
-            <p:cNvSpPr txBox="1"/>
-            <p:nvPr/>
-          </p:nvSpPr>
-          <p:spPr>
-            <a:xfrm>
-              <a:off x="4809378" y="2825496"/>
-              <a:ext cx="1645920" cy="182880"/>
-            </a:xfrm>
-            <a:prstGeom prst="rect">
-              <a:avLst/>
-            </a:prstGeom>
-            <a:noFill/>
-          </p:spPr>
-          <p:txBody>
-            <a:bodyPr wrap="square" lIns="0" rIns="0" tIns="0" bIns="0" anchor="ctr">
-              <a:noAutofit/>
-            </a:bodyPr>
-            <a:lstStyle/>
-            <a:p>
-              <a:pPr algn="l"/>
-              <a:r>
-                <a:rPr sz="650" b="0" i="0">
-                  <a:solidFill>
-                    <a:srgbClr val="233F6E"/>
-                  </a:solidFill>
-                  <a:latin typeface="JetBrains Mono" panose="02000009000000000000" pitchFamily="49" charset="0"/>
-                </a:rPr>
-                <a:t>find_offers</a:t>
-              </a:r>
-            </a:p>
-          </p:txBody>
-        </p:sp>
-        <p:sp>
-          <p:nvSpPr>
-            <p:cNvPr id="39" name="TextBox 38"/>
-            <p:cNvSpPr txBox="1"/>
-            <p:nvPr/>
-          </p:nvSpPr>
-          <p:spPr>
-            <a:xfrm>
-              <a:off x="4809378" y="3054096"/>
-              <a:ext cx="1645920" cy="182880"/>
-            </a:xfrm>
-            <a:prstGeom prst="rect">
-              <a:avLst/>
-            </a:prstGeom>
-            <a:noFill/>
-          </p:spPr>
-          <p:txBody>
-            <a:bodyPr wrap="square" lIns="0" rIns="0" tIns="0" bIns="0" anchor="ctr">
-              <a:noAutofit/>
-            </a:bodyPr>
-            <a:lstStyle/>
-            <a:p>
-              <a:pPr algn="l"/>
-              <a:r>
-                <a:rPr sz="650" b="0" i="0">
-                  <a:solidFill>
-                    <a:srgbClr val="233F6E"/>
-                  </a:solidFill>
-                  <a:latin typeface="JetBrains Mono" panose="02000009000000000000" pitchFamily="49" charset="0"/>
-                </a:rPr>
-                <a:t>buy_offer</a:t>
-              </a:r>
-            </a:p>
-          </p:txBody>
-        </p:sp>
-        <p:sp>
-          <p:nvSpPr>
-            <p:cNvPr id="40" name="TextBox 39"/>
-            <p:cNvSpPr txBox="1"/>
-            <p:nvPr/>
-          </p:nvSpPr>
-          <p:spPr>
-            <a:xfrm>
-              <a:off x="4809378" y="3282696"/>
-              <a:ext cx="1645920" cy="182880"/>
-            </a:xfrm>
-            <a:prstGeom prst="rect">
-              <a:avLst/>
-            </a:prstGeom>
-            <a:noFill/>
-          </p:spPr>
-          <p:txBody>
-            <a:bodyPr wrap="square" lIns="0" rIns="0" tIns="0" bIns="0" anchor="ctr">
-              <a:noAutofit/>
-            </a:bodyPr>
-            <a:lstStyle/>
-            <a:p>
-              <a:pPr algn="l"/>
-              <a:r>
-                <a:rPr sz="650" b="0" i="0">
-                  <a:solidFill>
-                    <a:srgbClr val="233F6E"/>
-                  </a:solidFill>
-                  <a:latin typeface="JetBrains Mono" panose="02000009000000000000" pitchFamily="49" charset="0"/>
-                </a:rPr>
-                <a:t>check_approval</a:t>
-              </a:r>
-            </a:p>
-          </p:txBody>
-        </p:sp>
-        <p:sp>
-          <p:nvSpPr>
-            <p:cNvPr id="41" name="Rounded Rectangle 40"/>
-            <p:cNvSpPr/>
-            <p:nvPr/>
-          </p:nvSpPr>
-          <p:spPr>
-            <a:xfrm>
-              <a:off x="832104" y="4064074"/>
-              <a:ext cx="5742432" cy="1313741"/>
-            </a:xfrm>
-            <a:prstGeom prst="roundRect">
-              <a:avLst>
-                <a:gd name="adj" fmla="val 2784"/>
-              </a:avLst>
-            </a:prstGeom>
-            <a:solidFill>
-              <a:srgbClr val="FFFDF7"/>
-            </a:solidFill>
-            <a:ln w="9525">
-              <a:solidFill>
-                <a:srgbClr val="E2D9C6"/>
-              </a:solidFill>
-            </a:ln>
-          </p:spPr>
-          <p:txBody>
-            <a:bodyPr rtlCol="0" anchor="ctr"/>
-            <a:lstStyle/>
-            <a:p>
-              <a:pPr algn="ctr"/>
-            </a:p>
-          </p:txBody>
-        </p:sp>
-        <p:sp>
-          <p:nvSpPr>
-            <p:cNvPr id="42" name="TextBox 41"/>
-            <p:cNvSpPr txBox="1"/>
-            <p:nvPr/>
-          </p:nvSpPr>
-          <p:spPr>
-            <a:xfrm>
-              <a:off x="923544" y="4091506"/>
-              <a:ext cx="365760" cy="251775"/>
-            </a:xfrm>
-            <a:prstGeom prst="rect">
-              <a:avLst/>
-            </a:prstGeom>
-            <a:noFill/>
-          </p:spPr>
-          <p:txBody>
-            <a:bodyPr wrap="square" lIns="0" rIns="0" tIns="0" bIns="0" anchor="ctr">
-              <a:noAutofit/>
-            </a:bodyPr>
-            <a:lstStyle/>
-            <a:p>
-              <a:pPr algn="l"/>
-              <a:r>
-                <a:rPr sz="900" b="0" i="0">
-                  <a:solidFill>
-                    <a:srgbClr val="16130E"/>
-                  </a:solidFill>
-                  <a:latin typeface="Georgia" panose="02040502050405020303" pitchFamily="18" charset="0"/>
-                </a:rPr>
-                <a:t>1</a:t>
-              </a:r>
-            </a:p>
-          </p:txBody>
-        </p:sp>
-        <p:sp>
-          <p:nvSpPr>
-            <p:cNvPr id="43" name="TextBox 42"/>
-            <p:cNvSpPr txBox="1"/>
-            <p:nvPr/>
-          </p:nvSpPr>
-          <p:spPr>
-            <a:xfrm>
-              <a:off x="1243584" y="4091506"/>
-              <a:ext cx="3008376" cy="251775"/>
-            </a:xfrm>
-            <a:prstGeom prst="rect">
-              <a:avLst/>
-            </a:prstGeom>
-            <a:noFill/>
-          </p:spPr>
-          <p:txBody>
-            <a:bodyPr wrap="square" lIns="0" rIns="0" tIns="0" bIns="0" anchor="ctr">
-              <a:noAutofit/>
-            </a:bodyPr>
-            <a:lstStyle/>
-            <a:p>
-              <a:pPr algn="l"/>
-              <a:r>
-                <a:rPr sz="750" b="1" i="0">
-                  <a:solidFill>
-                    <a:srgbClr val="16130E"/>
-                  </a:solidFill>
-                  <a:latin typeface="Inter" panose="020B0502030000000004" pitchFamily="34" charset="0"/>
-                </a:rPr>
-                <a:t>Last Unit Labs</a:t>
-              </a:r>
-            </a:p>
-          </p:txBody>
-        </p:sp>
-        <p:sp>
-          <p:nvSpPr>
-            <p:cNvPr id="44" name="Rounded Rectangle 43"/>
-            <p:cNvSpPr/>
-            <p:nvPr/>
-          </p:nvSpPr>
-          <p:spPr>
-            <a:xfrm>
-              <a:off x="6013704" y="4139669"/>
-              <a:ext cx="423672" cy="155448"/>
-            </a:xfrm>
-            <a:prstGeom prst="roundRect">
-              <a:avLst>
-                <a:gd name="adj" fmla="val 50000"/>
-              </a:avLst>
-            </a:prstGeom>
-            <a:solidFill>
-              <a:srgbClr val="F5EBD6"/>
-            </a:solidFill>
-            <a:ln>
-              <a:noFill/>
-            </a:ln>
-          </p:spPr>
-          <p:txBody>
-            <a:bodyPr rtlCol="0" anchor="ctr"/>
-            <a:lstStyle/>
-            <a:p>
-              <a:pPr algn="ctr"/>
-            </a:p>
-          </p:txBody>
-        </p:sp>
-        <p:sp>
-          <p:nvSpPr>
-            <p:cNvPr id="45" name="TextBox 44"/>
-            <p:cNvSpPr txBox="1"/>
-            <p:nvPr/>
-          </p:nvSpPr>
-          <p:spPr>
-            <a:xfrm>
-              <a:off x="6013704" y="4139669"/>
-              <a:ext cx="423672" cy="155448"/>
-            </a:xfrm>
-            <a:prstGeom prst="rect">
-              <a:avLst/>
-            </a:prstGeom>
-            <a:noFill/>
-          </p:spPr>
-          <p:txBody>
-            <a:bodyPr wrap="square" lIns="0" rIns="0" tIns="0" bIns="0" anchor="ctr">
-              <a:noAutofit/>
-            </a:bodyPr>
-            <a:lstStyle/>
-            <a:p>
-              <a:pPr algn="ctr"/>
-              <a:r>
-                <a:rPr sz="650" b="1" i="0">
-                  <a:solidFill>
-                    <a:srgbClr val="B0894F"/>
-                  </a:solidFill>
-                  <a:latin typeface="Inter" panose="020B0502030000000004" pitchFamily="34" charset="0"/>
-                </a:rPr>
-                <a:t>Hammer</a:t>
-              </a:r>
-            </a:p>
-          </p:txBody>
-        </p:sp>
-        <p:sp>
-          <p:nvSpPr>
-            <p:cNvPr id="46" name="Rectangle 45"/>
-            <p:cNvSpPr/>
-            <p:nvPr/>
-          </p:nvSpPr>
-          <p:spPr>
-            <a:xfrm>
-              <a:off x="877824" y="4343281"/>
-              <a:ext cx="5650992" cy="5486"/>
-            </a:xfrm>
-            <a:prstGeom prst="rect">
-              <a:avLst/>
-            </a:prstGeom>
-            <a:solidFill>
-              <a:srgbClr val="E2D9C6"/>
-            </a:solidFill>
-            <a:ln>
-              <a:noFill/>
-            </a:ln>
-          </p:spPr>
-          <p:txBody>
-            <a:bodyPr rtlCol="0" anchor="ctr"/>
-            <a:lstStyle/>
-            <a:p>
-              <a:pPr algn="ctr"/>
-            </a:p>
-          </p:txBody>
-        </p:sp>
-        <p:sp>
-          <p:nvSpPr>
-            <p:cNvPr id="47" name="TextBox 46"/>
-            <p:cNvSpPr txBox="1"/>
-            <p:nvPr/>
-          </p:nvSpPr>
-          <p:spPr>
-            <a:xfrm>
-              <a:off x="923544" y="4343281"/>
-              <a:ext cx="365760" cy="251775"/>
-            </a:xfrm>
-            <a:prstGeom prst="rect">
-              <a:avLst/>
-            </a:prstGeom>
-            <a:noFill/>
-          </p:spPr>
-          <p:txBody>
-            <a:bodyPr wrap="square" lIns="0" rIns="0" tIns="0" bIns="0" anchor="ctr">
-              <a:noAutofit/>
-            </a:bodyPr>
-            <a:lstStyle/>
-            <a:p>
-              <a:pPr algn="l"/>
-              <a:r>
-                <a:rPr sz="900" b="0" i="0">
-                  <a:solidFill>
-                    <a:srgbClr val="16130E"/>
-                  </a:solidFill>
-                  <a:latin typeface="Georgia" panose="02040502050405020303" pitchFamily="18" charset="0"/>
-                </a:rPr>
-                <a:t>2</a:t>
-              </a:r>
-            </a:p>
-          </p:txBody>
-        </p:sp>
-        <p:sp>
-          <p:nvSpPr>
-            <p:cNvPr id="48" name="TextBox 47"/>
-            <p:cNvSpPr txBox="1"/>
-            <p:nvPr/>
-          </p:nvSpPr>
-          <p:spPr>
-            <a:xfrm>
-              <a:off x="1243584" y="4343281"/>
-              <a:ext cx="3008376" cy="251775"/>
-            </a:xfrm>
-            <a:prstGeom prst="rect">
-              <a:avLst/>
-            </a:prstGeom>
-            <a:noFill/>
-          </p:spPr>
-          <p:txBody>
-            <a:bodyPr wrap="square" lIns="0" rIns="0" tIns="0" bIns="0" anchor="ctr">
-              <a:noAutofit/>
-            </a:bodyPr>
-            <a:lstStyle/>
-            <a:p>
-              <a:pPr algn="l"/>
-              <a:r>
-                <a:rPr sz="750" b="1" i="0">
-                  <a:solidFill>
-                    <a:srgbClr val="16130E"/>
-                  </a:solidFill>
-                  <a:latin typeface="Inter" panose="020B0502030000000004" pitchFamily="34" charset="0"/>
-                </a:rPr>
-                <a:t>Parcel &amp; Pine</a:t>
-              </a:r>
-            </a:p>
-          </p:txBody>
-        </p:sp>
-        <p:sp>
-          <p:nvSpPr>
-            <p:cNvPr id="49" name="Rounded Rectangle 48"/>
-            <p:cNvSpPr/>
-            <p:nvPr/>
-          </p:nvSpPr>
-          <p:spPr>
-            <a:xfrm>
-              <a:off x="5921248" y="4391445"/>
-              <a:ext cx="516128" cy="155448"/>
-            </a:xfrm>
-            <a:prstGeom prst="roundRect">
-              <a:avLst>
-                <a:gd name="adj" fmla="val 50000"/>
-              </a:avLst>
-            </a:prstGeom>
-            <a:solidFill>
-              <a:srgbClr val="E5F0E8"/>
-            </a:solidFill>
-            <a:ln>
-              <a:noFill/>
-            </a:ln>
-          </p:spPr>
-          <p:txBody>
-            <a:bodyPr rtlCol="0" anchor="ctr"/>
-            <a:lstStyle/>
-            <a:p>
-              <a:pPr algn="ctr"/>
-            </a:p>
-          </p:txBody>
-        </p:sp>
-        <p:sp>
-          <p:nvSpPr>
-            <p:cNvPr id="50" name="TextBox 49"/>
-            <p:cNvSpPr txBox="1"/>
-            <p:nvPr/>
-          </p:nvSpPr>
-          <p:spPr>
-            <a:xfrm>
-              <a:off x="5921248" y="4391445"/>
-              <a:ext cx="516128" cy="155448"/>
-            </a:xfrm>
-            <a:prstGeom prst="rect">
-              <a:avLst/>
-            </a:prstGeom>
-            <a:noFill/>
-          </p:spPr>
-          <p:txBody>
-            <a:bodyPr wrap="square" lIns="0" rIns="0" tIns="0" bIns="0" anchor="ctr">
-              <a:noAutofit/>
-            </a:bodyPr>
-            <a:lstStyle/>
-            <a:p>
-              <a:pPr algn="ctr"/>
-              <a:r>
-                <a:rPr sz="650" b="1" i="0">
-                  <a:solidFill>
-                    <a:srgbClr val="2D6A48"/>
-                  </a:solidFill>
-                  <a:latin typeface="Inter" panose="020B0502030000000004" pitchFamily="34" charset="0"/>
-                </a:rPr>
-                <a:t>Verified</a:t>
-              </a:r>
-            </a:p>
-          </p:txBody>
-        </p:sp>
-        <p:sp>
-          <p:nvSpPr>
-            <p:cNvPr id="51" name="Rectangle 50"/>
-            <p:cNvSpPr/>
-            <p:nvPr/>
-          </p:nvSpPr>
-          <p:spPr>
-            <a:xfrm>
-              <a:off x="877824" y="4595057"/>
-              <a:ext cx="5650992" cy="5486"/>
-            </a:xfrm>
-            <a:prstGeom prst="rect">
-              <a:avLst/>
-            </a:prstGeom>
-            <a:solidFill>
-              <a:srgbClr val="E2D9C6"/>
-            </a:solidFill>
-            <a:ln>
-              <a:noFill/>
-            </a:ln>
-          </p:spPr>
-          <p:txBody>
-            <a:bodyPr rtlCol="0" anchor="ctr"/>
-            <a:lstStyle/>
-            <a:p>
-              <a:pPr algn="ctr"/>
-            </a:p>
-          </p:txBody>
-        </p:sp>
-        <p:sp>
-          <p:nvSpPr>
-            <p:cNvPr id="52" name="TextBox 51"/>
-            <p:cNvSpPr txBox="1"/>
-            <p:nvPr/>
-          </p:nvSpPr>
-          <p:spPr>
-            <a:xfrm>
-              <a:off x="923544" y="4595057"/>
-              <a:ext cx="365760" cy="251775"/>
-            </a:xfrm>
-            <a:prstGeom prst="rect">
-              <a:avLst/>
-            </a:prstGeom>
-            <a:noFill/>
-          </p:spPr>
-          <p:txBody>
-            <a:bodyPr wrap="square" lIns="0" rIns="0" tIns="0" bIns="0" anchor="ctr">
-              <a:noAutofit/>
-            </a:bodyPr>
-            <a:lstStyle/>
-            <a:p>
-              <a:pPr algn="l"/>
-              <a:r>
-                <a:rPr sz="900" b="0" i="0">
-                  <a:solidFill>
-                    <a:srgbClr val="16130E"/>
-                  </a:solidFill>
-                  <a:latin typeface="Georgia" panose="02040502050405020303" pitchFamily="18" charset="0"/>
-                </a:rPr>
-                <a:t>3</a:t>
-              </a:r>
-            </a:p>
-          </p:txBody>
-        </p:sp>
-        <p:sp>
-          <p:nvSpPr>
-            <p:cNvPr id="53" name="TextBox 52"/>
-            <p:cNvSpPr txBox="1"/>
-            <p:nvPr/>
-          </p:nvSpPr>
-          <p:spPr>
-            <a:xfrm>
-              <a:off x="1243584" y="4595057"/>
-              <a:ext cx="3008376" cy="251775"/>
-            </a:xfrm>
-            <a:prstGeom prst="rect">
-              <a:avLst/>
-            </a:prstGeom>
-            <a:noFill/>
-          </p:spPr>
-          <p:txBody>
-            <a:bodyPr wrap="square" lIns="0" rIns="0" tIns="0" bIns="0" anchor="ctr">
-              <a:noAutofit/>
-            </a:bodyPr>
-            <a:lstStyle/>
-            <a:p>
-              <a:pPr algn="l"/>
-              <a:r>
-                <a:rPr sz="750" b="1" i="0">
-                  <a:solidFill>
-                    <a:srgbClr val="16130E"/>
-                  </a:solidFill>
-                  <a:latin typeface="Inter" panose="020B0502030000000004" pitchFamily="34" charset="0"/>
-                </a:rPr>
-                <a:t>Northwind Electronics</a:t>
-              </a:r>
-            </a:p>
-          </p:txBody>
-        </p:sp>
-        <p:sp>
-          <p:nvSpPr>
-            <p:cNvPr id="54" name="Rounded Rectangle 53"/>
-            <p:cNvSpPr/>
-            <p:nvPr/>
-          </p:nvSpPr>
-          <p:spPr>
-            <a:xfrm>
-              <a:off x="5921248" y="4643220"/>
-              <a:ext cx="516128" cy="155448"/>
-            </a:xfrm>
-            <a:prstGeom prst="roundRect">
-              <a:avLst>
-                <a:gd name="adj" fmla="val 50000"/>
-              </a:avLst>
-            </a:prstGeom>
-            <a:solidFill>
-              <a:srgbClr val="E5F0E8"/>
-            </a:solidFill>
-            <a:ln>
-              <a:noFill/>
-            </a:ln>
-          </p:spPr>
-          <p:txBody>
-            <a:bodyPr rtlCol="0" anchor="ctr"/>
-            <a:lstStyle/>
-            <a:p>
-              <a:pPr algn="ctr"/>
-            </a:p>
-          </p:txBody>
-        </p:sp>
-        <p:sp>
-          <p:nvSpPr>
-            <p:cNvPr id="55" name="TextBox 54"/>
-            <p:cNvSpPr txBox="1"/>
-            <p:nvPr/>
-          </p:nvSpPr>
-          <p:spPr>
-            <a:xfrm>
-              <a:off x="5921248" y="4643220"/>
-              <a:ext cx="516128" cy="155448"/>
-            </a:xfrm>
-            <a:prstGeom prst="rect">
-              <a:avLst/>
-            </a:prstGeom>
-            <a:noFill/>
-          </p:spPr>
-          <p:txBody>
-            <a:bodyPr wrap="square" lIns="0" rIns="0" tIns="0" bIns="0" anchor="ctr">
-              <a:noAutofit/>
-            </a:bodyPr>
-            <a:lstStyle/>
-            <a:p>
-              <a:pPr algn="ctr"/>
-              <a:r>
-                <a:rPr sz="650" b="1" i="0">
-                  <a:solidFill>
-                    <a:srgbClr val="2D6A48"/>
-                  </a:solidFill>
-                  <a:latin typeface="Inter" panose="020B0502030000000004" pitchFamily="34" charset="0"/>
-                </a:rPr>
-                <a:t>Verified</a:t>
-              </a:r>
-            </a:p>
-          </p:txBody>
-        </p:sp>
-        <p:sp>
-          <p:nvSpPr>
-            <p:cNvPr id="56" name="Rectangle 55"/>
-            <p:cNvSpPr/>
-            <p:nvPr/>
-          </p:nvSpPr>
-          <p:spPr>
-            <a:xfrm>
-              <a:off x="877824" y="4846832"/>
-              <a:ext cx="5650992" cy="5486"/>
-            </a:xfrm>
-            <a:prstGeom prst="rect">
-              <a:avLst/>
-            </a:prstGeom>
-            <a:solidFill>
-              <a:srgbClr val="E2D9C6"/>
-            </a:solidFill>
-            <a:ln>
-              <a:noFill/>
-            </a:ln>
-          </p:spPr>
-          <p:txBody>
-            <a:bodyPr rtlCol="0" anchor="ctr"/>
-            <a:lstStyle/>
-            <a:p>
-              <a:pPr algn="ctr"/>
-            </a:p>
-          </p:txBody>
-        </p:sp>
-        <p:sp>
-          <p:nvSpPr>
-            <p:cNvPr id="57" name="TextBox 56"/>
-            <p:cNvSpPr txBox="1"/>
-            <p:nvPr/>
-          </p:nvSpPr>
-          <p:spPr>
-            <a:xfrm>
-              <a:off x="923544" y="4846832"/>
-              <a:ext cx="365760" cy="251775"/>
-            </a:xfrm>
-            <a:prstGeom prst="rect">
-              <a:avLst/>
-            </a:prstGeom>
-            <a:noFill/>
-          </p:spPr>
-          <p:txBody>
-            <a:bodyPr wrap="square" lIns="0" rIns="0" tIns="0" bIns="0" anchor="ctr">
-              <a:noAutofit/>
-            </a:bodyPr>
-            <a:lstStyle/>
-            <a:p>
-              <a:pPr algn="l"/>
-              <a:r>
-                <a:rPr sz="900" b="0" i="0">
-                  <a:solidFill>
-                    <a:srgbClr val="16130E"/>
-                  </a:solidFill>
-                  <a:latin typeface="Georgia" panose="02040502050405020303" pitchFamily="18" charset="0"/>
-                </a:rPr>
-                <a:t>5</a:t>
-              </a:r>
-            </a:p>
-          </p:txBody>
-        </p:sp>
-        <p:sp>
-          <p:nvSpPr>
-            <p:cNvPr id="58" name="TextBox 57"/>
-            <p:cNvSpPr txBox="1"/>
-            <p:nvPr/>
-          </p:nvSpPr>
-          <p:spPr>
-            <a:xfrm>
-              <a:off x="1243584" y="4846832"/>
-              <a:ext cx="3008376" cy="251775"/>
-            </a:xfrm>
-            <a:prstGeom prst="rect">
-              <a:avLst/>
-            </a:prstGeom>
-            <a:noFill/>
-          </p:spPr>
-          <p:txBody>
-            <a:bodyPr wrap="square" lIns="0" rIns="0" tIns="0" bIns="0" anchor="ctr">
-              <a:noAutofit/>
-            </a:bodyPr>
-            <a:lstStyle/>
-            <a:p>
-              <a:pPr algn="l"/>
-              <a:r>
-                <a:rPr sz="750" b="1" i="0">
-                  <a:solidFill>
-                    <a:srgbClr val="16130E"/>
-                  </a:solidFill>
-                  <a:latin typeface="Inter" panose="020B0502030000000004" pitchFamily="34" charset="0"/>
-                </a:rPr>
-                <a:t>MegaMart Ads Co.</a:t>
-              </a:r>
-            </a:p>
-          </p:txBody>
-        </p:sp>
-        <p:sp>
-          <p:nvSpPr>
-            <p:cNvPr id="59" name="Rounded Rectangle 58"/>
-            <p:cNvSpPr/>
-            <p:nvPr/>
-          </p:nvSpPr>
-          <p:spPr>
-            <a:xfrm>
-              <a:off x="5690108" y="4894996"/>
-              <a:ext cx="747268" cy="155448"/>
-            </a:xfrm>
-            <a:prstGeom prst="roundRect">
-              <a:avLst>
-                <a:gd name="adj" fmla="val 50000"/>
-              </a:avLst>
-            </a:prstGeom>
-            <a:solidFill>
-              <a:srgbClr val="F6EBD6"/>
-            </a:solidFill>
-            <a:ln>
-              <a:noFill/>
-            </a:ln>
-          </p:spPr>
-          <p:txBody>
-            <a:bodyPr rtlCol="0" anchor="ctr"/>
-            <a:lstStyle/>
-            <a:p>
-              <a:pPr algn="ctr"/>
-            </a:p>
-          </p:txBody>
-        </p:sp>
-        <p:sp>
-          <p:nvSpPr>
-            <p:cNvPr id="60" name="TextBox 59"/>
-            <p:cNvSpPr txBox="1"/>
-            <p:nvPr/>
-          </p:nvSpPr>
-          <p:spPr>
-            <a:xfrm>
-              <a:off x="5690108" y="4894996"/>
-              <a:ext cx="747268" cy="155448"/>
-            </a:xfrm>
-            <a:prstGeom prst="rect">
-              <a:avLst/>
-            </a:prstGeom>
-            <a:noFill/>
-          </p:spPr>
-          <p:txBody>
-            <a:bodyPr wrap="square" lIns="0" rIns="0" tIns="0" bIns="0" anchor="ctr">
-              <a:noAutofit/>
-            </a:bodyPr>
-            <a:lstStyle/>
-            <a:p>
-              <a:pPr algn="ctr"/>
-              <a:r>
-                <a:rPr sz="650" b="1" i="0">
-                  <a:solidFill>
-                    <a:srgbClr val="94641F"/>
-                  </a:solidFill>
-                  <a:latin typeface="Inter" panose="020B0502030000000004" pitchFamily="34" charset="0"/>
-                </a:rPr>
-                <a:t>Bribe ignored</a:t>
-              </a:r>
-            </a:p>
-          </p:txBody>
-        </p:sp>
-        <p:sp>
-          <p:nvSpPr>
-            <p:cNvPr id="61" name="Rectangle 60"/>
-            <p:cNvSpPr/>
-            <p:nvPr/>
-          </p:nvSpPr>
-          <p:spPr>
-            <a:xfrm>
-              <a:off x="877824" y="5098608"/>
-              <a:ext cx="5650992" cy="5486"/>
-            </a:xfrm>
-            <a:prstGeom prst="rect">
-              <a:avLst/>
-            </a:prstGeom>
-            <a:solidFill>
-              <a:srgbClr val="E2D9C6"/>
-            </a:solidFill>
-            <a:ln>
-              <a:noFill/>
-            </a:ln>
-          </p:spPr>
-          <p:txBody>
-            <a:bodyPr rtlCol="0" anchor="ctr"/>
-            <a:lstStyle/>
-            <a:p>
-              <a:pPr algn="ctr"/>
-            </a:p>
-          </p:txBody>
-        </p:sp>
-        <p:sp>
-          <p:nvSpPr>
-            <p:cNvPr id="62" name="TextBox 61"/>
-            <p:cNvSpPr txBox="1"/>
-            <p:nvPr/>
-          </p:nvSpPr>
-          <p:spPr>
-            <a:xfrm>
-              <a:off x="923544" y="5098608"/>
-              <a:ext cx="365760" cy="251775"/>
-            </a:xfrm>
-            <a:prstGeom prst="rect">
-              <a:avLst/>
-            </a:prstGeom>
-            <a:noFill/>
-          </p:spPr>
-          <p:txBody>
-            <a:bodyPr wrap="square" lIns="0" rIns="0" tIns="0" bIns="0" anchor="ctr">
-              <a:noAutofit/>
-            </a:bodyPr>
-            <a:lstStyle/>
-            <a:p>
-              <a:pPr algn="l"/>
-              <a:r>
-                <a:rPr sz="900" b="0" i="0">
-                  <a:solidFill>
-                    <a:srgbClr val="16130E"/>
-                  </a:solidFill>
-                  <a:latin typeface="Georgia" panose="02040502050405020303" pitchFamily="18" charset="0"/>
-                </a:rPr>
-                <a:t>—</a:t>
-              </a:r>
-            </a:p>
-          </p:txBody>
-        </p:sp>
-        <p:sp>
-          <p:nvSpPr>
-            <p:cNvPr id="63" name="TextBox 62"/>
-            <p:cNvSpPr txBox="1"/>
-            <p:nvPr/>
-          </p:nvSpPr>
-          <p:spPr>
-            <a:xfrm>
-              <a:off x="1243584" y="5098608"/>
-              <a:ext cx="3008376" cy="251775"/>
-            </a:xfrm>
-            <a:prstGeom prst="rect">
-              <a:avLst/>
-            </a:prstGeom>
-            <a:noFill/>
-          </p:spPr>
-          <p:txBody>
-            <a:bodyPr wrap="square" lIns="0" rIns="0" tIns="0" bIns="0" anchor="ctr">
-              <a:noAutofit/>
-            </a:bodyPr>
-            <a:lstStyle/>
-            <a:p>
-              <a:pPr algn="l"/>
-              <a:r>
-                <a:rPr sz="750" b="1" i="0">
-                  <a:solidFill>
-                    <a:srgbClr val="16130E"/>
-                  </a:solidFill>
-                  <a:latin typeface="Inter" panose="020B0502030000000004" pitchFamily="34" charset="0"/>
-                </a:rPr>
-                <a:t>DealDrop Direct</a:t>
-              </a:r>
-            </a:p>
-          </p:txBody>
-        </p:sp>
-        <p:sp>
-          <p:nvSpPr>
-            <p:cNvPr id="64" name="Rounded Rectangle 63"/>
-            <p:cNvSpPr/>
-            <p:nvPr/>
-          </p:nvSpPr>
-          <p:spPr>
-            <a:xfrm>
-              <a:off x="5875020" y="5146771"/>
-              <a:ext cx="562356" cy="155448"/>
-            </a:xfrm>
-            <a:prstGeom prst="roundRect">
-              <a:avLst>
-                <a:gd name="adj" fmla="val 50000"/>
-              </a:avLst>
-            </a:prstGeom>
-            <a:solidFill>
-              <a:srgbClr val="F6E3DF"/>
-            </a:solidFill>
-            <a:ln>
-              <a:noFill/>
-            </a:ln>
-          </p:spPr>
-          <p:txBody>
-            <a:bodyPr rtlCol="0" anchor="ctr"/>
-            <a:lstStyle/>
-            <a:p>
-              <a:pPr algn="ctr"/>
-            </a:p>
-          </p:txBody>
-        </p:sp>
-        <p:sp>
-          <p:nvSpPr>
-            <p:cNvPr id="65" name="TextBox 64"/>
-            <p:cNvSpPr txBox="1"/>
-            <p:nvPr/>
-          </p:nvSpPr>
-          <p:spPr>
-            <a:xfrm>
-              <a:off x="5875020" y="5146771"/>
-              <a:ext cx="562356" cy="155448"/>
-            </a:xfrm>
-            <a:prstGeom prst="rect">
-              <a:avLst/>
-            </a:prstGeom>
-            <a:noFill/>
-          </p:spPr>
-          <p:txBody>
-            <a:bodyPr wrap="square" lIns="0" rIns="0" tIns="0" bIns="0" anchor="ctr">
-              <a:noAutofit/>
-            </a:bodyPr>
-            <a:lstStyle/>
-            <a:p>
-              <a:pPr algn="ctr"/>
-              <a:r>
-                <a:rPr sz="650" b="1" i="0">
-                  <a:solidFill>
-                    <a:srgbClr val="8E2A22"/>
-                  </a:solidFill>
-                  <a:latin typeface="Inter" panose="020B0502030000000004" pitchFamily="34" charset="0"/>
-                </a:rPr>
-                <a:t>Withdrawn</a:t>
-              </a:r>
-            </a:p>
-          </p:txBody>
-        </p:sp>
-        <p:sp>
-          <p:nvSpPr>
-            <p:cNvPr id="66" name="TextBox 65"/>
-            <p:cNvSpPr txBox="1"/>
-            <p:nvPr/>
-          </p:nvSpPr>
-          <p:spPr>
-            <a:xfrm>
-              <a:off x="777240" y="5268087"/>
-              <a:ext cx="5852160" cy="182880"/>
-            </a:xfrm>
-            <a:prstGeom prst="rect">
-              <a:avLst/>
-            </a:prstGeom>
-            <a:noFill/>
-          </p:spPr>
-          <p:txBody>
-            <a:bodyPr wrap="square" lIns="0" rIns="0" tIns="0" bIns="0" anchor="ctr">
-              <a:noAutofit/>
-            </a:bodyPr>
-            <a:lstStyle/>
-            <a:p>
-              <a:pPr algn="r"/>
-              <a:r>
-                <a:rPr sz="700" b="0" i="0">
-                  <a:solidFill>
-                    <a:srgbClr val="9C937F"/>
-                  </a:solidFill>
-                  <a:latin typeface="JetBrains Mono" panose="02000009000000000000" pitchFamily="49" charset="0"/>
-                </a:rPr>
-                <a:t>Placeholder: screenshots/exchange-liar.png</a:t>
-              </a:r>
-            </a:p>
-          </p:txBody>
-        </p:sp>
+          </p:spPr>
+        </p:pic>
       </p:grpSp>
       <p:grpSp>
         <p:nvGrpSpPr>
-          <p:cNvPr id="67" name="Group 66"/>
+          <p:cNvPr id="27" name="Group 26"/>
           <p:cNvGrpSpPr/>
           <p:nvPr/>
         </p:nvGrpSpPr>
@@ -21954,7 +19260,7 @@
         </p:grpSpPr>
         <p:sp>
           <p:nvSpPr>
-            <p:cNvPr id="68" name="Rounded Rectangle 67"/>
+            <p:cNvPr id="28" name="Rounded Rectangle 27"/>
             <p:cNvSpPr/>
             <p:nvPr/>
           </p:nvSpPr>
@@ -21987,7 +19293,7 @@
         </p:sp>
         <p:sp>
           <p:nvSpPr>
-            <p:cNvPr id="69" name="Rounded Rectangle 68"/>
+            <p:cNvPr id="29" name="Rounded Rectangle 28"/>
             <p:cNvSpPr/>
             <p:nvPr/>
           </p:nvSpPr>
@@ -22018,7 +19324,7 @@
         </p:sp>
         <p:sp>
           <p:nvSpPr>
-            <p:cNvPr id="70" name="TextBox 69"/>
+            <p:cNvPr id="30" name="TextBox 29"/>
             <p:cNvSpPr txBox="1"/>
             <p:nvPr/>
           </p:nvSpPr>
@@ -22053,7 +19359,7 @@
         </p:sp>
         <p:sp>
           <p:nvSpPr>
-            <p:cNvPr id="71" name="TextBox 70"/>
+            <p:cNvPr id="31" name="TextBox 30"/>
             <p:cNvSpPr txBox="1"/>
             <p:nvPr/>
           </p:nvSpPr>
@@ -22102,7 +19408,7 @@
       </p:grpSp>
       <p:grpSp>
         <p:nvGrpSpPr>
-          <p:cNvPr id="72" name="Group 71"/>
+          <p:cNvPr id="32" name="Group 31"/>
           <p:cNvGrpSpPr/>
           <p:nvPr/>
         </p:nvGrpSpPr>
@@ -22116,7 +19422,7 @@
         </p:grpSpPr>
         <p:sp>
           <p:nvSpPr>
-            <p:cNvPr id="73" name="Rounded Rectangle 72"/>
+            <p:cNvPr id="33" name="Rounded Rectangle 32"/>
             <p:cNvSpPr/>
             <p:nvPr/>
           </p:nvSpPr>
@@ -22149,7 +19455,7 @@
         </p:sp>
         <p:sp>
           <p:nvSpPr>
-            <p:cNvPr id="74" name="Rounded Rectangle 73"/>
+            <p:cNvPr id="34" name="Rounded Rectangle 33"/>
             <p:cNvSpPr/>
             <p:nvPr/>
           </p:nvSpPr>
@@ -22180,7 +19486,7 @@
         </p:sp>
         <p:sp>
           <p:nvSpPr>
-            <p:cNvPr id="75" name="TextBox 74"/>
+            <p:cNvPr id="35" name="TextBox 34"/>
             <p:cNvSpPr txBox="1"/>
             <p:nvPr/>
           </p:nvSpPr>
@@ -22215,7 +19521,7 @@
         </p:sp>
         <p:sp>
           <p:nvSpPr>
-            <p:cNvPr id="76" name="TextBox 75"/>
+            <p:cNvPr id="36" name="TextBox 35"/>
             <p:cNvSpPr txBox="1"/>
             <p:nvPr/>
           </p:nvSpPr>
@@ -22264,7 +19570,7 @@
       </p:grpSp>
       <p:grpSp>
         <p:nvGrpSpPr>
-          <p:cNvPr id="77" name="Group 76"/>
+          <p:cNvPr id="37" name="Group 36"/>
           <p:cNvGrpSpPr/>
           <p:nvPr/>
         </p:nvGrpSpPr>
@@ -22278,7 +19584,7 @@
         </p:grpSpPr>
         <p:sp>
           <p:nvSpPr>
-            <p:cNvPr id="78" name="Rounded Rectangle 77"/>
+            <p:cNvPr id="38" name="Rounded Rectangle 37"/>
             <p:cNvSpPr/>
             <p:nvPr/>
           </p:nvSpPr>
@@ -22311,7 +19617,7 @@
         </p:sp>
         <p:sp>
           <p:nvSpPr>
-            <p:cNvPr id="79" name="Rounded Rectangle 78"/>
+            <p:cNvPr id="39" name="Rounded Rectangle 38"/>
             <p:cNvSpPr/>
             <p:nvPr/>
           </p:nvSpPr>
@@ -22342,7 +19648,7 @@
         </p:sp>
         <p:sp>
           <p:nvSpPr>
-            <p:cNvPr id="80" name="TextBox 79"/>
+            <p:cNvPr id="40" name="TextBox 39"/>
             <p:cNvSpPr txBox="1"/>
             <p:nvPr/>
           </p:nvSpPr>
@@ -22377,7 +19683,7 @@
         </p:sp>
         <p:sp>
           <p:nvSpPr>
-            <p:cNvPr id="81" name="TextBox 80"/>
+            <p:cNvPr id="41" name="TextBox 40"/>
             <p:cNvSpPr txBox="1"/>
             <p:nvPr/>
           </p:nvSpPr>
@@ -22426,7 +19732,7 @@
       </p:grpSp>
       <p:sp>
         <p:nvSpPr>
-          <p:cNvPr id="82" name="TextBox 81"/>
+          <p:cNvPr id="42" name="TextBox 41"/>
           <p:cNvSpPr txBox="1"/>
           <p:nvPr/>
         </p:nvSpPr>
@@ -22461,7 +19767,7 @@
       </p:sp>
       <p:grpSp>
         <p:nvGrpSpPr>
-          <p:cNvPr id="83" name="Group 82"/>
+          <p:cNvPr id="43" name="Group 42"/>
           <p:cNvGrpSpPr/>
           <p:nvPr/>
         </p:nvGrpSpPr>
@@ -22475,7 +19781,7 @@
         </p:grpSpPr>
         <p:sp>
           <p:nvSpPr>
-            <p:cNvPr id="84" name="Rounded Rectangle 83"/>
+            <p:cNvPr id="44" name="Rounded Rectangle 43"/>
             <p:cNvSpPr/>
             <p:nvPr/>
           </p:nvSpPr>
@@ -22511,12 +19817,21 @@
             </a:p>
           </p:txBody>
         </p:sp>
-        <p:sp>
-          <p:nvSpPr>
-            <p:cNvPr id="85" name="Rounded Rectangle 84"/>
-            <p:cNvSpPr/>
-            <p:nvPr/>
-          </p:nvSpPr>
+        <p:pic>
+          <p:nvPicPr>
+            <p:cNvPr id="45" name="Picture 44" descr="phone-approval.png"/>
+            <p:cNvPicPr>
+              <a:picLocks noChangeAspect="1"/>
+            </p:cNvPicPr>
+            <p:nvPr/>
+          </p:nvPicPr>
+          <p:blipFill>
+            <a:blip r:embed="rId3"/>
+            <a:srcRect/>
+            <a:stretch>
+              <a:fillRect/>
+            </a:stretch>
+          </p:blipFill>
           <p:spPr>
             <a:xfrm>
               <a:off x="7040880" y="1901952"/>
@@ -22524,269 +19839,15 @@
             </a:xfrm>
             <a:prstGeom prst="roundRect">
               <a:avLst>
-                <a:gd name="adj" fmla="val 11820"/>
+                <a:gd name="adj" fmla="val 13184"/>
               </a:avLst>
             </a:prstGeom>
-            <a:solidFill>
-              <a:srgbClr val="FFFDF7"/>
-            </a:solidFill>
-            <a:ln>
-              <a:noFill/>
-            </a:ln>
-          </p:spPr>
-          <p:txBody>
-            <a:bodyPr rtlCol="0" anchor="ctr"/>
-            <a:lstStyle/>
-            <a:p>
-              <a:pPr algn="ctr"/>
-            </a:p>
-          </p:txBody>
-        </p:sp>
-        <p:sp>
-          <p:nvSpPr>
-            <p:cNvPr id="86" name="TextBox 85"/>
-            <p:cNvSpPr txBox="1"/>
-            <p:nvPr/>
-          </p:nvSpPr>
-          <p:spPr>
-            <a:xfrm>
-              <a:off x="7040880" y="2176272"/>
-              <a:ext cx="2011247" cy="228600"/>
-            </a:xfrm>
-            <a:prstGeom prst="rect">
-              <a:avLst/>
-            </a:prstGeom>
-            <a:noFill/>
-          </p:spPr>
-          <p:txBody>
-            <a:bodyPr wrap="square" lIns="0" rIns="0" tIns="0" bIns="0" anchor="t">
-              <a:noAutofit/>
-            </a:bodyPr>
-            <a:lstStyle/>
-            <a:p>
-              <a:pPr algn="ctr"/>
-              <a:r>
-                <a:rPr sz="1100" b="0" i="0">
-                  <a:solidFill>
-                    <a:srgbClr val="16130E"/>
-                  </a:solidFill>
-                  <a:latin typeface="Georgia" panose="02040502050405020303" pitchFamily="18" charset="0"/>
-                </a:rPr>
-                <a:t>Bidwire</a:t>
-              </a:r>
-            </a:p>
-          </p:txBody>
-        </p:sp>
-        <p:sp>
-          <p:nvSpPr>
-            <p:cNvPr id="87" name="Rounded Rectangle 86"/>
-            <p:cNvSpPr/>
-            <p:nvPr/>
-          </p:nvSpPr>
-          <p:spPr>
-            <a:xfrm>
-              <a:off x="7168896" y="2587752"/>
-              <a:ext cx="1554047" cy="1600200"/>
-            </a:xfrm>
-            <a:prstGeom prst="roundRect">
-              <a:avLst>
-                <a:gd name="adj" fmla="val 8237"/>
-              </a:avLst>
-            </a:prstGeom>
-            <a:solidFill>
-              <a:srgbClr val="EFE8D9"/>
-            </a:solidFill>
-            <a:ln>
-              <a:noFill/>
-            </a:ln>
-          </p:spPr>
-          <p:txBody>
-            <a:bodyPr rtlCol="0" anchor="ctr"/>
-            <a:lstStyle/>
-            <a:p>
-              <a:pPr algn="ctr"/>
-            </a:p>
-          </p:txBody>
-        </p:sp>
-        <p:sp>
-          <p:nvSpPr>
-            <p:cNvPr id="88" name="TextBox 87"/>
-            <p:cNvSpPr txBox="1"/>
-            <p:nvPr/>
-          </p:nvSpPr>
-          <p:spPr>
-            <a:xfrm>
-              <a:off x="7278624" y="2679192"/>
-              <a:ext cx="1334591" cy="1463040"/>
-            </a:xfrm>
-            <a:prstGeom prst="rect">
-              <a:avLst/>
-            </a:prstGeom>
-            <a:noFill/>
-          </p:spPr>
-          <p:txBody>
-            <a:bodyPr wrap="square" lIns="0" rIns="0" tIns="0" bIns="0" anchor="t">
-              <a:noAutofit/>
-            </a:bodyPr>
-            <a:lstStyle/>
-            <a:p>
-              <a:pPr algn="l">
-                <a:lnSpc>
-                  <a:spcPct val="105000"/>
-                </a:lnSpc>
-              </a:pPr>
-              <a:r>
-                <a:rPr sz="750" b="0" i="0">
-                  <a:solidFill>
-                    <a:srgbClr val="16130E"/>
-                  </a:solidFill>
-                  <a:latin typeface="Inter" panose="020B0502030000000004" pitchFamily="34" charset="0"/>
-                </a:rPr>
-                <a:t>Your agent wants to bid $319.99 on Sennheiser Momentum 4 Wireless from Last Unit Labs (limit $300). Reply YES 1234 to approve.</a:t>
-              </a:r>
-            </a:p>
-          </p:txBody>
-        </p:sp>
-        <p:sp>
-          <p:nvSpPr>
-            <p:cNvPr id="89" name="Rounded Rectangle 88"/>
-            <p:cNvSpPr/>
-            <p:nvPr/>
-          </p:nvSpPr>
-          <p:spPr>
-            <a:xfrm>
-              <a:off x="8183447" y="4334256"/>
-              <a:ext cx="731520" cy="292608"/>
-            </a:xfrm>
-            <a:prstGeom prst="roundRect">
-              <a:avLst>
-                <a:gd name="adj" fmla="val 50000"/>
-              </a:avLst>
-            </a:prstGeom>
-            <a:solidFill>
-              <a:srgbClr val="16130E"/>
-            </a:solidFill>
-            <a:ln>
-              <a:noFill/>
-            </a:ln>
-          </p:spPr>
-          <p:txBody>
-            <a:bodyPr rtlCol="0" anchor="ctr"/>
-            <a:lstStyle/>
-            <a:p>
-              <a:pPr algn="ctr"/>
-            </a:p>
-          </p:txBody>
-        </p:sp>
-        <p:sp>
-          <p:nvSpPr>
-            <p:cNvPr id="90" name="TextBox 89"/>
-            <p:cNvSpPr txBox="1"/>
-            <p:nvPr/>
-          </p:nvSpPr>
-          <p:spPr>
-            <a:xfrm>
-              <a:off x="8183447" y="4334256"/>
-              <a:ext cx="731520" cy="292608"/>
-            </a:xfrm>
-            <a:prstGeom prst="rect">
-              <a:avLst/>
-            </a:prstGeom>
-            <a:noFill/>
-          </p:spPr>
-          <p:txBody>
-            <a:bodyPr wrap="square" lIns="0" rIns="0" tIns="0" bIns="0" anchor="ctr">
-              <a:noAutofit/>
-            </a:bodyPr>
-            <a:lstStyle/>
-            <a:p>
-              <a:pPr algn="ctr"/>
-              <a:r>
-                <a:rPr sz="800" b="1" i="0">
-                  <a:solidFill>
-                    <a:srgbClr val="FFFDF7"/>
-                  </a:solidFill>
-                  <a:latin typeface="Inter" panose="020B0502030000000004" pitchFamily="34" charset="0"/>
-                </a:rPr>
-                <a:t>YES 1234</a:t>
-              </a:r>
-            </a:p>
-          </p:txBody>
-        </p:sp>
-        <p:sp>
-          <p:nvSpPr>
-            <p:cNvPr id="91" name="TextBox 90"/>
-            <p:cNvSpPr txBox="1"/>
-            <p:nvPr/>
-          </p:nvSpPr>
-          <p:spPr>
-            <a:xfrm>
-              <a:off x="7178040" y="4828032"/>
-              <a:ext cx="1736927" cy="274320"/>
-            </a:xfrm>
-            <a:prstGeom prst="rect">
-              <a:avLst/>
-            </a:prstGeom>
-            <a:noFill/>
-          </p:spPr>
-          <p:txBody>
-            <a:bodyPr wrap="square" lIns="0" rIns="0" tIns="0" bIns="0" anchor="t">
-              <a:noAutofit/>
-            </a:bodyPr>
-            <a:lstStyle/>
-            <a:p>
-              <a:pPr algn="ctr"/>
-              <a:r>
-                <a:rPr sz="800" b="1" i="0">
-                  <a:solidFill>
-                    <a:srgbClr val="2D6A48"/>
-                  </a:solidFill>
-                  <a:latin typeface="Inter" panose="020B0502030000000004" pitchFamily="34" charset="0"/>
-                </a:rPr>
-                <a:t>Approved · sold</a:t>
-              </a:r>
-            </a:p>
-          </p:txBody>
-        </p:sp>
-        <p:sp>
-          <p:nvSpPr>
-            <p:cNvPr id="92" name="TextBox 91"/>
-            <p:cNvSpPr txBox="1"/>
-            <p:nvPr/>
-          </p:nvSpPr>
-          <p:spPr>
-            <a:xfrm>
-              <a:off x="7077456" y="6016752"/>
-              <a:ext cx="1938095" cy="182880"/>
-            </a:xfrm>
-            <a:prstGeom prst="rect">
-              <a:avLst/>
-            </a:prstGeom>
-            <a:noFill/>
-          </p:spPr>
-          <p:txBody>
-            <a:bodyPr wrap="square" lIns="0" rIns="0" tIns="0" bIns="0" anchor="ctr">
-              <a:noAutofit/>
-            </a:bodyPr>
-            <a:lstStyle/>
-            <a:p>
-              <a:pPr algn="r"/>
-              <a:r>
-                <a:rPr sz="700" b="0" i="0">
-                  <a:solidFill>
-                    <a:srgbClr val="9C937F"/>
-                  </a:solidFill>
-                  <a:latin typeface="JetBrains Mono" panose="02000009000000000000" pitchFamily="49" charset="0"/>
-                </a:rPr>
-                <a:t>Placeholder: screenshots/phone-approval.png</a:t>
-              </a:r>
-            </a:p>
-          </p:txBody>
-        </p:sp>
+          </p:spPr>
+        </p:pic>
       </p:grpSp>
       <p:grpSp>
         <p:nvGrpSpPr>
-          <p:cNvPr id="93" name="Group 92"/>
+          <p:cNvPr id="46" name="Group 45"/>
           <p:cNvGrpSpPr/>
           <p:nvPr/>
         </p:nvGrpSpPr>
@@ -22800,7 +19861,7 @@
         </p:grpSpPr>
         <p:sp>
           <p:nvSpPr>
-            <p:cNvPr id="94" name="Rounded Rectangle 93"/>
+            <p:cNvPr id="47" name="Rounded Rectangle 46"/>
             <p:cNvSpPr/>
             <p:nvPr/>
           </p:nvSpPr>
@@ -22838,7 +19899,7 @@
         </p:sp>
         <p:sp>
           <p:nvSpPr>
-            <p:cNvPr id="95" name="Rounded Rectangle 94"/>
+            <p:cNvPr id="48" name="Rounded Rectangle 47"/>
             <p:cNvSpPr/>
             <p:nvPr/>
           </p:nvSpPr>
@@ -22872,7 +19933,7 @@
       </p:grpSp>
       <p:grpSp>
         <p:nvGrpSpPr>
-          <p:cNvPr id="96" name="Group 95"/>
+          <p:cNvPr id="49" name="Group 48"/>
           <p:cNvGrpSpPr/>
           <p:nvPr/>
         </p:nvGrpSpPr>
@@ -22886,7 +19947,7 @@
         </p:grpSpPr>
         <p:sp>
           <p:nvSpPr>
-            <p:cNvPr id="97" name="TextBox 96"/>
+            <p:cNvPr id="50" name="TextBox 49"/>
             <p:cNvSpPr txBox="1"/>
             <p:nvPr/>
           </p:nvSpPr>
@@ -22914,14 +19975,14 @@
                   </a:solidFill>
                   <a:latin typeface="Georgia" panose="02040502050405020303" pitchFamily="18" charset="0"/>
                 </a:rPr>
-                <a:t>7 → 5</a:t>
+                <a:t>8 → 5</a:t>
               </a:r>
             </a:p>
           </p:txBody>
         </p:sp>
         <p:sp>
           <p:nvSpPr>
-            <p:cNvPr id="98" name="TextBox 97"/>
+            <p:cNvPr id="51" name="TextBox 50"/>
             <p:cNvSpPr txBox="1"/>
             <p:nvPr/>
           </p:nvSpPr>
@@ -22961,7 +20022,7 @@
       </p:grpSp>
       <p:sp>
         <p:nvSpPr>
-          <p:cNvPr id="99" name="Rectangle 98"/>
+          <p:cNvPr id="52" name="Rectangle 51"/>
           <p:cNvSpPr/>
           <p:nvPr/>
         </p:nvSpPr>
@@ -22990,7 +20051,7 @@
       </p:sp>
       <p:grpSp>
         <p:nvGrpSpPr>
-          <p:cNvPr id="100" name="Group 99"/>
+          <p:cNvPr id="53" name="Group 52"/>
           <p:cNvGrpSpPr/>
           <p:nvPr/>
         </p:nvGrpSpPr>
@@ -23004,7 +20065,7 @@
         </p:grpSpPr>
         <p:sp>
           <p:nvSpPr>
-            <p:cNvPr id="101" name="TextBox 100"/>
+            <p:cNvPr id="54" name="TextBox 53"/>
             <p:cNvSpPr txBox="1"/>
             <p:nvPr/>
           </p:nvSpPr>
@@ -23032,14 +20093,14 @@
                   </a:solidFill>
                   <a:latin typeface="Georgia" panose="02040502050405020303" pitchFamily="18" charset="0"/>
                 </a:rPr>
-                <a:t>2</a:t>
+                <a:t>3</a:t>
               </a:r>
             </a:p>
           </p:txBody>
         </p:sp>
         <p:sp>
           <p:nvSpPr>
-            <p:cNvPr id="102" name="TextBox 101"/>
+            <p:cNvPr id="55" name="TextBox 54"/>
             <p:cNvSpPr txBox="1"/>
             <p:nvPr/>
           </p:nvSpPr>
@@ -23071,7 +20132,7 @@
                   </a:solidFill>
                   <a:latin typeface="Inter" panose="020B0502030000000004" pitchFamily="34" charset="0"/>
                 </a:rPr>
-                <a:t>withdrawn: a hidden fee and a fake ANC claim</a:t>
+                <a:t>withdrawn: a prompt injection, a hidden checkout fee and a fake ANC claim</a:t>
               </a:r>
             </a:p>
           </p:txBody>
@@ -23079,7 +20140,7 @@
       </p:grpSp>
       <p:sp>
         <p:nvSpPr>
-          <p:cNvPr id="103" name="Rectangle 102"/>
+          <p:cNvPr id="56" name="Rectangle 55"/>
           <p:cNvSpPr/>
           <p:nvPr/>
         </p:nvSpPr>
@@ -23108,7 +20169,7 @@
       </p:sp>
       <p:grpSp>
         <p:nvGrpSpPr>
-          <p:cNvPr id="104" name="Group 103"/>
+          <p:cNvPr id="57" name="Group 56"/>
           <p:cNvGrpSpPr/>
           <p:nvPr/>
         </p:nvGrpSpPr>
@@ -23122,7 +20183,7 @@
         </p:grpSpPr>
         <p:sp>
           <p:nvSpPr>
-            <p:cNvPr id="105" name="TextBox 104"/>
+            <p:cNvPr id="58" name="TextBox 57"/>
             <p:cNvSpPr txBox="1"/>
             <p:nvPr/>
           </p:nvSpPr>
@@ -23157,7 +20218,7 @@
         </p:sp>
         <p:sp>
           <p:nvSpPr>
-            <p:cNvPr id="106" name="TextBox 105"/>
+            <p:cNvPr id="59" name="TextBox 58"/>
             <p:cNvSpPr txBox="1"/>
             <p:nvPr/>
           </p:nvSpPr>
@@ -23197,7 +20258,7 @@
       </p:grpSp>
       <p:sp>
         <p:nvSpPr>
-          <p:cNvPr id="107" name="Rectangle 106"/>
+          <p:cNvPr id="60" name="Rectangle 59"/>
           <p:cNvSpPr/>
           <p:nvPr/>
         </p:nvSpPr>
@@ -23226,7 +20287,7 @@
       </p:sp>
       <p:grpSp>
         <p:nvGrpSpPr>
-          <p:cNvPr id="108" name="Group 107"/>
+          <p:cNvPr id="61" name="Group 60"/>
           <p:cNvGrpSpPr/>
           <p:nvPr/>
         </p:nvGrpSpPr>
@@ -23240,7 +20301,7 @@
         </p:grpSpPr>
         <p:sp>
           <p:nvSpPr>
-            <p:cNvPr id="109" name="TextBox 108"/>
+            <p:cNvPr id="62" name="TextBox 61"/>
             <p:cNvSpPr txBox="1"/>
             <p:nvPr/>
           </p:nvSpPr>
@@ -23268,14 +20329,14 @@
                   </a:solidFill>
                   <a:latin typeface="Georgia" panose="02040502050405020303" pitchFamily="18" charset="0"/>
                 </a:rPr>
-                <a:t>$319.99</a:t>
+                <a:t>$368.99</a:t>
               </a:r>
             </a:p>
           </p:txBody>
         </p:sp>
         <p:sp>
           <p:nvSpPr>
-            <p:cNvPr id="110" name="TextBox 109"/>
+            <p:cNvPr id="63" name="TextBox 62"/>
             <p:cNvSpPr txBox="1"/>
             <p:nvPr/>
           </p:nvSpPr>
@@ -23590,7 +20651,7 @@
                                           </p:stCondLst>
                                         </p:cTn>
                                         <p:tgtEl>
-                                          <p:spTgt spid="67"/>
+                                          <p:spTgt spid="27"/>
                                         </p:tgtEl>
                                         <p:attrNameLst>
                                           <p:attrName>style.visibility</p:attrName>
@@ -23604,7 +20665,7 @@
                                       <p:cBhvr>
                                         <p:cTn id="23" dur="450"/>
                                         <p:tgtEl>
-                                          <p:spTgt spid="67"/>
+                                          <p:spTgt spid="27"/>
                                         </p:tgtEl>
                                       </p:cBhvr>
                                     </p:animEffect>
@@ -23612,7 +20673,7 @@
                                       <p:cBhvr additive="base">
                                         <p:cTn id="24" dur="450" fill="hold" decel="100000"/>
                                         <p:tgtEl>
-                                          <p:spTgt spid="67"/>
+                                          <p:spTgt spid="27"/>
                                         </p:tgtEl>
                                         <p:attrNameLst>
                                           <p:attrName>ppt_x</p:attrName>
@@ -23635,7 +20696,7 @@
                                       <p:cBhvr additive="base">
                                         <p:cTn id="25" dur="450" fill="hold" decel="100000"/>
                                         <p:tgtEl>
-                                          <p:spTgt spid="67"/>
+                                          <p:spTgt spid="27"/>
                                         </p:tgtEl>
                                         <p:attrNameLst>
                                           <p:attrName>ppt_y</p:attrName>
@@ -23671,7 +20732,7 @@
                                           </p:stCondLst>
                                         </p:cTn>
                                         <p:tgtEl>
-                                          <p:spTgt spid="72"/>
+                                          <p:spTgt spid="32"/>
                                         </p:tgtEl>
                                         <p:attrNameLst>
                                           <p:attrName>style.visibility</p:attrName>
@@ -23685,7 +20746,7 @@
                                       <p:cBhvr>
                                         <p:cTn id="28" dur="450"/>
                                         <p:tgtEl>
-                                          <p:spTgt spid="72"/>
+                                          <p:spTgt spid="32"/>
                                         </p:tgtEl>
                                       </p:cBhvr>
                                     </p:animEffect>
@@ -23693,7 +20754,7 @@
                                       <p:cBhvr additive="base">
                                         <p:cTn id="29" dur="450" fill="hold" decel="100000"/>
                                         <p:tgtEl>
-                                          <p:spTgt spid="72"/>
+                                          <p:spTgt spid="32"/>
                                         </p:tgtEl>
                                         <p:attrNameLst>
                                           <p:attrName>ppt_x</p:attrName>
@@ -23716,7 +20777,7 @@
                                       <p:cBhvr additive="base">
                                         <p:cTn id="30" dur="450" fill="hold" decel="100000"/>
                                         <p:tgtEl>
-                                          <p:spTgt spid="72"/>
+                                          <p:spTgt spid="32"/>
                                         </p:tgtEl>
                                         <p:attrNameLst>
                                           <p:attrName>ppt_y</p:attrName>
@@ -23752,7 +20813,7 @@
                                           </p:stCondLst>
                                         </p:cTn>
                                         <p:tgtEl>
-                                          <p:spTgt spid="77"/>
+                                          <p:spTgt spid="37"/>
                                         </p:tgtEl>
                                         <p:attrNameLst>
                                           <p:attrName>style.visibility</p:attrName>
@@ -23766,7 +20827,7 @@
                                       <p:cBhvr>
                                         <p:cTn id="33" dur="450"/>
                                         <p:tgtEl>
-                                          <p:spTgt spid="77"/>
+                                          <p:spTgt spid="37"/>
                                         </p:tgtEl>
                                       </p:cBhvr>
                                     </p:animEffect>
@@ -23774,7 +20835,7 @@
                                       <p:cBhvr additive="base">
                                         <p:cTn id="34" dur="450" fill="hold" decel="100000"/>
                                         <p:tgtEl>
-                                          <p:spTgt spid="77"/>
+                                          <p:spTgt spid="37"/>
                                         </p:tgtEl>
                                         <p:attrNameLst>
                                           <p:attrName>ppt_x</p:attrName>
@@ -23797,7 +20858,7 @@
                                       <p:cBhvr additive="base">
                                         <p:cTn id="35" dur="450" fill="hold" decel="100000"/>
                                         <p:tgtEl>
-                                          <p:spTgt spid="77"/>
+                                          <p:spTgt spid="37"/>
                                         </p:tgtEl>
                                         <p:attrNameLst>
                                           <p:attrName>ppt_y</p:attrName>
@@ -23833,7 +20894,7 @@
                                           </p:stCondLst>
                                         </p:cTn>
                                         <p:tgtEl>
-                                          <p:spTgt spid="82"/>
+                                          <p:spTgt spid="42"/>
                                         </p:tgtEl>
                                         <p:attrNameLst>
                                           <p:attrName>style.visibility</p:attrName>
@@ -23847,7 +20908,7 @@
                                       <p:cBhvr>
                                         <p:cTn id="38" dur="400"/>
                                         <p:tgtEl>
-                                          <p:spTgt spid="82"/>
+                                          <p:spTgt spid="42"/>
                                         </p:tgtEl>
                                       </p:cBhvr>
                                     </p:animEffect>
@@ -23868,7 +20929,7 @@
                                           </p:stCondLst>
                                         </p:cTn>
                                         <p:tgtEl>
-                                          <p:spTgt spid="83"/>
+                                          <p:spTgt spid="43"/>
                                         </p:tgtEl>
                                         <p:attrNameLst>
                                           <p:attrName>style.visibility</p:attrName>
@@ -23882,7 +20943,7 @@
                                       <p:cBhvr>
                                         <p:cTn id="41" dur="700"/>
                                         <p:tgtEl>
-                                          <p:spTgt spid="83"/>
+                                          <p:spTgt spid="43"/>
                                         </p:tgtEl>
                                       </p:cBhvr>
                                     </p:animEffect>
@@ -23890,7 +20951,7 @@
                                       <p:cBhvr additive="base">
                                         <p:cTn id="42" dur="700" fill="hold" decel="100000"/>
                                         <p:tgtEl>
-                                          <p:spTgt spid="83"/>
+                                          <p:spTgt spid="43"/>
                                         </p:tgtEl>
                                         <p:attrNameLst>
                                           <p:attrName>ppt_x</p:attrName>
@@ -23913,7 +20974,7 @@
                                       <p:cBhvr additive="base">
                                         <p:cTn id="43" dur="700" fill="hold" decel="100000"/>
                                         <p:tgtEl>
-                                          <p:spTgt spid="83"/>
+                                          <p:spTgt spid="43"/>
                                         </p:tgtEl>
                                         <p:attrNameLst>
                                           <p:attrName>ppt_y</p:attrName>
@@ -23949,7 +21010,7 @@
                                           </p:stCondLst>
                                         </p:cTn>
                                         <p:tgtEl>
-                                          <p:spTgt spid="93"/>
+                                          <p:spTgt spid="46"/>
                                         </p:tgtEl>
                                         <p:attrNameLst>
                                           <p:attrName>style.visibility</p:attrName>
@@ -23963,7 +21024,7 @@
                                       <p:cBhvr>
                                         <p:cTn id="46" dur="500"/>
                                         <p:tgtEl>
-                                          <p:spTgt spid="93"/>
+                                          <p:spTgt spid="46"/>
                                         </p:tgtEl>
                                       </p:cBhvr>
                                     </p:animEffect>
@@ -23971,7 +21032,7 @@
                                       <p:cBhvr additive="base">
                                         <p:cTn id="47" dur="500" fill="hold" decel="100000"/>
                                         <p:tgtEl>
-                                          <p:spTgt spid="93"/>
+                                          <p:spTgt spid="46"/>
                                         </p:tgtEl>
                                         <p:attrNameLst>
                                           <p:attrName>ppt_x</p:attrName>
@@ -23994,7 +21055,7 @@
                                       <p:cBhvr additive="base">
                                         <p:cTn id="48" dur="500" fill="hold" decel="100000"/>
                                         <p:tgtEl>
-                                          <p:spTgt spid="93"/>
+                                          <p:spTgt spid="46"/>
                                         </p:tgtEl>
                                         <p:attrNameLst>
                                           <p:attrName>ppt_y</p:attrName>
@@ -24030,7 +21091,7 @@
                                           </p:stCondLst>
                                         </p:cTn>
                                         <p:tgtEl>
-                                          <p:spTgt spid="96"/>
+                                          <p:spTgt spid="49"/>
                                         </p:tgtEl>
                                         <p:attrNameLst>
                                           <p:attrName>style.visibility</p:attrName>
@@ -24044,7 +21105,7 @@
                                       <p:cBhvr>
                                         <p:cTn id="51" dur="450"/>
                                         <p:tgtEl>
-                                          <p:spTgt spid="96"/>
+                                          <p:spTgt spid="49"/>
                                         </p:tgtEl>
                                       </p:cBhvr>
                                     </p:animEffect>
@@ -24052,7 +21113,7 @@
                                       <p:cBhvr additive="base">
                                         <p:cTn id="52" dur="450" fill="hold" decel="100000"/>
                                         <p:tgtEl>
-                                          <p:spTgt spid="96"/>
+                                          <p:spTgt spid="49"/>
                                         </p:tgtEl>
                                         <p:attrNameLst>
                                           <p:attrName>ppt_x</p:attrName>
@@ -24075,7 +21136,7 @@
                                       <p:cBhvr additive="base">
                                         <p:cTn id="53" dur="450" fill="hold" decel="100000"/>
                                         <p:tgtEl>
-                                          <p:spTgt spid="96"/>
+                                          <p:spTgt spid="49"/>
                                         </p:tgtEl>
                                         <p:attrNameLst>
                                           <p:attrName>ppt_y</p:attrName>
@@ -24111,7 +21172,7 @@
                                           </p:stCondLst>
                                         </p:cTn>
                                         <p:tgtEl>
-                                          <p:spTgt spid="100"/>
+                                          <p:spTgt spid="53"/>
                                         </p:tgtEl>
                                         <p:attrNameLst>
                                           <p:attrName>style.visibility</p:attrName>
@@ -24125,7 +21186,7 @@
                                       <p:cBhvr>
                                         <p:cTn id="56" dur="450"/>
                                         <p:tgtEl>
-                                          <p:spTgt spid="100"/>
+                                          <p:spTgt spid="53"/>
                                         </p:tgtEl>
                                       </p:cBhvr>
                                     </p:animEffect>
@@ -24133,7 +21194,7 @@
                                       <p:cBhvr additive="base">
                                         <p:cTn id="57" dur="450" fill="hold" decel="100000"/>
                                         <p:tgtEl>
-                                          <p:spTgt spid="100"/>
+                                          <p:spTgt spid="53"/>
                                         </p:tgtEl>
                                         <p:attrNameLst>
                                           <p:attrName>ppt_x</p:attrName>
@@ -24156,7 +21217,7 @@
                                       <p:cBhvr additive="base">
                                         <p:cTn id="58" dur="450" fill="hold" decel="100000"/>
                                         <p:tgtEl>
-                                          <p:spTgt spid="100"/>
+                                          <p:spTgt spid="53"/>
                                         </p:tgtEl>
                                         <p:attrNameLst>
                                           <p:attrName>ppt_y</p:attrName>
@@ -24192,7 +21253,7 @@
                                           </p:stCondLst>
                                         </p:cTn>
                                         <p:tgtEl>
-                                          <p:spTgt spid="104"/>
+                                          <p:spTgt spid="57"/>
                                         </p:tgtEl>
                                         <p:attrNameLst>
                                           <p:attrName>style.visibility</p:attrName>
@@ -24206,7 +21267,7 @@
                                       <p:cBhvr>
                                         <p:cTn id="61" dur="450"/>
                                         <p:tgtEl>
-                                          <p:spTgt spid="104"/>
+                                          <p:spTgt spid="57"/>
                                         </p:tgtEl>
                                       </p:cBhvr>
                                     </p:animEffect>
@@ -24214,7 +21275,7 @@
                                       <p:cBhvr additive="base">
                                         <p:cTn id="62" dur="450" fill="hold" decel="100000"/>
                                         <p:tgtEl>
-                                          <p:spTgt spid="104"/>
+                                          <p:spTgt spid="57"/>
                                         </p:tgtEl>
                                         <p:attrNameLst>
                                           <p:attrName>ppt_x</p:attrName>
@@ -24237,7 +21298,7 @@
                                       <p:cBhvr additive="base">
                                         <p:cTn id="63" dur="450" fill="hold" decel="100000"/>
                                         <p:tgtEl>
-                                          <p:spTgt spid="104"/>
+                                          <p:spTgt spid="57"/>
                                         </p:tgtEl>
                                         <p:attrNameLst>
                                           <p:attrName>ppt_y</p:attrName>
@@ -24273,7 +21334,7 @@
                                           </p:stCondLst>
                                         </p:cTn>
                                         <p:tgtEl>
-                                          <p:spTgt spid="108"/>
+                                          <p:spTgt spid="61"/>
                                         </p:tgtEl>
                                         <p:attrNameLst>
                                           <p:attrName>style.visibility</p:attrName>
@@ -24287,7 +21348,7 @@
                                       <p:cBhvr>
                                         <p:cTn id="66" dur="450"/>
                                         <p:tgtEl>
-                                          <p:spTgt spid="108"/>
+                                          <p:spTgt spid="61"/>
                                         </p:tgtEl>
                                       </p:cBhvr>
                                     </p:animEffect>
@@ -24295,7 +21356,7 @@
                                       <p:cBhvr additive="base">
                                         <p:cTn id="67" dur="450" fill="hold" decel="100000"/>
                                         <p:tgtEl>
-                                          <p:spTgt spid="108"/>
+                                          <p:spTgt spid="61"/>
                                         </p:tgtEl>
                                         <p:attrNameLst>
                                           <p:attrName>ppt_x</p:attrName>
@@ -24318,7 +21379,7 @@
                                       <p:cBhvr additive="base">
                                         <p:cTn id="68" dur="450" fill="hold" decel="100000"/>
                                         <p:tgtEl>
-                                          <p:spTgt spid="108"/>
+                                          <p:spTgt spid="61"/>
                                         </p:tgtEl>
                                         <p:attrNameLst>
                                           <p:attrName>ppt_y</p:attrName>
@@ -24371,7 +21432,7 @@
       <p:bldP spid="15" grpId="0" animBg="1"/>
       <p:bldP spid="16" grpId="0" animBg="1"/>
       <p:bldP spid="17" grpId="0" animBg="1"/>
-      <p:bldP spid="82" grpId="0" animBg="1"/>
+      <p:bldP spid="42" grpId="0" animBg="1"/>
     </p:bldLst>
   </p:timing>
 </p:sld>
@@ -27051,7 +24112,7 @@
                 </a:solidFill>
                 <a:latin typeface="JetBrains Mono" panose="02000009000000000000" pitchFamily="49" charset="0"/>
               </a:rPr>
-              <a:t>← 7 paddles → 5 verified · 2 withdrawn · ranked</a:t>
+              <a:t>← 8 paddles → 5 verified · 3 withdrawn · ranked</a:t>
             </a:r>
           </a:p>
         </p:txBody>
@@ -41122,7 +38183,7 @@
                   </a:solidFill>
                   <a:latin typeface="Georgia" panose="02040502050405020303" pitchFamily="18" charset="0"/>
                 </a:rPr>
-                <a:t>9,415</a:t>
+                <a:t>9,697</a:t>
               </a:r>
             </a:p>
           </p:txBody>

--- a/docs/deck/Bidwire.pptx
+++ b/docs/deck/Bidwire.pptx
@@ -5305,7 +5305,7 @@
           </p:nvPicPr>
           <p:blipFill>
             <a:blip r:embed="rId2"/>
-            <a:srcRect/>
+            <a:srcRect r="34000" b="34000"/>
             <a:stretch>
               <a:fillRect/>
             </a:stretch>
@@ -19226,7 +19226,7 @@
           </p:nvPicPr>
           <p:blipFill>
             <a:blip r:embed="rId2"/>
-            <a:srcRect/>
+            <a:srcRect r="34000" b="34000"/>
             <a:stretch>
               <a:fillRect/>
             </a:stretch>
